--- a/outputs/presentations/HIV Prioritization Tool MVP.pptx
+++ b/outputs/presentations/HIV Prioritization Tool MVP.pptx
@@ -5,32 +5,34 @@
     <p:sldMasterId id="2147483648" r:id="rId4"/>
   </p:sldMasterIdLst>
   <p:notesMasterIdLst>
-    <p:notesMasterId r:id="rId25"/>
+    <p:notesMasterId r:id="rId27"/>
   </p:notesMasterIdLst>
   <p:handoutMasterIdLst>
-    <p:handoutMasterId r:id="rId26"/>
+    <p:handoutMasterId r:id="rId28"/>
   </p:handoutMasterIdLst>
   <p:sldIdLst>
     <p:sldId id="287" r:id="rId5"/>
     <p:sldId id="285" r:id="rId6"/>
     <p:sldId id="300" r:id="rId7"/>
     <p:sldId id="301" r:id="rId8"/>
-    <p:sldId id="302" r:id="rId9"/>
-    <p:sldId id="303" r:id="rId10"/>
-    <p:sldId id="284" r:id="rId11"/>
-    <p:sldId id="286" r:id="rId12"/>
-    <p:sldId id="289" r:id="rId13"/>
-    <p:sldId id="275" r:id="rId14"/>
-    <p:sldId id="290" r:id="rId15"/>
-    <p:sldId id="291" r:id="rId16"/>
-    <p:sldId id="292" r:id="rId17"/>
-    <p:sldId id="293" r:id="rId18"/>
-    <p:sldId id="294" r:id="rId19"/>
-    <p:sldId id="295" r:id="rId20"/>
-    <p:sldId id="296" r:id="rId21"/>
-    <p:sldId id="297" r:id="rId22"/>
-    <p:sldId id="298" r:id="rId23"/>
-    <p:sldId id="299" r:id="rId24"/>
+    <p:sldId id="304" r:id="rId9"/>
+    <p:sldId id="305" r:id="rId10"/>
+    <p:sldId id="302" r:id="rId11"/>
+    <p:sldId id="303" r:id="rId12"/>
+    <p:sldId id="284" r:id="rId13"/>
+    <p:sldId id="286" r:id="rId14"/>
+    <p:sldId id="289" r:id="rId15"/>
+    <p:sldId id="275" r:id="rId16"/>
+    <p:sldId id="290" r:id="rId17"/>
+    <p:sldId id="291" r:id="rId18"/>
+    <p:sldId id="292" r:id="rId19"/>
+    <p:sldId id="293" r:id="rId20"/>
+    <p:sldId id="294" r:id="rId21"/>
+    <p:sldId id="295" r:id="rId22"/>
+    <p:sldId id="296" r:id="rId23"/>
+    <p:sldId id="297" r:id="rId24"/>
+    <p:sldId id="298" r:id="rId25"/>
+    <p:sldId id="299" r:id="rId26"/>
   </p:sldIdLst>
   <p:sldSz cx="12192000" cy="6858000"/>
   <p:notesSz cx="6858000" cy="9144000"/>
@@ -144,6 +146,158 @@
 <p188:authorLst xmlns:a="http://schemas.openxmlformats.org/drawingml/2006/main" xmlns:r="http://schemas.openxmlformats.org/officeDocument/2006/relationships" xmlns:p188="http://schemas.microsoft.com/office/powerpoint/2018/8/main">
   <p188:author id="{9FD3FEF4-AEAF-917A-C660-C5359E089327}" name="Alex de Nooy" initials="Ad" userId="2ae90f5cbd0fd171" providerId="Windows Live"/>
 </p188:authorLst>
+</file>
+
+<file path=ppt/revisionInfo.xml><?xml version="1.0" encoding="utf-8"?>
+<p1510:revInfo xmlns:a="http://schemas.openxmlformats.org/drawingml/2006/main" xmlns:r="http://schemas.openxmlformats.org/officeDocument/2006/relationships" xmlns:p1510="http://schemas.microsoft.com/office/powerpoint/2015/10/main">
+  <p1510:revLst>
+    <p1510:client id="{7B014B3E-5796-2D47-8EDF-95DBB63C553D}" v="9" dt="2026-02-06T13:03:55.610"/>
+  </p1510:revLst>
+</p1510:revInfo>
+</file>
+
+<file path=ppt/changesInfos/changesInfo1.xml><?xml version="1.0" encoding="utf-8"?>
+<pc:chgInfo xmlns:a="http://schemas.openxmlformats.org/drawingml/2006/main" xmlns:r="http://schemas.openxmlformats.org/officeDocument/2006/relationships" xmlns:ac="http://schemas.microsoft.com/office/drawing/2013/main/command" xmlns:pc="http://schemas.microsoft.com/office/powerpoint/2013/main/command">
+  <pc:docChgLst>
+    <pc:chgData name="Alex de Nooy" userId="2ae90f5cbd0fd171" providerId="LiveId" clId="{68FAF11D-BE20-5239-B1D5-2BBFAE7D07C1}"/>
+    <pc:docChg chg="undo custSel addSld modSld">
+      <pc:chgData name="Alex de Nooy" userId="2ae90f5cbd0fd171" providerId="LiveId" clId="{68FAF11D-BE20-5239-B1D5-2BBFAE7D07C1}" dt="2026-02-06T13:05:39.958" v="818" actId="2890"/>
+      <pc:docMkLst>
+        <pc:docMk/>
+      </pc:docMkLst>
+      <pc:sldChg chg="modSp mod">
+        <pc:chgData name="Alex de Nooy" userId="2ae90f5cbd0fd171" providerId="LiveId" clId="{68FAF11D-BE20-5239-B1D5-2BBFAE7D07C1}" dt="2026-02-06T12:22:31.805" v="79"/>
+        <pc:sldMkLst>
+          <pc:docMk/>
+          <pc:sldMk cId="1689077881" sldId="285"/>
+        </pc:sldMkLst>
+        <pc:spChg chg="mod">
+          <ac:chgData name="Alex de Nooy" userId="2ae90f5cbd0fd171" providerId="LiveId" clId="{68FAF11D-BE20-5239-B1D5-2BBFAE7D07C1}" dt="2026-02-06T12:22:31.805" v="79"/>
+          <ac:spMkLst>
+            <pc:docMk/>
+            <pc:sldMk cId="1689077881" sldId="285"/>
+            <ac:spMk id="3" creationId="{04DD0E3C-3675-44C6-AE22-972FDE27B6FE}"/>
+          </ac:spMkLst>
+        </pc:spChg>
+      </pc:sldChg>
+      <pc:sldChg chg="modSp mod">
+        <pc:chgData name="Alex de Nooy" userId="2ae90f5cbd0fd171" providerId="LiveId" clId="{68FAF11D-BE20-5239-B1D5-2BBFAE7D07C1}" dt="2026-02-06T12:58:15.473" v="739" actId="1076"/>
+        <pc:sldMkLst>
+          <pc:docMk/>
+          <pc:sldMk cId="2652198588" sldId="300"/>
+        </pc:sldMkLst>
+        <pc:spChg chg="mod">
+          <ac:chgData name="Alex de Nooy" userId="2ae90f5cbd0fd171" providerId="LiveId" clId="{68FAF11D-BE20-5239-B1D5-2BBFAE7D07C1}" dt="2026-02-06T12:58:15.473" v="739" actId="1076"/>
+          <ac:spMkLst>
+            <pc:docMk/>
+            <pc:sldMk cId="2652198588" sldId="300"/>
+            <ac:spMk id="2" creationId="{5157EA78-41F6-5DDE-D298-774727701155}"/>
+          </ac:spMkLst>
+        </pc:spChg>
+        <pc:spChg chg="mod">
+          <ac:chgData name="Alex de Nooy" userId="2ae90f5cbd0fd171" providerId="LiveId" clId="{68FAF11D-BE20-5239-B1D5-2BBFAE7D07C1}" dt="2026-02-06T12:58:02.250" v="737" actId="14100"/>
+          <ac:spMkLst>
+            <pc:docMk/>
+            <pc:sldMk cId="2652198588" sldId="300"/>
+            <ac:spMk id="3" creationId="{786B0ECF-EB27-F0EA-A3A1-F19F1C60C491}"/>
+          </ac:spMkLst>
+        </pc:spChg>
+      </pc:sldChg>
+      <pc:sldChg chg="addSp delSp modSp mod">
+        <pc:chgData name="Alex de Nooy" userId="2ae90f5cbd0fd171" providerId="LiveId" clId="{68FAF11D-BE20-5239-B1D5-2BBFAE7D07C1}" dt="2026-02-06T13:04:45.845" v="806" actId="207"/>
+        <pc:sldMkLst>
+          <pc:docMk/>
+          <pc:sldMk cId="1582774337" sldId="301"/>
+        </pc:sldMkLst>
+        <pc:spChg chg="mod">
+          <ac:chgData name="Alex de Nooy" userId="2ae90f5cbd0fd171" providerId="LiveId" clId="{68FAF11D-BE20-5239-B1D5-2BBFAE7D07C1}" dt="2026-02-06T13:04:45.845" v="806" actId="207"/>
+          <ac:spMkLst>
+            <pc:docMk/>
+            <pc:sldMk cId="1582774337" sldId="301"/>
+            <ac:spMk id="2" creationId="{07466AF4-2784-0696-F964-8D235C66DF3D}"/>
+          </ac:spMkLst>
+        </pc:spChg>
+        <pc:spChg chg="del">
+          <ac:chgData name="Alex de Nooy" userId="2ae90f5cbd0fd171" providerId="LiveId" clId="{68FAF11D-BE20-5239-B1D5-2BBFAE7D07C1}" dt="2026-02-06T12:58:27.983" v="740" actId="478"/>
+          <ac:spMkLst>
+            <pc:docMk/>
+            <pc:sldMk cId="1582774337" sldId="301"/>
+            <ac:spMk id="3" creationId="{B9950C3B-9FDE-9620-8662-C47749065F6F}"/>
+          </ac:spMkLst>
+        </pc:spChg>
+        <pc:spChg chg="add del mod">
+          <ac:chgData name="Alex de Nooy" userId="2ae90f5cbd0fd171" providerId="LiveId" clId="{68FAF11D-BE20-5239-B1D5-2BBFAE7D07C1}" dt="2026-02-06T12:59:12.996" v="741" actId="478"/>
+          <ac:spMkLst>
+            <pc:docMk/>
+            <pc:sldMk cId="1582774337" sldId="301"/>
+            <ac:spMk id="5" creationId="{64FC47E4-5ADF-7B3D-27CA-2E80CFF7C4EB}"/>
+          </ac:spMkLst>
+        </pc:spChg>
+        <pc:graphicFrameChg chg="add mod modGraphic">
+          <ac:chgData name="Alex de Nooy" userId="2ae90f5cbd0fd171" providerId="LiveId" clId="{68FAF11D-BE20-5239-B1D5-2BBFAE7D07C1}" dt="2026-02-06T13:01:39.120" v="772" actId="207"/>
+          <ac:graphicFrameMkLst>
+            <pc:docMk/>
+            <pc:sldMk cId="1582774337" sldId="301"/>
+            <ac:graphicFrameMk id="6" creationId="{F880109A-133C-CBC5-35D3-2E42F8B90261}"/>
+          </ac:graphicFrameMkLst>
+        </pc:graphicFrameChg>
+      </pc:sldChg>
+      <pc:sldChg chg="modSp mod">
+        <pc:chgData name="Alex de Nooy" userId="2ae90f5cbd0fd171" providerId="LiveId" clId="{68FAF11D-BE20-5239-B1D5-2BBFAE7D07C1}" dt="2026-02-06T13:05:36.647" v="817" actId="20577"/>
+        <pc:sldMkLst>
+          <pc:docMk/>
+          <pc:sldMk cId="1029131453" sldId="302"/>
+        </pc:sldMkLst>
+        <pc:spChg chg="mod">
+          <ac:chgData name="Alex de Nooy" userId="2ae90f5cbd0fd171" providerId="LiveId" clId="{68FAF11D-BE20-5239-B1D5-2BBFAE7D07C1}" dt="2026-02-06T13:05:36.647" v="817" actId="20577"/>
+          <ac:spMkLst>
+            <pc:docMk/>
+            <pc:sldMk cId="1029131453" sldId="302"/>
+            <ac:spMk id="2" creationId="{A7AD0F49-C424-9CD6-66BB-8900E66191CF}"/>
+          </ac:spMkLst>
+        </pc:spChg>
+      </pc:sldChg>
+      <pc:sldChg chg="addSp delSp modSp add mod">
+        <pc:chgData name="Alex de Nooy" userId="2ae90f5cbd0fd171" providerId="LiveId" clId="{68FAF11D-BE20-5239-B1D5-2BBFAE7D07C1}" dt="2026-02-06T13:05:21.696" v="808" actId="207"/>
+        <pc:sldMkLst>
+          <pc:docMk/>
+          <pc:sldMk cId="4008255750" sldId="304"/>
+        </pc:sldMkLst>
+        <pc:spChg chg="mod">
+          <ac:chgData name="Alex de Nooy" userId="2ae90f5cbd0fd171" providerId="LiveId" clId="{68FAF11D-BE20-5239-B1D5-2BBFAE7D07C1}" dt="2026-02-06T13:05:08.341" v="807" actId="207"/>
+          <ac:spMkLst>
+            <pc:docMk/>
+            <pc:sldMk cId="4008255750" sldId="304"/>
+            <ac:spMk id="2" creationId="{F1356E3F-A3A5-7BF8-230F-1440108EFAD4}"/>
+          </ac:spMkLst>
+        </pc:spChg>
+        <pc:graphicFrameChg chg="add del mod modGraphic">
+          <ac:chgData name="Alex de Nooy" userId="2ae90f5cbd0fd171" providerId="LiveId" clId="{68FAF11D-BE20-5239-B1D5-2BBFAE7D07C1}" dt="2026-02-06T13:03:17.736" v="788" actId="478"/>
+          <ac:graphicFrameMkLst>
+            <pc:docMk/>
+            <pc:sldMk cId="4008255750" sldId="304"/>
+            <ac:graphicFrameMk id="3" creationId="{1BE7CB89-911D-566D-F7AF-C8831EEE3B20}"/>
+          </ac:graphicFrameMkLst>
+        </pc:graphicFrameChg>
+        <pc:graphicFrameChg chg="mod modGraphic">
+          <ac:chgData name="Alex de Nooy" userId="2ae90f5cbd0fd171" providerId="LiveId" clId="{68FAF11D-BE20-5239-B1D5-2BBFAE7D07C1}" dt="2026-02-06T13:05:21.696" v="808" actId="207"/>
+          <ac:graphicFrameMkLst>
+            <pc:docMk/>
+            <pc:sldMk cId="4008255750" sldId="304"/>
+            <ac:graphicFrameMk id="6" creationId="{2F611F5E-C8B2-5AA9-4D42-04C42B600A1E}"/>
+          </ac:graphicFrameMkLst>
+        </pc:graphicFrameChg>
+      </pc:sldChg>
+      <pc:sldChg chg="add">
+        <pc:chgData name="Alex de Nooy" userId="2ae90f5cbd0fd171" providerId="LiveId" clId="{68FAF11D-BE20-5239-B1D5-2BBFAE7D07C1}" dt="2026-02-06T13:05:39.958" v="818" actId="2890"/>
+        <pc:sldMkLst>
+          <pc:docMk/>
+          <pc:sldMk cId="1714471306" sldId="305"/>
+        </pc:sldMkLst>
+      </pc:sldChg>
+    </pc:docChg>
+  </pc:docChgLst>
+</pc:chgInfo>
 </file>
 
 <file path=ppt/charts/chart1.xml><?xml version="1.0" encoding="utf-8"?>
@@ -4461,7 +4615,7 @@
               <a:rPr lang="de-DE" smtClean="0">
                 <a:latin typeface="Verdana" panose="020B0604030504040204" pitchFamily="34" charset="0"/>
               </a:rPr>
-              <a:t>03.02.26</a:t>
+              <a:t>06.02.26</a:t>
             </a:fld>
             <a:endParaRPr lang="de-DE" dirty="0">
               <a:latin typeface="Verdana" panose="020B0604030504040204" pitchFamily="34" charset="0"/>
@@ -4651,7 +4805,7 @@
             <a:fld id="{59AF585C-AB1D-41F5-8A22-EE236ED1EB54}" type="datetimeFigureOut">
               <a:rPr lang="de-DE" smtClean="0"/>
               <a:pPr/>
-              <a:t>03.02.26</a:t>
+              <a:t>06.02.26</a:t>
             </a:fld>
             <a:endParaRPr lang="de-DE" dirty="0"/>
           </a:p>
@@ -4967,6 +5121,285 @@
           <a:bodyPr/>
           <a:lstStyle/>
           <a:p>
+            <a:endParaRPr lang="en-GB" dirty="0"/>
+          </a:p>
+        </p:txBody>
+      </p:sp>
+      <p:sp>
+        <p:nvSpPr>
+          <p:cNvPr id="4" name="Slide Number Placeholder 3"/>
+          <p:cNvSpPr>
+            <a:spLocks noGrp="1"/>
+          </p:cNvSpPr>
+          <p:nvPr>
+            <p:ph type="sldNum" sz="quarter" idx="5"/>
+          </p:nvPr>
+        </p:nvSpPr>
+        <p:spPr/>
+        <p:txBody>
+          <a:bodyPr/>
+          <a:lstStyle/>
+          <a:p>
+            <a:fld id="{F6DADB82-A706-4784-AE8E-3965AD040C7C}" type="slidenum">
+              <a:rPr lang="de-DE" smtClean="0"/>
+              <a:pPr/>
+              <a:t>3</a:t>
+            </a:fld>
+            <a:endParaRPr lang="de-DE" dirty="0"/>
+          </a:p>
+        </p:txBody>
+      </p:sp>
+    </p:spTree>
+    <p:extLst>
+      <p:ext uri="{BB962C8B-B14F-4D97-AF65-F5344CB8AC3E}">
+        <p14:creationId xmlns:p14="http://schemas.microsoft.com/office/powerpoint/2010/main" val="1941132721"/>
+      </p:ext>
+    </p:extLst>
+  </p:cSld>
+  <p:clrMapOvr>
+    <a:masterClrMapping/>
+  </p:clrMapOvr>
+</p:notes>
+</file>
+
+<file path=ppt/notesSlides/notesSlide2.xml><?xml version="1.0" encoding="utf-8"?>
+<p:notes xmlns:a="http://schemas.openxmlformats.org/drawingml/2006/main" xmlns:r="http://schemas.openxmlformats.org/officeDocument/2006/relationships" xmlns:p="http://schemas.openxmlformats.org/presentationml/2006/main">
+  <p:cSld>
+    <p:spTree>
+      <p:nvGrpSpPr>
+        <p:cNvPr id="1" name=""/>
+        <p:cNvGrpSpPr/>
+        <p:nvPr/>
+      </p:nvGrpSpPr>
+      <p:grpSpPr>
+        <a:xfrm>
+          <a:off x="0" y="0"/>
+          <a:ext cx="0" cy="0"/>
+          <a:chOff x="0" y="0"/>
+          <a:chExt cx="0" cy="0"/>
+        </a:xfrm>
+      </p:grpSpPr>
+      <p:sp>
+        <p:nvSpPr>
+          <p:cNvPr id="2" name="Slide Image Placeholder 1"/>
+          <p:cNvSpPr>
+            <a:spLocks noGrp="1" noRot="1" noChangeAspect="1"/>
+          </p:cNvSpPr>
+          <p:nvPr>
+            <p:ph type="sldImg"/>
+          </p:nvPr>
+        </p:nvSpPr>
+        <p:spPr/>
+      </p:sp>
+      <p:sp>
+        <p:nvSpPr>
+          <p:cNvPr id="3" name="Notes Placeholder 2"/>
+          <p:cNvSpPr>
+            <a:spLocks noGrp="1"/>
+          </p:cNvSpPr>
+          <p:nvPr>
+            <p:ph type="body" idx="1"/>
+          </p:nvPr>
+        </p:nvSpPr>
+        <p:spPr/>
+        <p:txBody>
+          <a:bodyPr/>
+          <a:lstStyle/>
+          <a:p>
+            <a:endParaRPr lang="en-GB" dirty="0"/>
+          </a:p>
+        </p:txBody>
+      </p:sp>
+      <p:sp>
+        <p:nvSpPr>
+          <p:cNvPr id="4" name="Slide Number Placeholder 3"/>
+          <p:cNvSpPr>
+            <a:spLocks noGrp="1"/>
+          </p:cNvSpPr>
+          <p:nvPr>
+            <p:ph type="sldNum" sz="quarter" idx="5"/>
+          </p:nvPr>
+        </p:nvSpPr>
+        <p:spPr/>
+        <p:txBody>
+          <a:bodyPr/>
+          <a:lstStyle/>
+          <a:p>
+            <a:fld id="{F6DADB82-A706-4784-AE8E-3965AD040C7C}" type="slidenum">
+              <a:rPr lang="de-DE" smtClean="0"/>
+              <a:pPr/>
+              <a:t>5</a:t>
+            </a:fld>
+            <a:endParaRPr lang="de-DE" dirty="0"/>
+          </a:p>
+        </p:txBody>
+      </p:sp>
+    </p:spTree>
+    <p:extLst>
+      <p:ext uri="{BB962C8B-B14F-4D97-AF65-F5344CB8AC3E}">
+        <p14:creationId xmlns:p14="http://schemas.microsoft.com/office/powerpoint/2010/main" val="3344608199"/>
+      </p:ext>
+    </p:extLst>
+  </p:cSld>
+  <p:clrMapOvr>
+    <a:masterClrMapping/>
+  </p:clrMapOvr>
+</p:notes>
+</file>
+
+<file path=ppt/notesSlides/notesSlide3.xml><?xml version="1.0" encoding="utf-8"?>
+<p:notes xmlns:a="http://schemas.openxmlformats.org/drawingml/2006/main" xmlns:r="http://schemas.openxmlformats.org/officeDocument/2006/relationships" xmlns:p="http://schemas.openxmlformats.org/presentationml/2006/main">
+  <p:cSld>
+    <p:spTree>
+      <p:nvGrpSpPr>
+        <p:cNvPr id="1" name="">
+          <a:extLst>
+            <a:ext uri="{FF2B5EF4-FFF2-40B4-BE49-F238E27FC236}">
+              <a16:creationId xmlns:a16="http://schemas.microsoft.com/office/drawing/2014/main" id="{C2C2AFC8-67E5-4BC8-26B0-D83CEB7EB9D5}"/>
+            </a:ext>
+          </a:extLst>
+        </p:cNvPr>
+        <p:cNvGrpSpPr/>
+        <p:nvPr/>
+      </p:nvGrpSpPr>
+      <p:grpSpPr>
+        <a:xfrm>
+          <a:off x="0" y="0"/>
+          <a:ext cx="0" cy="0"/>
+          <a:chOff x="0" y="0"/>
+          <a:chExt cx="0" cy="0"/>
+        </a:xfrm>
+      </p:grpSpPr>
+      <p:sp>
+        <p:nvSpPr>
+          <p:cNvPr id="2" name="Slide Image Placeholder 1">
+            <a:extLst>
+              <a:ext uri="{FF2B5EF4-FFF2-40B4-BE49-F238E27FC236}">
+                <a16:creationId xmlns:a16="http://schemas.microsoft.com/office/drawing/2014/main" id="{249B26B7-EBF7-FD1A-6B38-B43D678AA783}"/>
+              </a:ext>
+            </a:extLst>
+          </p:cNvPr>
+          <p:cNvSpPr>
+            <a:spLocks noGrp="1" noRot="1" noChangeAspect="1"/>
+          </p:cNvSpPr>
+          <p:nvPr>
+            <p:ph type="sldImg"/>
+          </p:nvPr>
+        </p:nvSpPr>
+        <p:spPr/>
+      </p:sp>
+      <p:sp>
+        <p:nvSpPr>
+          <p:cNvPr id="3" name="Notes Placeholder 2">
+            <a:extLst>
+              <a:ext uri="{FF2B5EF4-FFF2-40B4-BE49-F238E27FC236}">
+                <a16:creationId xmlns:a16="http://schemas.microsoft.com/office/drawing/2014/main" id="{0D991AFB-211F-CC39-346A-8FEB0376A97C}"/>
+              </a:ext>
+            </a:extLst>
+          </p:cNvPr>
+          <p:cNvSpPr>
+            <a:spLocks noGrp="1"/>
+          </p:cNvSpPr>
+          <p:nvPr>
+            <p:ph type="body" idx="1"/>
+          </p:nvPr>
+        </p:nvSpPr>
+        <p:spPr/>
+        <p:txBody>
+          <a:bodyPr/>
+          <a:lstStyle/>
+          <a:p>
+            <a:endParaRPr lang="en-GB" dirty="0"/>
+          </a:p>
+        </p:txBody>
+      </p:sp>
+      <p:sp>
+        <p:nvSpPr>
+          <p:cNvPr id="4" name="Slide Number Placeholder 3">
+            <a:extLst>
+              <a:ext uri="{FF2B5EF4-FFF2-40B4-BE49-F238E27FC236}">
+                <a16:creationId xmlns:a16="http://schemas.microsoft.com/office/drawing/2014/main" id="{4EB3764A-44E2-1A06-A279-A6AF1085FE16}"/>
+              </a:ext>
+            </a:extLst>
+          </p:cNvPr>
+          <p:cNvSpPr>
+            <a:spLocks noGrp="1"/>
+          </p:cNvSpPr>
+          <p:nvPr>
+            <p:ph type="sldNum" sz="quarter" idx="5"/>
+          </p:nvPr>
+        </p:nvSpPr>
+        <p:spPr/>
+        <p:txBody>
+          <a:bodyPr/>
+          <a:lstStyle/>
+          <a:p>
+            <a:fld id="{F6DADB82-A706-4784-AE8E-3965AD040C7C}" type="slidenum">
+              <a:rPr lang="de-DE" smtClean="0"/>
+              <a:pPr/>
+              <a:t>6</a:t>
+            </a:fld>
+            <a:endParaRPr lang="de-DE" dirty="0"/>
+          </a:p>
+        </p:txBody>
+      </p:sp>
+    </p:spTree>
+    <p:extLst>
+      <p:ext uri="{BB962C8B-B14F-4D97-AF65-F5344CB8AC3E}">
+        <p14:creationId xmlns:p14="http://schemas.microsoft.com/office/powerpoint/2010/main" val="1577813951"/>
+      </p:ext>
+    </p:extLst>
+  </p:cSld>
+  <p:clrMapOvr>
+    <a:masterClrMapping/>
+  </p:clrMapOvr>
+</p:notes>
+</file>
+
+<file path=ppt/notesSlides/notesSlide4.xml><?xml version="1.0" encoding="utf-8"?>
+<p:notes xmlns:a="http://schemas.openxmlformats.org/drawingml/2006/main" xmlns:r="http://schemas.openxmlformats.org/officeDocument/2006/relationships" xmlns:p="http://schemas.openxmlformats.org/presentationml/2006/main">
+  <p:cSld>
+    <p:spTree>
+      <p:nvGrpSpPr>
+        <p:cNvPr id="1" name=""/>
+        <p:cNvGrpSpPr/>
+        <p:nvPr/>
+      </p:nvGrpSpPr>
+      <p:grpSpPr>
+        <a:xfrm>
+          <a:off x="0" y="0"/>
+          <a:ext cx="0" cy="0"/>
+          <a:chOff x="0" y="0"/>
+          <a:chExt cx="0" cy="0"/>
+        </a:xfrm>
+      </p:grpSpPr>
+      <p:sp>
+        <p:nvSpPr>
+          <p:cNvPr id="2" name="Slide Image Placeholder 1"/>
+          <p:cNvSpPr>
+            <a:spLocks noGrp="1" noRot="1" noChangeAspect="1"/>
+          </p:cNvSpPr>
+          <p:nvPr>
+            <p:ph type="sldImg"/>
+          </p:nvPr>
+        </p:nvSpPr>
+        <p:spPr/>
+      </p:sp>
+      <p:sp>
+        <p:nvSpPr>
+          <p:cNvPr id="3" name="Notes Placeholder 2"/>
+          <p:cNvSpPr>
+            <a:spLocks noGrp="1"/>
+          </p:cNvSpPr>
+          <p:nvPr>
+            <p:ph type="body" idx="1"/>
+          </p:nvPr>
+        </p:nvSpPr>
+        <p:spPr/>
+        <p:txBody>
+          <a:bodyPr/>
+          <a:lstStyle/>
+          <a:p>
             <a:pPr lvl="0"/>
             <a:r>
               <a:rPr lang="en-GB" sz="1200" b="0" i="0" kern="1200" dirty="0">
@@ -5229,7 +5662,7 @@
             <a:fld id="{F6DADB82-A706-4784-AE8E-3965AD040C7C}" type="slidenum">
               <a:rPr lang="de-DE" smtClean="0"/>
               <a:pPr/>
-              <a:t>9</a:t>
+              <a:t>11</a:t>
             </a:fld>
             <a:endParaRPr lang="de-DE" dirty="0"/>
           </a:p>
@@ -7373,6 +7806,341 @@
 </file>
 
 <file path=ppt/slides/slide10.xml><?xml version="1.0" encoding="utf-8"?>
+<p:sld xmlns:a="http://schemas.openxmlformats.org/drawingml/2006/main" xmlns:r="http://schemas.openxmlformats.org/officeDocument/2006/relationships" xmlns:p="http://schemas.openxmlformats.org/presentationml/2006/main">
+  <p:cSld>
+    <p:spTree>
+      <p:nvGrpSpPr>
+        <p:cNvPr id="1" name=""/>
+        <p:cNvGrpSpPr/>
+        <p:nvPr/>
+      </p:nvGrpSpPr>
+      <p:grpSpPr>
+        <a:xfrm>
+          <a:off x="0" y="0"/>
+          <a:ext cx="0" cy="0"/>
+          <a:chOff x="0" y="0"/>
+          <a:chExt cx="0" cy="0"/>
+        </a:xfrm>
+      </p:grpSpPr>
+      <p:sp>
+        <p:nvSpPr>
+          <p:cNvPr id="2" name="Titel 1">
+            <a:extLst>
+              <a:ext uri="{FF2B5EF4-FFF2-40B4-BE49-F238E27FC236}">
+                <a16:creationId xmlns:a16="http://schemas.microsoft.com/office/drawing/2014/main" id="{246EB762-B210-4CC4-9F39-572EC03B556D}"/>
+              </a:ext>
+            </a:extLst>
+          </p:cNvPr>
+          <p:cNvSpPr>
+            <a:spLocks noGrp="1"/>
+          </p:cNvSpPr>
+          <p:nvPr>
+            <p:ph type="title"/>
+          </p:nvPr>
+        </p:nvSpPr>
+        <p:spPr/>
+        <p:txBody>
+          <a:bodyPr/>
+          <a:lstStyle/>
+          <a:p>
+            <a:r>
+              <a:rPr lang="en-GB" dirty="0"/>
+              <a:t>2. Leigh Johnson et al, 2019</a:t>
+            </a:r>
+          </a:p>
+        </p:txBody>
+      </p:sp>
+      <p:sp>
+        <p:nvSpPr>
+          <p:cNvPr id="3" name="Inhaltsplatzhalter 2">
+            <a:extLst>
+              <a:ext uri="{FF2B5EF4-FFF2-40B4-BE49-F238E27FC236}">
+                <a16:creationId xmlns:a16="http://schemas.microsoft.com/office/drawing/2014/main" id="{04DD0E3C-3675-44C6-AE22-972FDE27B6FE}"/>
+              </a:ext>
+            </a:extLst>
+          </p:cNvPr>
+          <p:cNvSpPr>
+            <a:spLocks noGrp="1"/>
+          </p:cNvSpPr>
+          <p:nvPr>
+            <p:ph idx="1"/>
+          </p:nvPr>
+        </p:nvSpPr>
+        <p:spPr/>
+        <p:txBody>
+          <a:bodyPr/>
+          <a:lstStyle/>
+          <a:p>
+            <a:pPr lvl="0"/>
+            <a:r>
+              <a:rPr lang="en-GB" dirty="0"/>
+              <a:t>Compared the impact and cost-effectiveness of several potential new testing strategies in South Africa</a:t>
+            </a:r>
+          </a:p>
+          <a:p>
+            <a:pPr lvl="0"/>
+            <a:endParaRPr lang="en-GB" sz="3200" dirty="0"/>
+          </a:p>
+          <a:p>
+            <a:pPr lvl="1">
+              <a:buFont typeface="Wingdings" pitchFamily="2" charset="2"/>
+              <a:buChar char="§"/>
+            </a:pPr>
+            <a:r>
+              <a:rPr lang="en-GB" dirty="0"/>
+              <a:t>Home-based testing combined with self-testing would have the greatest impact</a:t>
+            </a:r>
+          </a:p>
+          <a:p>
+            <a:pPr lvl="1">
+              <a:buFont typeface="Wingdings" pitchFamily="2" charset="2"/>
+              <a:buChar char="§"/>
+            </a:pPr>
+            <a:endParaRPr lang="en-GB" sz="3200" dirty="0"/>
+          </a:p>
+          <a:p>
+            <a:pPr lvl="1">
+              <a:buFont typeface="Wingdings" pitchFamily="2" charset="2"/>
+              <a:buChar char="§"/>
+            </a:pPr>
+            <a:r>
+              <a:rPr lang="en-GB" dirty="0"/>
+              <a:t>Testing in FSWs and assisted partner notification would be cost-saving</a:t>
+            </a:r>
+            <a:endParaRPr lang="en-GB" sz="3200" dirty="0"/>
+          </a:p>
+        </p:txBody>
+      </p:sp>
+      <p:sp>
+        <p:nvSpPr>
+          <p:cNvPr id="7" name="Bildplatzhalter 6">
+            <a:extLst>
+              <a:ext uri="{FF2B5EF4-FFF2-40B4-BE49-F238E27FC236}">
+                <a16:creationId xmlns:a16="http://schemas.microsoft.com/office/drawing/2014/main" id="{4BAD8F13-B027-4BA8-A57B-CCC5C9759C27}"/>
+              </a:ext>
+            </a:extLst>
+          </p:cNvPr>
+          <p:cNvSpPr>
+            <a:spLocks noGrp="1"/>
+          </p:cNvSpPr>
+          <p:nvPr>
+            <p:ph type="pic" sz="quarter" idx="12"/>
+          </p:nvPr>
+        </p:nvSpPr>
+        <p:spPr/>
+        <p:txBody>
+          <a:bodyPr/>
+          <a:lstStyle/>
+          <a:p>
+            <a:endParaRPr lang="en-GB" dirty="0"/>
+          </a:p>
+        </p:txBody>
+      </p:sp>
+      <p:pic>
+        <p:nvPicPr>
+          <p:cNvPr id="6" name="Picture 5">
+            <a:extLst>
+              <a:ext uri="{FF2B5EF4-FFF2-40B4-BE49-F238E27FC236}">
+                <a16:creationId xmlns:a16="http://schemas.microsoft.com/office/drawing/2014/main" id="{B5BE4494-9185-1A49-8862-8CF85BFF20E3}"/>
+              </a:ext>
+            </a:extLst>
+          </p:cNvPr>
+          <p:cNvPicPr>
+            <a:picLocks noChangeAspect="1"/>
+          </p:cNvPicPr>
+          <p:nvPr/>
+        </p:nvPicPr>
+        <p:blipFill>
+          <a:blip r:embed="rId2"/>
+          <a:stretch>
+            <a:fillRect/>
+          </a:stretch>
+        </p:blipFill>
+        <p:spPr>
+          <a:xfrm>
+            <a:off x="6954982" y="0"/>
+            <a:ext cx="5237018" cy="6858000"/>
+          </a:xfrm>
+          <a:prstGeom prst="rect">
+            <a:avLst/>
+          </a:prstGeom>
+        </p:spPr>
+      </p:pic>
+      <p:sp>
+        <p:nvSpPr>
+          <p:cNvPr id="8" name="TextBox 7">
+            <a:extLst>
+              <a:ext uri="{FF2B5EF4-FFF2-40B4-BE49-F238E27FC236}">
+                <a16:creationId xmlns:a16="http://schemas.microsoft.com/office/drawing/2014/main" id="{18494DE0-03C5-A143-A7AA-B18188B6A97B}"/>
+              </a:ext>
+            </a:extLst>
+          </p:cNvPr>
+          <p:cNvSpPr txBox="1"/>
+          <p:nvPr/>
+        </p:nvSpPr>
+        <p:spPr>
+          <a:xfrm>
+            <a:off x="442913" y="6339840"/>
+            <a:ext cx="4937760" cy="369332"/>
+          </a:xfrm>
+          <a:prstGeom prst="rect">
+            <a:avLst/>
+          </a:prstGeom>
+          <a:noFill/>
+        </p:spPr>
+        <p:txBody>
+          <a:bodyPr wrap="square" rtlCol="0">
+            <a:spAutoFit/>
+          </a:bodyPr>
+          <a:lstStyle/>
+          <a:p>
+            <a:r>
+              <a:rPr lang="en-GB" dirty="0">
+                <a:hlinkClick r:id="rId3"/>
+              </a:rPr>
+              <a:t>https://pubmed.ncbi.nlm.nih.gov/31477764/</a:t>
+            </a:r>
+            <a:endParaRPr lang="en-GB" dirty="0"/>
+          </a:p>
+        </p:txBody>
+      </p:sp>
+    </p:spTree>
+    <p:extLst>
+      <p:ext uri="{BB962C8B-B14F-4D97-AF65-F5344CB8AC3E}">
+        <p14:creationId xmlns:p14="http://schemas.microsoft.com/office/powerpoint/2010/main" val="3592092444"/>
+      </p:ext>
+    </p:extLst>
+  </p:cSld>
+  <p:clrMapOvr>
+    <a:masterClrMapping/>
+  </p:clrMapOvr>
+</p:sld>
+</file>
+
+<file path=ppt/slides/slide11.xml><?xml version="1.0" encoding="utf-8"?>
+<p:sld xmlns:a="http://schemas.openxmlformats.org/drawingml/2006/main" xmlns:r="http://schemas.openxmlformats.org/officeDocument/2006/relationships" xmlns:p="http://schemas.openxmlformats.org/presentationml/2006/main">
+  <p:cSld>
+    <p:spTree>
+      <p:nvGrpSpPr>
+        <p:cNvPr id="1" name=""/>
+        <p:cNvGrpSpPr/>
+        <p:nvPr/>
+      </p:nvGrpSpPr>
+      <p:grpSpPr>
+        <a:xfrm>
+          <a:off x="0" y="0"/>
+          <a:ext cx="0" cy="0"/>
+          <a:chOff x="0" y="0"/>
+          <a:chExt cx="0" cy="0"/>
+        </a:xfrm>
+      </p:grpSpPr>
+      <p:sp>
+        <p:nvSpPr>
+          <p:cNvPr id="4" name="Text Placeholder 3">
+            <a:extLst>
+              <a:ext uri="{FF2B5EF4-FFF2-40B4-BE49-F238E27FC236}">
+                <a16:creationId xmlns:a16="http://schemas.microsoft.com/office/drawing/2014/main" id="{DDA7417D-B668-AE4D-AD87-58BDC80D26F4}"/>
+              </a:ext>
+            </a:extLst>
+          </p:cNvPr>
+          <p:cNvSpPr>
+            <a:spLocks noGrp="1"/>
+          </p:cNvSpPr>
+          <p:nvPr>
+            <p:ph type="body" sz="quarter" idx="12"/>
+          </p:nvPr>
+        </p:nvSpPr>
+        <p:spPr/>
+        <p:txBody>
+          <a:bodyPr/>
+          <a:lstStyle/>
+          <a:p>
+            <a:endParaRPr lang="en-GB" dirty="0"/>
+          </a:p>
+        </p:txBody>
+      </p:sp>
+      <p:graphicFrame>
+        <p:nvGraphicFramePr>
+          <p:cNvPr id="5" name="Chart 4">
+            <a:extLst>
+              <a:ext uri="{FF2B5EF4-FFF2-40B4-BE49-F238E27FC236}">
+                <a16:creationId xmlns:a16="http://schemas.microsoft.com/office/drawing/2014/main" id="{0B66F6CF-46B2-B141-9C24-FCCCFE666044}"/>
+              </a:ext>
+            </a:extLst>
+          </p:cNvPr>
+          <p:cNvGraphicFramePr>
+            <a:graphicFrameLocks/>
+          </p:cNvGraphicFramePr>
+          <p:nvPr>
+            <p:extLst>
+              <p:ext uri="{D42A27DB-BD31-4B8C-83A1-F6EECF244321}">
+                <p14:modId xmlns:p14="http://schemas.microsoft.com/office/powerpoint/2010/main" val="3913057921"/>
+              </p:ext>
+            </p:extLst>
+          </p:nvPr>
+        </p:nvGraphicFramePr>
+        <p:xfrm>
+          <a:off x="3725862" y="1346515"/>
+          <a:ext cx="8374698" cy="4711385"/>
+        </p:xfrm>
+        <a:graphic>
+          <a:graphicData uri="http://schemas.openxmlformats.org/drawingml/2006/chart">
+            <c:chart xmlns:c="http://schemas.openxmlformats.org/drawingml/2006/chart" xmlns:r="http://schemas.openxmlformats.org/officeDocument/2006/relationships" r:id="rId3"/>
+          </a:graphicData>
+        </a:graphic>
+      </p:graphicFrame>
+      <p:sp>
+        <p:nvSpPr>
+          <p:cNvPr id="6" name="TextBox 5">
+            <a:extLst>
+              <a:ext uri="{FF2B5EF4-FFF2-40B4-BE49-F238E27FC236}">
+                <a16:creationId xmlns:a16="http://schemas.microsoft.com/office/drawing/2014/main" id="{EA6B60C4-8644-A146-AE06-3E19DD6B7F04}"/>
+              </a:ext>
+            </a:extLst>
+          </p:cNvPr>
+          <p:cNvSpPr txBox="1"/>
+          <p:nvPr/>
+        </p:nvSpPr>
+        <p:spPr>
+          <a:xfrm>
+            <a:off x="442913" y="6339840"/>
+            <a:ext cx="4937760" cy="246221"/>
+          </a:xfrm>
+          <a:prstGeom prst="rect">
+            <a:avLst/>
+          </a:prstGeom>
+          <a:noFill/>
+        </p:spPr>
+        <p:txBody>
+          <a:bodyPr wrap="square" rtlCol="0">
+            <a:spAutoFit/>
+          </a:bodyPr>
+          <a:lstStyle/>
+          <a:p>
+            <a:r>
+              <a:rPr lang="en-GB" sz="1000" dirty="0">
+                <a:hlinkClick r:id="rId4"/>
+              </a:rPr>
+              <a:t>https://pubmed.ncbi.nlm.nih.gov/31477764/</a:t>
+            </a:r>
+            <a:endParaRPr lang="en-GB" sz="1000" dirty="0"/>
+          </a:p>
+        </p:txBody>
+      </p:sp>
+    </p:spTree>
+    <p:extLst>
+      <p:ext uri="{BB962C8B-B14F-4D97-AF65-F5344CB8AC3E}">
+        <p14:creationId xmlns:p14="http://schemas.microsoft.com/office/powerpoint/2010/main" val="4250927214"/>
+      </p:ext>
+    </p:extLst>
+  </p:cSld>
+  <p:clrMapOvr>
+    <a:masterClrMapping/>
+  </p:clrMapOvr>
+</p:sld>
+</file>
+
+<file path=ppt/slides/slide12.xml><?xml version="1.0" encoding="utf-8"?>
 <p:sld xmlns:a="http://schemas.openxmlformats.org/drawingml/2006/main" xmlns:r="http://schemas.openxmlformats.org/officeDocument/2006/relationships" xmlns:p="http://schemas.openxmlformats.org/presentationml/2006/main" show="0">
   <p:cSld>
     <p:spTree>
@@ -7473,7 +8241,7 @@
 </p:sld>
 </file>
 
-<file path=ppt/slides/slide11.xml><?xml version="1.0" encoding="utf-8"?>
+<file path=ppt/slides/slide13.xml><?xml version="1.0" encoding="utf-8"?>
 <p:sld xmlns:a="http://schemas.openxmlformats.org/drawingml/2006/main" xmlns:r="http://schemas.openxmlformats.org/officeDocument/2006/relationships" xmlns:p="http://schemas.openxmlformats.org/presentationml/2006/main" show="0">
   <p:cSld>
     <p:spTree>
@@ -7573,7 +8341,7 @@
 </p:sld>
 </file>
 
-<file path=ppt/slides/slide12.xml><?xml version="1.0" encoding="utf-8"?>
+<file path=ppt/slides/slide14.xml><?xml version="1.0" encoding="utf-8"?>
 <p:sld xmlns:a="http://schemas.openxmlformats.org/drawingml/2006/main" xmlns:r="http://schemas.openxmlformats.org/officeDocument/2006/relationships" xmlns:p="http://schemas.openxmlformats.org/presentationml/2006/main">
   <p:cSld>
     <p:spTree>
@@ -7669,7 +8437,7 @@
 </p:sld>
 </file>
 
-<file path=ppt/slides/slide13.xml><?xml version="1.0" encoding="utf-8"?>
+<file path=ppt/slides/slide15.xml><?xml version="1.0" encoding="utf-8"?>
 <p:sld xmlns:a="http://schemas.openxmlformats.org/drawingml/2006/main" xmlns:r="http://schemas.openxmlformats.org/officeDocument/2006/relationships" xmlns:p="http://schemas.openxmlformats.org/presentationml/2006/main">
   <p:cSld>
     <p:spTree>
@@ -7766,7 +8534,7 @@
 </p:sld>
 </file>
 
-<file path=ppt/slides/slide14.xml><?xml version="1.0" encoding="utf-8"?>
+<file path=ppt/slides/slide16.xml><?xml version="1.0" encoding="utf-8"?>
 <p:sld xmlns:a="http://schemas.openxmlformats.org/drawingml/2006/main" xmlns:r="http://schemas.openxmlformats.org/officeDocument/2006/relationships" xmlns:p="http://schemas.openxmlformats.org/presentationml/2006/main">
   <p:cSld>
     <p:spTree>
@@ -8147,7 +8915,7 @@
 </p:sld>
 </file>
 
-<file path=ppt/slides/slide15.xml><?xml version="1.0" encoding="utf-8"?>
+<file path=ppt/slides/slide17.xml><?xml version="1.0" encoding="utf-8"?>
 <p:sld xmlns:a="http://schemas.openxmlformats.org/drawingml/2006/main" xmlns:r="http://schemas.openxmlformats.org/officeDocument/2006/relationships" xmlns:p="http://schemas.openxmlformats.org/presentationml/2006/main">
   <p:cSld>
     <p:spTree>
@@ -8371,7 +9139,7 @@
 </p:sld>
 </file>
 
-<file path=ppt/slides/slide16.xml><?xml version="1.0" encoding="utf-8"?>
+<file path=ppt/slides/slide18.xml><?xml version="1.0" encoding="utf-8"?>
 <p:sld xmlns:a="http://schemas.openxmlformats.org/drawingml/2006/main" xmlns:r="http://schemas.openxmlformats.org/officeDocument/2006/relationships" xmlns:p="http://schemas.openxmlformats.org/presentationml/2006/main">
   <p:cSld>
     <p:spTree>
@@ -8508,7 +9276,7 @@
 </p:sld>
 </file>
 
-<file path=ppt/slides/slide17.xml><?xml version="1.0" encoding="utf-8"?>
+<file path=ppt/slides/slide19.xml><?xml version="1.0" encoding="utf-8"?>
 <p:sld xmlns:a="http://schemas.openxmlformats.org/drawingml/2006/main" xmlns:r="http://schemas.openxmlformats.org/officeDocument/2006/relationships" xmlns:p="http://schemas.openxmlformats.org/presentationml/2006/main">
   <p:cSld>
     <p:spTree>
@@ -8686,7 +9454,117 @@
 </p:sld>
 </file>
 
-<file path=ppt/slides/slide18.xml><?xml version="1.0" encoding="utf-8"?>
+<file path=ppt/slides/slide2.xml><?xml version="1.0" encoding="utf-8"?>
+<p:sld xmlns:a="http://schemas.openxmlformats.org/drawingml/2006/main" xmlns:r="http://schemas.openxmlformats.org/officeDocument/2006/relationships" xmlns:p="http://schemas.openxmlformats.org/presentationml/2006/main">
+  <p:cSld>
+    <p:spTree>
+      <p:nvGrpSpPr>
+        <p:cNvPr id="1" name=""/>
+        <p:cNvGrpSpPr/>
+        <p:nvPr/>
+      </p:nvGrpSpPr>
+      <p:grpSpPr>
+        <a:xfrm>
+          <a:off x="0" y="0"/>
+          <a:ext cx="0" cy="0"/>
+          <a:chOff x="0" y="0"/>
+          <a:chExt cx="0" cy="0"/>
+        </a:xfrm>
+      </p:grpSpPr>
+      <p:sp>
+        <p:nvSpPr>
+          <p:cNvPr id="2" name="Titel 1">
+            <a:extLst>
+              <a:ext uri="{FF2B5EF4-FFF2-40B4-BE49-F238E27FC236}">
+                <a16:creationId xmlns:a16="http://schemas.microsoft.com/office/drawing/2014/main" id="{246EB762-B210-4CC4-9F39-572EC03B556D}"/>
+              </a:ext>
+            </a:extLst>
+          </p:cNvPr>
+          <p:cNvSpPr>
+            <a:spLocks noGrp="1"/>
+          </p:cNvSpPr>
+          <p:nvPr>
+            <p:ph type="title"/>
+          </p:nvPr>
+        </p:nvSpPr>
+        <p:spPr/>
+        <p:txBody>
+          <a:bodyPr/>
+          <a:lstStyle/>
+          <a:p>
+            <a:r>
+              <a:rPr lang="en-GB" dirty="0">
+                <a:solidFill>
+                  <a:schemeClr val="accent1"/>
+                </a:solidFill>
+              </a:rPr>
+              <a:t>Objective</a:t>
+            </a:r>
+          </a:p>
+        </p:txBody>
+      </p:sp>
+      <p:sp>
+        <p:nvSpPr>
+          <p:cNvPr id="3" name="Inhaltsplatzhalter 2">
+            <a:extLst>
+              <a:ext uri="{FF2B5EF4-FFF2-40B4-BE49-F238E27FC236}">
+                <a16:creationId xmlns:a16="http://schemas.microsoft.com/office/drawing/2014/main" id="{04DD0E3C-3675-44C6-AE22-972FDE27B6FE}"/>
+              </a:ext>
+            </a:extLst>
+          </p:cNvPr>
+          <p:cNvSpPr>
+            <a:spLocks noGrp="1"/>
+          </p:cNvSpPr>
+          <p:nvPr>
+            <p:ph idx="1"/>
+          </p:nvPr>
+        </p:nvSpPr>
+        <p:spPr>
+          <a:xfrm>
+            <a:off x="442913" y="2766059"/>
+            <a:ext cx="11029950" cy="2567941"/>
+          </a:xfrm>
+        </p:spPr>
+        <p:txBody>
+          <a:bodyPr/>
+          <a:lstStyle/>
+          <a:p>
+            <a:pPr marL="0" indent="0">
+              <a:buNone/>
+            </a:pPr>
+            <a:r>
+              <a:rPr lang="en-GB" dirty="0"/>
+              <a:t>To provide an interactive tool that can be used as a discussion aid to support decision makers in planning/prioritizing HIV services by comparing trade-offs in impact and budget under different coverage levels of HIV services across the care cascade </a:t>
+            </a:r>
+          </a:p>
+          <a:p>
+            <a:pPr marL="0" indent="0">
+              <a:buNone/>
+            </a:pPr>
+            <a:endParaRPr lang="en-GB" dirty="0"/>
+          </a:p>
+          <a:p>
+            <a:pPr marL="0" indent="0">
+              <a:buNone/>
+            </a:pPr>
+            <a:endParaRPr lang="en-GB" dirty="0"/>
+          </a:p>
+        </p:txBody>
+      </p:sp>
+    </p:spTree>
+    <p:extLst>
+      <p:ext uri="{BB962C8B-B14F-4D97-AF65-F5344CB8AC3E}">
+        <p14:creationId xmlns:p14="http://schemas.microsoft.com/office/powerpoint/2010/main" val="1689077881"/>
+      </p:ext>
+    </p:extLst>
+  </p:cSld>
+  <p:clrMapOvr>
+    <a:masterClrMapping/>
+  </p:clrMapOvr>
+</p:sld>
+</file>
+
+<file path=ppt/slides/slide20.xml><?xml version="1.0" encoding="utf-8"?>
 <p:sld xmlns:a="http://schemas.openxmlformats.org/drawingml/2006/main" xmlns:r="http://schemas.openxmlformats.org/officeDocument/2006/relationships" xmlns:p="http://schemas.openxmlformats.org/presentationml/2006/main">
   <p:cSld>
     <p:spTree>
@@ -8824,7 +9702,7 @@
 </p:sld>
 </file>
 
-<file path=ppt/slides/slide19.xml><?xml version="1.0" encoding="utf-8"?>
+<file path=ppt/slides/slide21.xml><?xml version="1.0" encoding="utf-8"?>
 <p:sld xmlns:a="http://schemas.openxmlformats.org/drawingml/2006/main" xmlns:r="http://schemas.openxmlformats.org/officeDocument/2006/relationships" xmlns:p="http://schemas.openxmlformats.org/presentationml/2006/main">
   <p:cSld>
     <p:spTree>
@@ -9059,130 +9937,7 @@
 </p:sld>
 </file>
 
-<file path=ppt/slides/slide2.xml><?xml version="1.0" encoding="utf-8"?>
-<p:sld xmlns:a="http://schemas.openxmlformats.org/drawingml/2006/main" xmlns:r="http://schemas.openxmlformats.org/officeDocument/2006/relationships" xmlns:p="http://schemas.openxmlformats.org/presentationml/2006/main">
-  <p:cSld>
-    <p:spTree>
-      <p:nvGrpSpPr>
-        <p:cNvPr id="1" name=""/>
-        <p:cNvGrpSpPr/>
-        <p:nvPr/>
-      </p:nvGrpSpPr>
-      <p:grpSpPr>
-        <a:xfrm>
-          <a:off x="0" y="0"/>
-          <a:ext cx="0" cy="0"/>
-          <a:chOff x="0" y="0"/>
-          <a:chExt cx="0" cy="0"/>
-        </a:xfrm>
-      </p:grpSpPr>
-      <p:sp>
-        <p:nvSpPr>
-          <p:cNvPr id="2" name="Titel 1">
-            <a:extLst>
-              <a:ext uri="{FF2B5EF4-FFF2-40B4-BE49-F238E27FC236}">
-                <a16:creationId xmlns:a16="http://schemas.microsoft.com/office/drawing/2014/main" id="{246EB762-B210-4CC4-9F39-572EC03B556D}"/>
-              </a:ext>
-            </a:extLst>
-          </p:cNvPr>
-          <p:cNvSpPr>
-            <a:spLocks noGrp="1"/>
-          </p:cNvSpPr>
-          <p:nvPr>
-            <p:ph type="title"/>
-          </p:nvPr>
-        </p:nvSpPr>
-        <p:spPr/>
-        <p:txBody>
-          <a:bodyPr/>
-          <a:lstStyle/>
-          <a:p>
-            <a:r>
-              <a:rPr lang="en-GB" dirty="0">
-                <a:solidFill>
-                  <a:schemeClr val="accent1"/>
-                </a:solidFill>
-              </a:rPr>
-              <a:t>Objective</a:t>
-            </a:r>
-          </a:p>
-        </p:txBody>
-      </p:sp>
-      <p:sp>
-        <p:nvSpPr>
-          <p:cNvPr id="3" name="Inhaltsplatzhalter 2">
-            <a:extLst>
-              <a:ext uri="{FF2B5EF4-FFF2-40B4-BE49-F238E27FC236}">
-                <a16:creationId xmlns:a16="http://schemas.microsoft.com/office/drawing/2014/main" id="{04DD0E3C-3675-44C6-AE22-972FDE27B6FE}"/>
-              </a:ext>
-            </a:extLst>
-          </p:cNvPr>
-          <p:cNvSpPr>
-            <a:spLocks noGrp="1"/>
-          </p:cNvSpPr>
-          <p:nvPr>
-            <p:ph idx="1"/>
-          </p:nvPr>
-        </p:nvSpPr>
-        <p:spPr>
-          <a:xfrm>
-            <a:off x="442913" y="2766059"/>
-            <a:ext cx="11029950" cy="2567941"/>
-          </a:xfrm>
-        </p:spPr>
-        <p:txBody>
-          <a:bodyPr/>
-          <a:lstStyle/>
-          <a:p>
-            <a:pPr marL="0" indent="0">
-              <a:buNone/>
-            </a:pPr>
-            <a:r>
-              <a:rPr lang="en-GB" dirty="0"/>
-              <a:t>To provide an interactive tool that can be used to support decision makers in planning/prioritizing HIV services </a:t>
-            </a:r>
-            <a:r>
-              <a:rPr lang="en-GB"/>
-              <a:t>by comparing trade-offs </a:t>
-            </a:r>
-            <a:r>
-              <a:rPr lang="en-GB" dirty="0"/>
-              <a:t>in impact </a:t>
-            </a:r>
-            <a:r>
-              <a:rPr lang="en-GB"/>
-              <a:t>and budget </a:t>
-            </a:r>
-            <a:endParaRPr lang="en-GB" dirty="0"/>
-          </a:p>
-          <a:p>
-            <a:pPr marL="0" indent="0">
-              <a:buNone/>
-            </a:pPr>
-            <a:endParaRPr lang="en-GB" dirty="0"/>
-          </a:p>
-          <a:p>
-            <a:pPr marL="0" indent="0">
-              <a:buNone/>
-            </a:pPr>
-            <a:endParaRPr lang="en-GB" dirty="0"/>
-          </a:p>
-        </p:txBody>
-      </p:sp>
-    </p:spTree>
-    <p:extLst>
-      <p:ext uri="{BB962C8B-B14F-4D97-AF65-F5344CB8AC3E}">
-        <p14:creationId xmlns:p14="http://schemas.microsoft.com/office/powerpoint/2010/main" val="1689077881"/>
-      </p:ext>
-    </p:extLst>
-  </p:cSld>
-  <p:clrMapOvr>
-    <a:masterClrMapping/>
-  </p:clrMapOvr>
-</p:sld>
-</file>
-
-<file path=ppt/slides/slide20.xml><?xml version="1.0" encoding="utf-8"?>
+<file path=ppt/slides/slide22.xml><?xml version="1.0" encoding="utf-8"?>
 <p:sld xmlns:a="http://schemas.openxmlformats.org/drawingml/2006/main" xmlns:r="http://schemas.openxmlformats.org/officeDocument/2006/relationships" xmlns:p="http://schemas.openxmlformats.org/presentationml/2006/main">
   <p:cSld>
     <p:spTree>
@@ -9392,86 +10147,79 @@
             <p:ph idx="1"/>
           </p:nvPr>
         </p:nvSpPr>
-        <p:spPr/>
+        <p:spPr>
+          <a:xfrm>
+            <a:off x="442913" y="2320289"/>
+            <a:ext cx="11414125" cy="4103371"/>
+          </a:xfrm>
+        </p:spPr>
         <p:txBody>
           <a:bodyPr/>
           <a:lstStyle/>
           <a:p>
-            <a:pPr marL="457200" indent="-457200">
-              <a:buAutoNum type="arabicPeriod"/>
+            <a:pPr marL="0" indent="0">
+              <a:buNone/>
             </a:pPr>
             <a:r>
               <a:rPr lang="en-GB" dirty="0"/>
-              <a:t>Conversation with Jeff Eaton </a:t>
+              <a:t>Start with minimum viable product (MVP)</a:t>
             </a:r>
           </a:p>
           <a:p>
-            <a:pPr marL="457200" indent="-457200">
-              <a:buAutoNum type="arabicPeriod"/>
-            </a:pPr>
+            <a:pPr lvl="1"/>
             <a:r>
               <a:rPr lang="en-GB" dirty="0"/>
-              <a:t>Leigh Johnson 2019 paper</a:t>
+              <a:t>Describe a set of initial core interventions across prevention, testing and treatment categories</a:t>
             </a:r>
           </a:p>
           <a:p>
-            <a:pPr marL="457200" indent="-457200">
-              <a:buAutoNum type="arabicPeriod"/>
+            <a:pPr marL="220663" lvl="1" indent="0">
+              <a:buNone/>
             </a:pPr>
+            <a:endParaRPr lang="en-GB" dirty="0"/>
+          </a:p>
+          <a:p>
+            <a:pPr lvl="1"/>
             <a:r>
               <a:rPr lang="en-GB" dirty="0"/>
-              <a:t>Giguere et al 2021 Lancet HIV paper</a:t>
+              <a:t>For each, estimate cost as well as impact on six core outcomes : adult infections, infant infections, 1st 95, 2nd 95, 3</a:t>
             </a:r>
-          </a:p>
-          <a:p>
-            <a:pPr marL="457200" indent="-457200">
-              <a:buAutoNum type="arabicPeriod"/>
-            </a:pPr>
+            <a:r>
+              <a:rPr lang="en-GB" baseline="30000" dirty="0"/>
+              <a:t>rd</a:t>
+            </a:r>
             <a:r>
               <a:rPr lang="en-GB" dirty="0"/>
-              <a:t>HTS-POS targets, Malawi</a:t>
+              <a:t> 95</a:t>
             </a:r>
           </a:p>
           <a:p>
-            <a:pPr marL="457200" indent="-457200">
-              <a:buAutoNum type="arabicPeriod"/>
+            <a:pPr marL="220663" lvl="1" indent="0">
+              <a:buNone/>
             </a:pPr>
+            <a:endParaRPr lang="en-GB" dirty="0"/>
+          </a:p>
+          <a:p>
+            <a:pPr lvl="1"/>
             <a:r>
               <a:rPr lang="en-GB" dirty="0"/>
-              <a:t>Reflection on discussion with Karen Jennings</a:t>
+              <a:t>Incorporate into platform which allows users to change coverage (or absolute number of people) impacted by interventions and visually explore effects (see slides which follow) </a:t>
             </a:r>
           </a:p>
           <a:p>
-            <a:pPr marL="457200" indent="-457200">
-              <a:buAutoNum type="arabicPeriod"/>
-            </a:pPr>
+            <a:pPr lvl="1"/>
+            <a:endParaRPr lang="en-GB" dirty="0"/>
+          </a:p>
+          <a:p>
+            <a:pPr lvl="1"/>
             <a:r>
               <a:rPr lang="en-GB" dirty="0"/>
-              <a:t>PEPFAR data, Brian </a:t>
+              <a:t>Incorporate feedback from users (throughout) and at a later stage potentially update intervention list</a:t>
             </a:r>
-            <a:r>
-              <a:rPr lang="en-GB" dirty="0" err="1"/>
-              <a:t>Honerman</a:t>
-            </a:r>
+          </a:p>
+          <a:p>
+            <a:pPr lvl="1"/>
             <a:endParaRPr lang="en-GB" dirty="0"/>
-          </a:p>
-          <a:p>
-            <a:pPr marL="457200" indent="-457200">
-              <a:buAutoNum type="arabicPeriod"/>
-            </a:pPr>
-            <a:r>
-              <a:rPr lang="en-GB" dirty="0"/>
-              <a:t>Chamie et al 2021 Lancet HIV paper</a:t>
-            </a:r>
-          </a:p>
-          <a:p>
-            <a:pPr marL="457200" indent="-457200">
-              <a:buAutoNum type="arabicPeriod"/>
-            </a:pPr>
-            <a:r>
-              <a:rPr lang="en-GB" dirty="0"/>
-              <a:t>UNAIDS data on first and second 90s</a:t>
-            </a:r>
           </a:p>
         </p:txBody>
       </p:sp>
@@ -9543,110 +10291,1632 @@
                   <a:schemeClr val="accent1"/>
                 </a:solidFill>
               </a:rPr>
-              <a:t>What‘s Included: Prevention</a:t>
+              <a:t>What‘s Included: </a:t>
+            </a:r>
+            <a:r>
+              <a:rPr lang="en-GB" noProof="0" dirty="0">
+                <a:solidFill>
+                  <a:srgbClr val="F88D9A"/>
+                </a:solidFill>
+              </a:rPr>
+              <a:t>Prevention</a:t>
             </a:r>
           </a:p>
         </p:txBody>
       </p:sp>
-      <p:sp>
-        <p:nvSpPr>
-          <p:cNvPr id="3" name="Inhaltsplatzhalter 2">
+      <p:graphicFrame>
+        <p:nvGraphicFramePr>
+          <p:cNvPr id="6" name="Table 5">
             <a:extLst>
               <a:ext uri="{FF2B5EF4-FFF2-40B4-BE49-F238E27FC236}">
-                <a16:creationId xmlns:a16="http://schemas.microsoft.com/office/drawing/2014/main" id="{B9950C3B-9FDE-9620-8662-C47749065F6F}"/>
+                <a16:creationId xmlns:a16="http://schemas.microsoft.com/office/drawing/2014/main" id="{F880109A-133C-CBC5-35D3-2E42F8B90261}"/>
               </a:ext>
             </a:extLst>
           </p:cNvPr>
-          <p:cNvSpPr>
-            <a:spLocks noGrp="1"/>
-          </p:cNvSpPr>
+          <p:cNvGraphicFramePr>
+            <a:graphicFrameLocks noGrp="1"/>
+          </p:cNvGraphicFramePr>
           <p:nvPr>
-            <p:ph idx="1"/>
+            <p:extLst>
+              <p:ext uri="{D42A27DB-BD31-4B8C-83A1-F6EECF244321}">
+                <p14:modId xmlns:p14="http://schemas.microsoft.com/office/powerpoint/2010/main" val="3990749953"/>
+              </p:ext>
+            </p:extLst>
           </p:nvPr>
-        </p:nvSpPr>
-        <p:spPr/>
-        <p:txBody>
-          <a:bodyPr/>
-          <a:lstStyle/>
-          <a:p>
-            <a:pPr marL="457200" indent="-457200">
-              <a:buAutoNum type="arabicPeriod"/>
-            </a:pPr>
-            <a:r>
-              <a:rPr lang="en-GB" dirty="0"/>
-              <a:t>Conversation with Jeff Eaton </a:t>
-            </a:r>
-          </a:p>
-          <a:p>
-            <a:pPr marL="457200" indent="-457200">
-              <a:buAutoNum type="arabicPeriod"/>
-            </a:pPr>
-            <a:r>
-              <a:rPr lang="en-GB" dirty="0"/>
-              <a:t>Leigh Johnson 2019 paper</a:t>
-            </a:r>
-          </a:p>
-          <a:p>
-            <a:pPr marL="457200" indent="-457200">
-              <a:buAutoNum type="arabicPeriod"/>
-            </a:pPr>
-            <a:r>
-              <a:rPr lang="en-GB" dirty="0"/>
-              <a:t>Giguere et al 2021 Lancet HIV paper</a:t>
-            </a:r>
-          </a:p>
-          <a:p>
-            <a:pPr marL="457200" indent="-457200">
-              <a:buAutoNum type="arabicPeriod"/>
-            </a:pPr>
-            <a:r>
-              <a:rPr lang="en-GB" dirty="0"/>
-              <a:t>HTS-POS targets, Malawi</a:t>
-            </a:r>
-          </a:p>
-          <a:p>
-            <a:pPr marL="457200" indent="-457200">
-              <a:buAutoNum type="arabicPeriod"/>
-            </a:pPr>
-            <a:r>
-              <a:rPr lang="en-GB" dirty="0"/>
-              <a:t>Reflection on discussion with Karen Jennings</a:t>
-            </a:r>
-          </a:p>
-          <a:p>
-            <a:pPr marL="457200" indent="-457200">
-              <a:buAutoNum type="arabicPeriod"/>
-            </a:pPr>
-            <a:r>
-              <a:rPr lang="en-GB" dirty="0"/>
-              <a:t>PEPFAR data, Brian </a:t>
-            </a:r>
-            <a:r>
-              <a:rPr lang="en-GB" dirty="0" err="1"/>
-              <a:t>Honerman</a:t>
-            </a:r>
-            <a:endParaRPr lang="en-GB" dirty="0"/>
-          </a:p>
-          <a:p>
-            <a:pPr marL="457200" indent="-457200">
-              <a:buAutoNum type="arabicPeriod"/>
-            </a:pPr>
-            <a:r>
-              <a:rPr lang="en-GB" dirty="0"/>
-              <a:t>Chamie et al 2021 Lancet HIV paper</a:t>
-            </a:r>
-          </a:p>
-          <a:p>
-            <a:pPr marL="457200" indent="-457200">
-              <a:buAutoNum type="arabicPeriod"/>
-            </a:pPr>
-            <a:r>
-              <a:rPr lang="en-GB" dirty="0"/>
-              <a:t>UNAIDS data on first and second 90s</a:t>
-            </a:r>
-          </a:p>
-        </p:txBody>
-      </p:sp>
+        </p:nvGraphicFramePr>
+        <p:xfrm>
+          <a:off x="894658" y="2524584"/>
+          <a:ext cx="10226732" cy="2994058"/>
+        </p:xfrm>
+        <a:graphic>
+          <a:graphicData uri="http://schemas.openxmlformats.org/drawingml/2006/table">
+            <a:tbl>
+              <a:tblPr>
+                <a:tableStyleId>{616DA210-FB5B-4158-B5E0-FEB733F419BA}</a:tableStyleId>
+              </a:tblPr>
+              <a:tblGrid>
+                <a:gridCol w="2637212">
+                  <a:extLst>
+                    <a:ext uri="{9D8B030D-6E8A-4147-A177-3AD203B41FA5}">
+                      <a16:colId xmlns:a16="http://schemas.microsoft.com/office/drawing/2014/main" val="4120267808"/>
+                    </a:ext>
+                  </a:extLst>
+                </a:gridCol>
+                <a:gridCol w="1264920">
+                  <a:extLst>
+                    <a:ext uri="{9D8B030D-6E8A-4147-A177-3AD203B41FA5}">
+                      <a16:colId xmlns:a16="http://schemas.microsoft.com/office/drawing/2014/main" val="1209723872"/>
+                    </a:ext>
+                  </a:extLst>
+                </a:gridCol>
+                <a:gridCol w="1264920">
+                  <a:extLst>
+                    <a:ext uri="{9D8B030D-6E8A-4147-A177-3AD203B41FA5}">
+                      <a16:colId xmlns:a16="http://schemas.microsoft.com/office/drawing/2014/main" val="2743590385"/>
+                    </a:ext>
+                  </a:extLst>
+                </a:gridCol>
+                <a:gridCol w="1264920">
+                  <a:extLst>
+                    <a:ext uri="{9D8B030D-6E8A-4147-A177-3AD203B41FA5}">
+                      <a16:colId xmlns:a16="http://schemas.microsoft.com/office/drawing/2014/main" val="4208286694"/>
+                    </a:ext>
+                  </a:extLst>
+                </a:gridCol>
+                <a:gridCol w="1264920">
+                  <a:extLst>
+                    <a:ext uri="{9D8B030D-6E8A-4147-A177-3AD203B41FA5}">
+                      <a16:colId xmlns:a16="http://schemas.microsoft.com/office/drawing/2014/main" val="3849485650"/>
+                    </a:ext>
+                  </a:extLst>
+                </a:gridCol>
+                <a:gridCol w="1264920">
+                  <a:extLst>
+                    <a:ext uri="{9D8B030D-6E8A-4147-A177-3AD203B41FA5}">
+                      <a16:colId xmlns:a16="http://schemas.microsoft.com/office/drawing/2014/main" val="65177762"/>
+                    </a:ext>
+                  </a:extLst>
+                </a:gridCol>
+                <a:gridCol w="1264920">
+                  <a:extLst>
+                    <a:ext uri="{9D8B030D-6E8A-4147-A177-3AD203B41FA5}">
+                      <a16:colId xmlns:a16="http://schemas.microsoft.com/office/drawing/2014/main" val="3550359160"/>
+                    </a:ext>
+                  </a:extLst>
+                </a:gridCol>
+              </a:tblGrid>
+              <a:tr h="326385">
+                <a:tc>
+                  <a:txBody>
+                    <a:bodyPr/>
+                    <a:lstStyle/>
+                    <a:p>
+                      <a:pPr algn="ctr" fontAlgn="b">
+                        <a:buNone/>
+                      </a:pPr>
+                      <a:endParaRPr lang="en-ZA" sz="1600" b="1" i="0" u="none" strike="noStrike" dirty="0">
+                        <a:solidFill>
+                          <a:srgbClr val="000000"/>
+                        </a:solidFill>
+                        <a:effectLst/>
+                        <a:latin typeface="Verdana" panose="020B0604030504040204" pitchFamily="34" charset="0"/>
+                        <a:ea typeface="Verdana" panose="020B0604030504040204" pitchFamily="34" charset="0"/>
+                        <a:cs typeface="Verdana" panose="020B0604030504040204" pitchFamily="34" charset="0"/>
+                      </a:endParaRPr>
+                    </a:p>
+                  </a:txBody>
+                  <a:tcPr marL="45720" marR="45720" anchor="b">
+                    <a:solidFill>
+                      <a:srgbClr val="FFFFFF"/>
+                    </a:solidFill>
+                  </a:tcPr>
+                </a:tc>
+                <a:tc gridSpan="6">
+                  <a:txBody>
+                    <a:bodyPr/>
+                    <a:lstStyle/>
+                    <a:p>
+                      <a:pPr algn="ctr" fontAlgn="b">
+                        <a:buNone/>
+                      </a:pPr>
+                      <a:r>
+                        <a:rPr lang="en-ZA" sz="1600" b="1" u="none" strike="noStrike" dirty="0">
+                          <a:effectLst/>
+                          <a:latin typeface="Verdana" panose="020B0604030504040204" pitchFamily="34" charset="0"/>
+                          <a:ea typeface="Verdana" panose="020B0604030504040204" pitchFamily="34" charset="0"/>
+                          <a:cs typeface="Verdana" panose="020B0604030504040204" pitchFamily="34" charset="0"/>
+                        </a:rPr>
+                        <a:t>Outcome affected</a:t>
+                      </a:r>
+                      <a:endParaRPr lang="en-ZA" sz="1600" b="1" i="0" u="none" strike="noStrike" dirty="0">
+                        <a:solidFill>
+                          <a:srgbClr val="000000"/>
+                        </a:solidFill>
+                        <a:effectLst/>
+                        <a:latin typeface="Verdana" panose="020B0604030504040204" pitchFamily="34" charset="0"/>
+                        <a:ea typeface="Verdana" panose="020B0604030504040204" pitchFamily="34" charset="0"/>
+                        <a:cs typeface="Verdana" panose="020B0604030504040204" pitchFamily="34" charset="0"/>
+                      </a:endParaRPr>
+                    </a:p>
+                  </a:txBody>
+                  <a:tcPr marL="45720" marR="45720" anchor="b">
+                    <a:solidFill>
+                      <a:srgbClr val="FFFFFF"/>
+                    </a:solidFill>
+                  </a:tcPr>
+                </a:tc>
+                <a:tc hMerge="1">
+                  <a:txBody>
+                    <a:bodyPr/>
+                    <a:lstStyle/>
+                    <a:p>
+                      <a:endParaRPr lang="en-GB"/>
+                    </a:p>
+                  </a:txBody>
+                  <a:tcPr/>
+                </a:tc>
+                <a:tc hMerge="1">
+                  <a:txBody>
+                    <a:bodyPr/>
+                    <a:lstStyle/>
+                    <a:p>
+                      <a:endParaRPr lang="en-GB"/>
+                    </a:p>
+                  </a:txBody>
+                  <a:tcPr/>
+                </a:tc>
+                <a:tc hMerge="1">
+                  <a:txBody>
+                    <a:bodyPr/>
+                    <a:lstStyle/>
+                    <a:p>
+                      <a:endParaRPr lang="en-GB"/>
+                    </a:p>
+                  </a:txBody>
+                  <a:tcPr/>
+                </a:tc>
+                <a:tc hMerge="1">
+                  <a:txBody>
+                    <a:bodyPr/>
+                    <a:lstStyle/>
+                    <a:p>
+                      <a:endParaRPr lang="en-GB"/>
+                    </a:p>
+                  </a:txBody>
+                  <a:tcPr/>
+                </a:tc>
+                <a:tc hMerge="1">
+                  <a:txBody>
+                    <a:bodyPr/>
+                    <a:lstStyle/>
+                    <a:p>
+                      <a:endParaRPr lang="en-GB"/>
+                    </a:p>
+                  </a:txBody>
+                  <a:tcPr/>
+                </a:tc>
+                <a:extLst>
+                  <a:ext uri="{0D108BD9-81ED-4DB2-BD59-A6C34878D82A}">
+                    <a16:rowId xmlns:a16="http://schemas.microsoft.com/office/drawing/2014/main" val="3572059884"/>
+                  </a:ext>
+                </a:extLst>
+              </a:tr>
+              <a:tr h="647098">
+                <a:tc>
+                  <a:txBody>
+                    <a:bodyPr/>
+                    <a:lstStyle/>
+                    <a:p>
+                      <a:pPr algn="l" fontAlgn="b">
+                        <a:buNone/>
+                      </a:pPr>
+                      <a:r>
+                        <a:rPr lang="en-ZA" sz="1600" b="1" i="0" u="none" strike="noStrike" dirty="0">
+                          <a:solidFill>
+                            <a:srgbClr val="000000"/>
+                          </a:solidFill>
+                          <a:effectLst/>
+                          <a:latin typeface="Verdana" panose="020B0604030504040204" pitchFamily="34" charset="0"/>
+                          <a:ea typeface="Verdana" panose="020B0604030504040204" pitchFamily="34" charset="0"/>
+                          <a:cs typeface="Verdana" panose="020B0604030504040204" pitchFamily="34" charset="0"/>
+                        </a:rPr>
+                        <a:t>intervention</a:t>
+                      </a:r>
+                    </a:p>
+                  </a:txBody>
+                  <a:tcPr marL="45720" marR="45720" anchor="b">
+                    <a:solidFill>
+                      <a:schemeClr val="accent1">
+                        <a:lumMod val="40000"/>
+                        <a:lumOff val="60000"/>
+                      </a:schemeClr>
+                    </a:solidFill>
+                  </a:tcPr>
+                </a:tc>
+                <a:tc>
+                  <a:txBody>
+                    <a:bodyPr/>
+                    <a:lstStyle/>
+                    <a:p>
+                      <a:pPr algn="ctr" fontAlgn="b">
+                        <a:buNone/>
+                      </a:pPr>
+                      <a:r>
+                        <a:rPr lang="en-ZA" sz="1600" b="1" u="none" strike="noStrike" dirty="0">
+                          <a:effectLst/>
+                          <a:latin typeface="Verdana" panose="020B0604030504040204" pitchFamily="34" charset="0"/>
+                          <a:ea typeface="Verdana" panose="020B0604030504040204" pitchFamily="34" charset="0"/>
+                          <a:cs typeface="Verdana" panose="020B0604030504040204" pitchFamily="34" charset="0"/>
+                        </a:rPr>
+                        <a:t>adult infections</a:t>
+                      </a:r>
+                      <a:endParaRPr lang="en-ZA" sz="1600" b="1" i="0" u="none" strike="noStrike" dirty="0">
+                        <a:solidFill>
+                          <a:srgbClr val="000000"/>
+                        </a:solidFill>
+                        <a:effectLst/>
+                        <a:latin typeface="Verdana" panose="020B0604030504040204" pitchFamily="34" charset="0"/>
+                        <a:ea typeface="Verdana" panose="020B0604030504040204" pitchFamily="34" charset="0"/>
+                        <a:cs typeface="Verdana" panose="020B0604030504040204" pitchFamily="34" charset="0"/>
+                      </a:endParaRPr>
+                    </a:p>
+                  </a:txBody>
+                  <a:tcPr marL="45720" marR="45720" anchor="b">
+                    <a:solidFill>
+                      <a:schemeClr val="accent1">
+                        <a:lumMod val="40000"/>
+                        <a:lumOff val="60000"/>
+                      </a:schemeClr>
+                    </a:solidFill>
+                  </a:tcPr>
+                </a:tc>
+                <a:tc>
+                  <a:txBody>
+                    <a:bodyPr/>
+                    <a:lstStyle/>
+                    <a:p>
+                      <a:pPr algn="ctr" fontAlgn="b">
+                        <a:buNone/>
+                      </a:pPr>
+                      <a:r>
+                        <a:rPr lang="en-ZA" sz="1600" b="1" u="none" strike="noStrike" dirty="0">
+                          <a:effectLst/>
+                          <a:latin typeface="Verdana" panose="020B0604030504040204" pitchFamily="34" charset="0"/>
+                          <a:ea typeface="Verdana" panose="020B0604030504040204" pitchFamily="34" charset="0"/>
+                          <a:cs typeface="Verdana" panose="020B0604030504040204" pitchFamily="34" charset="0"/>
+                        </a:rPr>
+                        <a:t>infant infections </a:t>
+                      </a:r>
+                      <a:endParaRPr lang="en-ZA" sz="1600" b="1" i="0" u="none" strike="noStrike" dirty="0">
+                        <a:solidFill>
+                          <a:srgbClr val="000000"/>
+                        </a:solidFill>
+                        <a:effectLst/>
+                        <a:latin typeface="Verdana" panose="020B0604030504040204" pitchFamily="34" charset="0"/>
+                        <a:ea typeface="Verdana" panose="020B0604030504040204" pitchFamily="34" charset="0"/>
+                        <a:cs typeface="Verdana" panose="020B0604030504040204" pitchFamily="34" charset="0"/>
+                      </a:endParaRPr>
+                    </a:p>
+                  </a:txBody>
+                  <a:tcPr marL="45720" marR="45720" anchor="b">
+                    <a:solidFill>
+                      <a:schemeClr val="accent1">
+                        <a:lumMod val="40000"/>
+                        <a:lumOff val="60000"/>
+                      </a:schemeClr>
+                    </a:solidFill>
+                  </a:tcPr>
+                </a:tc>
+                <a:tc>
+                  <a:txBody>
+                    <a:bodyPr/>
+                    <a:lstStyle/>
+                    <a:p>
+                      <a:pPr algn="ctr" fontAlgn="b">
+                        <a:buNone/>
+                      </a:pPr>
+                      <a:r>
+                        <a:rPr lang="en-ZA" sz="1600" b="1" u="none" strike="noStrike" dirty="0">
+                          <a:effectLst/>
+                          <a:latin typeface="Verdana" panose="020B0604030504040204" pitchFamily="34" charset="0"/>
+                          <a:ea typeface="Verdana" panose="020B0604030504040204" pitchFamily="34" charset="0"/>
+                          <a:cs typeface="Verdana" panose="020B0604030504040204" pitchFamily="34" charset="0"/>
+                        </a:rPr>
+                        <a:t>first 95</a:t>
+                      </a:r>
+                      <a:endParaRPr lang="en-ZA" sz="1600" b="1" i="0" u="none" strike="noStrike" dirty="0">
+                        <a:solidFill>
+                          <a:srgbClr val="000000"/>
+                        </a:solidFill>
+                        <a:effectLst/>
+                        <a:latin typeface="Verdana" panose="020B0604030504040204" pitchFamily="34" charset="0"/>
+                        <a:ea typeface="Verdana" panose="020B0604030504040204" pitchFamily="34" charset="0"/>
+                        <a:cs typeface="Verdana" panose="020B0604030504040204" pitchFamily="34" charset="0"/>
+                      </a:endParaRPr>
+                    </a:p>
+                  </a:txBody>
+                  <a:tcPr marL="45720" marR="45720" anchor="b">
+                    <a:solidFill>
+                      <a:schemeClr val="accent1">
+                        <a:lumMod val="40000"/>
+                        <a:lumOff val="60000"/>
+                      </a:schemeClr>
+                    </a:solidFill>
+                  </a:tcPr>
+                </a:tc>
+                <a:tc>
+                  <a:txBody>
+                    <a:bodyPr/>
+                    <a:lstStyle/>
+                    <a:p>
+                      <a:pPr algn="ctr" fontAlgn="b">
+                        <a:buNone/>
+                      </a:pPr>
+                      <a:r>
+                        <a:rPr lang="en-ZA" sz="1600" b="1" u="none" strike="noStrike" dirty="0">
+                          <a:effectLst/>
+                          <a:latin typeface="Verdana" panose="020B0604030504040204" pitchFamily="34" charset="0"/>
+                          <a:ea typeface="Verdana" panose="020B0604030504040204" pitchFamily="34" charset="0"/>
+                          <a:cs typeface="Verdana" panose="020B0604030504040204" pitchFamily="34" charset="0"/>
+                        </a:rPr>
+                        <a:t>second 95</a:t>
+                      </a:r>
+                      <a:endParaRPr lang="en-ZA" sz="1600" b="1" i="0" u="none" strike="noStrike" dirty="0">
+                        <a:solidFill>
+                          <a:srgbClr val="000000"/>
+                        </a:solidFill>
+                        <a:effectLst/>
+                        <a:latin typeface="Verdana" panose="020B0604030504040204" pitchFamily="34" charset="0"/>
+                        <a:ea typeface="Verdana" panose="020B0604030504040204" pitchFamily="34" charset="0"/>
+                        <a:cs typeface="Verdana" panose="020B0604030504040204" pitchFamily="34" charset="0"/>
+                      </a:endParaRPr>
+                    </a:p>
+                  </a:txBody>
+                  <a:tcPr marL="45720" marR="45720" anchor="b">
+                    <a:solidFill>
+                      <a:schemeClr val="accent1">
+                        <a:lumMod val="40000"/>
+                        <a:lumOff val="60000"/>
+                      </a:schemeClr>
+                    </a:solidFill>
+                  </a:tcPr>
+                </a:tc>
+                <a:tc>
+                  <a:txBody>
+                    <a:bodyPr/>
+                    <a:lstStyle/>
+                    <a:p>
+                      <a:pPr algn="ctr" fontAlgn="b">
+                        <a:buNone/>
+                      </a:pPr>
+                      <a:r>
+                        <a:rPr lang="en-ZA" sz="1600" b="1" u="none" strike="noStrike" dirty="0">
+                          <a:effectLst/>
+                          <a:latin typeface="Verdana" panose="020B0604030504040204" pitchFamily="34" charset="0"/>
+                          <a:ea typeface="Verdana" panose="020B0604030504040204" pitchFamily="34" charset="0"/>
+                          <a:cs typeface="Verdana" panose="020B0604030504040204" pitchFamily="34" charset="0"/>
+                        </a:rPr>
+                        <a:t>third 95</a:t>
+                      </a:r>
+                      <a:endParaRPr lang="en-ZA" sz="1600" b="1" i="0" u="none" strike="noStrike" dirty="0">
+                        <a:solidFill>
+                          <a:srgbClr val="000000"/>
+                        </a:solidFill>
+                        <a:effectLst/>
+                        <a:latin typeface="Verdana" panose="020B0604030504040204" pitchFamily="34" charset="0"/>
+                        <a:ea typeface="Verdana" panose="020B0604030504040204" pitchFamily="34" charset="0"/>
+                        <a:cs typeface="Verdana" panose="020B0604030504040204" pitchFamily="34" charset="0"/>
+                      </a:endParaRPr>
+                    </a:p>
+                  </a:txBody>
+                  <a:tcPr marL="45720" marR="45720" anchor="b">
+                    <a:solidFill>
+                      <a:schemeClr val="accent1">
+                        <a:lumMod val="40000"/>
+                        <a:lumOff val="60000"/>
+                      </a:schemeClr>
+                    </a:solidFill>
+                  </a:tcPr>
+                </a:tc>
+                <a:tc>
+                  <a:txBody>
+                    <a:bodyPr/>
+                    <a:lstStyle/>
+                    <a:p>
+                      <a:pPr algn="ctr" fontAlgn="b">
+                        <a:buNone/>
+                      </a:pPr>
+                      <a:r>
+                        <a:rPr lang="en-ZA" sz="1600" b="1" u="none" strike="noStrike" dirty="0">
+                          <a:effectLst/>
+                          <a:latin typeface="Verdana" panose="020B0604030504040204" pitchFamily="34" charset="0"/>
+                          <a:ea typeface="Verdana" panose="020B0604030504040204" pitchFamily="34" charset="0"/>
+                          <a:cs typeface="Verdana" panose="020B0604030504040204" pitchFamily="34" charset="0"/>
+                        </a:rPr>
+                        <a:t>mortality</a:t>
+                      </a:r>
+                      <a:endParaRPr lang="en-ZA" sz="1600" b="1" i="0" u="none" strike="noStrike" dirty="0">
+                        <a:solidFill>
+                          <a:srgbClr val="000000"/>
+                        </a:solidFill>
+                        <a:effectLst/>
+                        <a:latin typeface="Verdana" panose="020B0604030504040204" pitchFamily="34" charset="0"/>
+                        <a:ea typeface="Verdana" panose="020B0604030504040204" pitchFamily="34" charset="0"/>
+                        <a:cs typeface="Verdana" panose="020B0604030504040204" pitchFamily="34" charset="0"/>
+                      </a:endParaRPr>
+                    </a:p>
+                  </a:txBody>
+                  <a:tcPr marL="45720" marR="45720" anchor="b">
+                    <a:solidFill>
+                      <a:schemeClr val="accent1">
+                        <a:lumMod val="40000"/>
+                        <a:lumOff val="60000"/>
+                      </a:schemeClr>
+                    </a:solidFill>
+                  </a:tcPr>
+                </a:tc>
+                <a:extLst>
+                  <a:ext uri="{0D108BD9-81ED-4DB2-BD59-A6C34878D82A}">
+                    <a16:rowId xmlns:a16="http://schemas.microsoft.com/office/drawing/2014/main" val="2377431970"/>
+                  </a:ext>
+                </a:extLst>
+              </a:tr>
+              <a:tr h="326385">
+                <a:tc>
+                  <a:txBody>
+                    <a:bodyPr/>
+                    <a:lstStyle/>
+                    <a:p>
+                      <a:pPr algn="l" fontAlgn="b">
+                        <a:buNone/>
+                      </a:pPr>
+                      <a:r>
+                        <a:rPr lang="en-ZA" sz="1600" u="none" strike="noStrike" dirty="0">
+                          <a:effectLst/>
+                          <a:latin typeface="Verdana" panose="020B0604030504040204" pitchFamily="34" charset="0"/>
+                          <a:ea typeface="Verdana" panose="020B0604030504040204" pitchFamily="34" charset="0"/>
+                          <a:cs typeface="Verdana" panose="020B0604030504040204" pitchFamily="34" charset="0"/>
+                        </a:rPr>
+                        <a:t>Infant prophylaxis</a:t>
+                      </a:r>
+                      <a:endParaRPr lang="en-ZA" sz="1600" b="0" i="0" u="none" strike="noStrike" dirty="0">
+                        <a:solidFill>
+                          <a:srgbClr val="000000"/>
+                        </a:solidFill>
+                        <a:effectLst/>
+                        <a:latin typeface="Verdana" panose="020B0604030504040204" pitchFamily="34" charset="0"/>
+                        <a:ea typeface="Verdana" panose="020B0604030504040204" pitchFamily="34" charset="0"/>
+                        <a:cs typeface="Verdana" panose="020B0604030504040204" pitchFamily="34" charset="0"/>
+                      </a:endParaRPr>
+                    </a:p>
+                  </a:txBody>
+                  <a:tcPr marL="45720" marR="45720" anchor="b">
+                    <a:noFill/>
+                  </a:tcPr>
+                </a:tc>
+                <a:tc>
+                  <a:txBody>
+                    <a:bodyPr/>
+                    <a:lstStyle/>
+                    <a:p>
+                      <a:pPr algn="ctr" fontAlgn="b">
+                        <a:buNone/>
+                      </a:pPr>
+                      <a:endParaRPr lang="en-ZA" sz="1600" b="0" i="0" u="none" strike="noStrike">
+                        <a:solidFill>
+                          <a:srgbClr val="000000"/>
+                        </a:solidFill>
+                        <a:effectLst/>
+                        <a:latin typeface="Verdana" panose="020B0604030504040204" pitchFamily="34" charset="0"/>
+                        <a:ea typeface="Verdana" panose="020B0604030504040204" pitchFamily="34" charset="0"/>
+                        <a:cs typeface="Verdana" panose="020B0604030504040204" pitchFamily="34" charset="0"/>
+                      </a:endParaRPr>
+                    </a:p>
+                  </a:txBody>
+                  <a:tcPr marL="45720" marR="45720" anchor="b">
+                    <a:noFill/>
+                  </a:tcPr>
+                </a:tc>
+                <a:tc>
+                  <a:txBody>
+                    <a:bodyPr/>
+                    <a:lstStyle/>
+                    <a:p>
+                      <a:pPr algn="ctr" fontAlgn="b">
+                        <a:buNone/>
+                      </a:pPr>
+                      <a:r>
+                        <a:rPr lang="en-ZA" sz="1600" u="none" strike="noStrike">
+                          <a:effectLst/>
+                          <a:latin typeface="Verdana" panose="020B0604030504040204" pitchFamily="34" charset="0"/>
+                          <a:ea typeface="Verdana" panose="020B0604030504040204" pitchFamily="34" charset="0"/>
+                          <a:cs typeface="Verdana" panose="020B0604030504040204" pitchFamily="34" charset="0"/>
+                        </a:rPr>
+                        <a:t>X</a:t>
+                      </a:r>
+                      <a:endParaRPr lang="en-ZA" sz="1600" b="0" i="0" u="none" strike="noStrike">
+                        <a:solidFill>
+                          <a:srgbClr val="000000"/>
+                        </a:solidFill>
+                        <a:effectLst/>
+                        <a:latin typeface="Verdana" panose="020B0604030504040204" pitchFamily="34" charset="0"/>
+                        <a:ea typeface="Verdana" panose="020B0604030504040204" pitchFamily="34" charset="0"/>
+                        <a:cs typeface="Verdana" panose="020B0604030504040204" pitchFamily="34" charset="0"/>
+                      </a:endParaRPr>
+                    </a:p>
+                  </a:txBody>
+                  <a:tcPr marL="45720" marR="45720" anchor="b">
+                    <a:noFill/>
+                  </a:tcPr>
+                </a:tc>
+                <a:tc>
+                  <a:txBody>
+                    <a:bodyPr/>
+                    <a:lstStyle/>
+                    <a:p>
+                      <a:pPr algn="ctr" fontAlgn="b">
+                        <a:buNone/>
+                      </a:pPr>
+                      <a:endParaRPr lang="en-ZA" sz="1600" b="0" i="0" u="none" strike="noStrike">
+                        <a:solidFill>
+                          <a:srgbClr val="000000"/>
+                        </a:solidFill>
+                        <a:effectLst/>
+                        <a:latin typeface="Verdana" panose="020B0604030504040204" pitchFamily="34" charset="0"/>
+                        <a:ea typeface="Verdana" panose="020B0604030504040204" pitchFamily="34" charset="0"/>
+                        <a:cs typeface="Verdana" panose="020B0604030504040204" pitchFamily="34" charset="0"/>
+                      </a:endParaRPr>
+                    </a:p>
+                  </a:txBody>
+                  <a:tcPr marL="45720" marR="45720" anchor="b">
+                    <a:noFill/>
+                  </a:tcPr>
+                </a:tc>
+                <a:tc>
+                  <a:txBody>
+                    <a:bodyPr/>
+                    <a:lstStyle/>
+                    <a:p>
+                      <a:pPr algn="ctr" fontAlgn="b">
+                        <a:buNone/>
+                      </a:pPr>
+                      <a:endParaRPr lang="en-ZA" sz="1600" b="0" i="0" u="none" strike="noStrike" dirty="0">
+                        <a:solidFill>
+                          <a:srgbClr val="000000"/>
+                        </a:solidFill>
+                        <a:effectLst/>
+                        <a:latin typeface="Verdana" panose="020B0604030504040204" pitchFamily="34" charset="0"/>
+                        <a:ea typeface="Verdana" panose="020B0604030504040204" pitchFamily="34" charset="0"/>
+                        <a:cs typeface="Verdana" panose="020B0604030504040204" pitchFamily="34" charset="0"/>
+                      </a:endParaRPr>
+                    </a:p>
+                  </a:txBody>
+                  <a:tcPr marL="45720" marR="45720" anchor="b">
+                    <a:noFill/>
+                  </a:tcPr>
+                </a:tc>
+                <a:tc>
+                  <a:txBody>
+                    <a:bodyPr/>
+                    <a:lstStyle/>
+                    <a:p>
+                      <a:pPr algn="ctr" fontAlgn="b">
+                        <a:buNone/>
+                      </a:pPr>
+                      <a:endParaRPr lang="en-ZA" sz="1600" b="0" i="0" u="none" strike="noStrike">
+                        <a:solidFill>
+                          <a:srgbClr val="000000"/>
+                        </a:solidFill>
+                        <a:effectLst/>
+                        <a:latin typeface="Verdana" panose="020B0604030504040204" pitchFamily="34" charset="0"/>
+                        <a:ea typeface="Verdana" panose="020B0604030504040204" pitchFamily="34" charset="0"/>
+                        <a:cs typeface="Verdana" panose="020B0604030504040204" pitchFamily="34" charset="0"/>
+                      </a:endParaRPr>
+                    </a:p>
+                  </a:txBody>
+                  <a:tcPr marL="45720" marR="45720" anchor="b">
+                    <a:noFill/>
+                  </a:tcPr>
+                </a:tc>
+                <a:tc>
+                  <a:txBody>
+                    <a:bodyPr/>
+                    <a:lstStyle/>
+                    <a:p>
+                      <a:pPr algn="ctr" fontAlgn="b">
+                        <a:buNone/>
+                      </a:pPr>
+                      <a:endParaRPr lang="en-ZA" sz="1600" b="0" i="0" u="none" strike="noStrike" dirty="0">
+                        <a:solidFill>
+                          <a:srgbClr val="000000"/>
+                        </a:solidFill>
+                        <a:effectLst/>
+                        <a:latin typeface="Verdana" panose="020B0604030504040204" pitchFamily="34" charset="0"/>
+                        <a:ea typeface="Verdana" panose="020B0604030504040204" pitchFamily="34" charset="0"/>
+                        <a:cs typeface="Verdana" panose="020B0604030504040204" pitchFamily="34" charset="0"/>
+                      </a:endParaRPr>
+                    </a:p>
+                  </a:txBody>
+                  <a:tcPr marL="45720" marR="45720" anchor="b">
+                    <a:noFill/>
+                  </a:tcPr>
+                </a:tc>
+                <a:extLst>
+                  <a:ext uri="{0D108BD9-81ED-4DB2-BD59-A6C34878D82A}">
+                    <a16:rowId xmlns:a16="http://schemas.microsoft.com/office/drawing/2014/main" val="2337716733"/>
+                  </a:ext>
+                </a:extLst>
+              </a:tr>
+              <a:tr h="326385">
+                <a:tc>
+                  <a:txBody>
+                    <a:bodyPr/>
+                    <a:lstStyle/>
+                    <a:p>
+                      <a:pPr algn="l" fontAlgn="b">
+                        <a:buNone/>
+                      </a:pPr>
+                      <a:r>
+                        <a:rPr lang="en-ZA" sz="1600" u="none" strike="noStrike" dirty="0">
+                          <a:effectLst/>
+                          <a:latin typeface="Verdana" panose="020B0604030504040204" pitchFamily="34" charset="0"/>
+                          <a:ea typeface="Verdana" panose="020B0604030504040204" pitchFamily="34" charset="0"/>
+                          <a:cs typeface="Verdana" panose="020B0604030504040204" pitchFamily="34" charset="0"/>
+                        </a:rPr>
+                        <a:t>PEP</a:t>
+                      </a:r>
+                      <a:endParaRPr lang="en-ZA" sz="1600" b="0" i="0" u="none" strike="noStrike" dirty="0">
+                        <a:solidFill>
+                          <a:srgbClr val="000000"/>
+                        </a:solidFill>
+                        <a:effectLst/>
+                        <a:latin typeface="Verdana" panose="020B0604030504040204" pitchFamily="34" charset="0"/>
+                        <a:ea typeface="Verdana" panose="020B0604030504040204" pitchFamily="34" charset="0"/>
+                        <a:cs typeface="Verdana" panose="020B0604030504040204" pitchFamily="34" charset="0"/>
+                      </a:endParaRPr>
+                    </a:p>
+                  </a:txBody>
+                  <a:tcPr marL="45720" marR="45720" anchor="b">
+                    <a:noFill/>
+                  </a:tcPr>
+                </a:tc>
+                <a:tc>
+                  <a:txBody>
+                    <a:bodyPr/>
+                    <a:lstStyle/>
+                    <a:p>
+                      <a:pPr algn="ctr" fontAlgn="b">
+                        <a:buNone/>
+                      </a:pPr>
+                      <a:r>
+                        <a:rPr lang="en-ZA" sz="1600" u="none" strike="noStrike" dirty="0">
+                          <a:effectLst/>
+                          <a:latin typeface="Verdana" panose="020B0604030504040204" pitchFamily="34" charset="0"/>
+                          <a:ea typeface="Verdana" panose="020B0604030504040204" pitchFamily="34" charset="0"/>
+                          <a:cs typeface="Verdana" panose="020B0604030504040204" pitchFamily="34" charset="0"/>
+                        </a:rPr>
+                        <a:t>X</a:t>
+                      </a:r>
+                      <a:endParaRPr lang="en-ZA" sz="1600" b="0" i="0" u="none" strike="noStrike" dirty="0">
+                        <a:solidFill>
+                          <a:srgbClr val="000000"/>
+                        </a:solidFill>
+                        <a:effectLst/>
+                        <a:latin typeface="Verdana" panose="020B0604030504040204" pitchFamily="34" charset="0"/>
+                        <a:ea typeface="Verdana" panose="020B0604030504040204" pitchFamily="34" charset="0"/>
+                        <a:cs typeface="Verdana" panose="020B0604030504040204" pitchFamily="34" charset="0"/>
+                      </a:endParaRPr>
+                    </a:p>
+                  </a:txBody>
+                  <a:tcPr marL="45720" marR="45720" anchor="b">
+                    <a:noFill/>
+                  </a:tcPr>
+                </a:tc>
+                <a:tc>
+                  <a:txBody>
+                    <a:bodyPr/>
+                    <a:lstStyle/>
+                    <a:p>
+                      <a:pPr algn="ctr" fontAlgn="b">
+                        <a:buNone/>
+                      </a:pPr>
+                      <a:endParaRPr lang="en-ZA" sz="1600" b="0" i="0" u="none" strike="noStrike">
+                        <a:solidFill>
+                          <a:srgbClr val="000000"/>
+                        </a:solidFill>
+                        <a:effectLst/>
+                        <a:latin typeface="Verdana" panose="020B0604030504040204" pitchFamily="34" charset="0"/>
+                        <a:ea typeface="Verdana" panose="020B0604030504040204" pitchFamily="34" charset="0"/>
+                        <a:cs typeface="Verdana" panose="020B0604030504040204" pitchFamily="34" charset="0"/>
+                      </a:endParaRPr>
+                    </a:p>
+                  </a:txBody>
+                  <a:tcPr marL="45720" marR="45720" anchor="b">
+                    <a:noFill/>
+                  </a:tcPr>
+                </a:tc>
+                <a:tc>
+                  <a:txBody>
+                    <a:bodyPr/>
+                    <a:lstStyle/>
+                    <a:p>
+                      <a:pPr algn="ctr" fontAlgn="b">
+                        <a:buNone/>
+                      </a:pPr>
+                      <a:endParaRPr lang="en-ZA" sz="1600" b="0" i="0" u="none" strike="noStrike">
+                        <a:solidFill>
+                          <a:srgbClr val="000000"/>
+                        </a:solidFill>
+                        <a:effectLst/>
+                        <a:latin typeface="Verdana" panose="020B0604030504040204" pitchFamily="34" charset="0"/>
+                        <a:ea typeface="Verdana" panose="020B0604030504040204" pitchFamily="34" charset="0"/>
+                        <a:cs typeface="Verdana" panose="020B0604030504040204" pitchFamily="34" charset="0"/>
+                      </a:endParaRPr>
+                    </a:p>
+                  </a:txBody>
+                  <a:tcPr marL="45720" marR="45720" anchor="b">
+                    <a:noFill/>
+                  </a:tcPr>
+                </a:tc>
+                <a:tc>
+                  <a:txBody>
+                    <a:bodyPr/>
+                    <a:lstStyle/>
+                    <a:p>
+                      <a:pPr algn="ctr" fontAlgn="b">
+                        <a:buNone/>
+                      </a:pPr>
+                      <a:endParaRPr lang="en-ZA" sz="1600" b="0" i="0" u="none" strike="noStrike" dirty="0">
+                        <a:solidFill>
+                          <a:srgbClr val="000000"/>
+                        </a:solidFill>
+                        <a:effectLst/>
+                        <a:latin typeface="Verdana" panose="020B0604030504040204" pitchFamily="34" charset="0"/>
+                        <a:ea typeface="Verdana" panose="020B0604030504040204" pitchFamily="34" charset="0"/>
+                        <a:cs typeface="Verdana" panose="020B0604030504040204" pitchFamily="34" charset="0"/>
+                      </a:endParaRPr>
+                    </a:p>
+                  </a:txBody>
+                  <a:tcPr marL="45720" marR="45720" anchor="b">
+                    <a:noFill/>
+                  </a:tcPr>
+                </a:tc>
+                <a:tc>
+                  <a:txBody>
+                    <a:bodyPr/>
+                    <a:lstStyle/>
+                    <a:p>
+                      <a:pPr algn="ctr" fontAlgn="b">
+                        <a:buNone/>
+                      </a:pPr>
+                      <a:endParaRPr lang="en-ZA" sz="1600" b="0" i="0" u="none" strike="noStrike" dirty="0">
+                        <a:solidFill>
+                          <a:srgbClr val="000000"/>
+                        </a:solidFill>
+                        <a:effectLst/>
+                        <a:latin typeface="Verdana" panose="020B0604030504040204" pitchFamily="34" charset="0"/>
+                        <a:ea typeface="Verdana" panose="020B0604030504040204" pitchFamily="34" charset="0"/>
+                        <a:cs typeface="Verdana" panose="020B0604030504040204" pitchFamily="34" charset="0"/>
+                      </a:endParaRPr>
+                    </a:p>
+                  </a:txBody>
+                  <a:tcPr marL="45720" marR="45720" anchor="b">
+                    <a:noFill/>
+                  </a:tcPr>
+                </a:tc>
+                <a:tc>
+                  <a:txBody>
+                    <a:bodyPr/>
+                    <a:lstStyle/>
+                    <a:p>
+                      <a:pPr algn="ctr" fontAlgn="b">
+                        <a:buNone/>
+                      </a:pPr>
+                      <a:endParaRPr lang="en-ZA" sz="1600" b="0" i="0" u="none" strike="noStrike">
+                        <a:solidFill>
+                          <a:srgbClr val="000000"/>
+                        </a:solidFill>
+                        <a:effectLst/>
+                        <a:latin typeface="Verdana" panose="020B0604030504040204" pitchFamily="34" charset="0"/>
+                        <a:ea typeface="Verdana" panose="020B0604030504040204" pitchFamily="34" charset="0"/>
+                        <a:cs typeface="Verdana" panose="020B0604030504040204" pitchFamily="34" charset="0"/>
+                      </a:endParaRPr>
+                    </a:p>
+                  </a:txBody>
+                  <a:tcPr marL="45720" marR="45720" anchor="b">
+                    <a:noFill/>
+                  </a:tcPr>
+                </a:tc>
+                <a:extLst>
+                  <a:ext uri="{0D108BD9-81ED-4DB2-BD59-A6C34878D82A}">
+                    <a16:rowId xmlns:a16="http://schemas.microsoft.com/office/drawing/2014/main" val="330474901"/>
+                  </a:ext>
+                </a:extLst>
+              </a:tr>
+              <a:tr h="326385">
+                <a:tc>
+                  <a:txBody>
+                    <a:bodyPr/>
+                    <a:lstStyle/>
+                    <a:p>
+                      <a:pPr algn="l" fontAlgn="b">
+                        <a:buNone/>
+                      </a:pPr>
+                      <a:r>
+                        <a:rPr lang="en-ZA" sz="1600" u="none" strike="noStrike" dirty="0">
+                          <a:effectLst/>
+                          <a:latin typeface="Verdana" panose="020B0604030504040204" pitchFamily="34" charset="0"/>
+                          <a:ea typeface="Verdana" panose="020B0604030504040204" pitchFamily="34" charset="0"/>
+                          <a:cs typeface="Verdana" panose="020B0604030504040204" pitchFamily="34" charset="0"/>
+                        </a:rPr>
+                        <a:t>Condom availability</a:t>
+                      </a:r>
+                      <a:endParaRPr lang="en-ZA" sz="1600" b="0" i="0" u="none" strike="noStrike" dirty="0">
+                        <a:solidFill>
+                          <a:srgbClr val="000000"/>
+                        </a:solidFill>
+                        <a:effectLst/>
+                        <a:latin typeface="Verdana" panose="020B0604030504040204" pitchFamily="34" charset="0"/>
+                        <a:ea typeface="Verdana" panose="020B0604030504040204" pitchFamily="34" charset="0"/>
+                        <a:cs typeface="Verdana" panose="020B0604030504040204" pitchFamily="34" charset="0"/>
+                      </a:endParaRPr>
+                    </a:p>
+                  </a:txBody>
+                  <a:tcPr marL="45720" marR="45720" anchor="b">
+                    <a:noFill/>
+                  </a:tcPr>
+                </a:tc>
+                <a:tc>
+                  <a:txBody>
+                    <a:bodyPr/>
+                    <a:lstStyle/>
+                    <a:p>
+                      <a:pPr algn="ctr" fontAlgn="b">
+                        <a:buNone/>
+                      </a:pPr>
+                      <a:r>
+                        <a:rPr lang="en-ZA" sz="1600" u="none" strike="noStrike">
+                          <a:effectLst/>
+                          <a:latin typeface="Verdana" panose="020B0604030504040204" pitchFamily="34" charset="0"/>
+                          <a:ea typeface="Verdana" panose="020B0604030504040204" pitchFamily="34" charset="0"/>
+                          <a:cs typeface="Verdana" panose="020B0604030504040204" pitchFamily="34" charset="0"/>
+                        </a:rPr>
+                        <a:t>X</a:t>
+                      </a:r>
+                      <a:endParaRPr lang="en-ZA" sz="1600" b="0" i="0" u="none" strike="noStrike">
+                        <a:solidFill>
+                          <a:srgbClr val="000000"/>
+                        </a:solidFill>
+                        <a:effectLst/>
+                        <a:latin typeface="Verdana" panose="020B0604030504040204" pitchFamily="34" charset="0"/>
+                        <a:ea typeface="Verdana" panose="020B0604030504040204" pitchFamily="34" charset="0"/>
+                        <a:cs typeface="Verdana" panose="020B0604030504040204" pitchFamily="34" charset="0"/>
+                      </a:endParaRPr>
+                    </a:p>
+                  </a:txBody>
+                  <a:tcPr marL="45720" marR="45720" anchor="b">
+                    <a:noFill/>
+                  </a:tcPr>
+                </a:tc>
+                <a:tc>
+                  <a:txBody>
+                    <a:bodyPr/>
+                    <a:lstStyle/>
+                    <a:p>
+                      <a:pPr algn="ctr" fontAlgn="b">
+                        <a:buNone/>
+                      </a:pPr>
+                      <a:endParaRPr lang="en-ZA" sz="1600" b="0" i="0" u="none" strike="noStrike" dirty="0">
+                        <a:solidFill>
+                          <a:srgbClr val="000000"/>
+                        </a:solidFill>
+                        <a:effectLst/>
+                        <a:latin typeface="Verdana" panose="020B0604030504040204" pitchFamily="34" charset="0"/>
+                        <a:ea typeface="Verdana" panose="020B0604030504040204" pitchFamily="34" charset="0"/>
+                        <a:cs typeface="Verdana" panose="020B0604030504040204" pitchFamily="34" charset="0"/>
+                      </a:endParaRPr>
+                    </a:p>
+                  </a:txBody>
+                  <a:tcPr marL="45720" marR="45720" anchor="b">
+                    <a:noFill/>
+                  </a:tcPr>
+                </a:tc>
+                <a:tc>
+                  <a:txBody>
+                    <a:bodyPr/>
+                    <a:lstStyle/>
+                    <a:p>
+                      <a:pPr algn="ctr" fontAlgn="b">
+                        <a:buNone/>
+                      </a:pPr>
+                      <a:endParaRPr lang="en-ZA" sz="1600" b="0" i="0" u="none" strike="noStrike" dirty="0">
+                        <a:solidFill>
+                          <a:srgbClr val="000000"/>
+                        </a:solidFill>
+                        <a:effectLst/>
+                        <a:latin typeface="Verdana" panose="020B0604030504040204" pitchFamily="34" charset="0"/>
+                        <a:ea typeface="Verdana" panose="020B0604030504040204" pitchFamily="34" charset="0"/>
+                        <a:cs typeface="Verdana" panose="020B0604030504040204" pitchFamily="34" charset="0"/>
+                      </a:endParaRPr>
+                    </a:p>
+                  </a:txBody>
+                  <a:tcPr marL="45720" marR="45720" anchor="b">
+                    <a:noFill/>
+                  </a:tcPr>
+                </a:tc>
+                <a:tc>
+                  <a:txBody>
+                    <a:bodyPr/>
+                    <a:lstStyle/>
+                    <a:p>
+                      <a:pPr algn="ctr" fontAlgn="b">
+                        <a:buNone/>
+                      </a:pPr>
+                      <a:endParaRPr lang="en-ZA" sz="1600" b="0" i="0" u="none" strike="noStrike">
+                        <a:solidFill>
+                          <a:srgbClr val="000000"/>
+                        </a:solidFill>
+                        <a:effectLst/>
+                        <a:latin typeface="Verdana" panose="020B0604030504040204" pitchFamily="34" charset="0"/>
+                        <a:ea typeface="Verdana" panose="020B0604030504040204" pitchFamily="34" charset="0"/>
+                        <a:cs typeface="Verdana" panose="020B0604030504040204" pitchFamily="34" charset="0"/>
+                      </a:endParaRPr>
+                    </a:p>
+                  </a:txBody>
+                  <a:tcPr marL="45720" marR="45720" anchor="b">
+                    <a:noFill/>
+                  </a:tcPr>
+                </a:tc>
+                <a:tc>
+                  <a:txBody>
+                    <a:bodyPr/>
+                    <a:lstStyle/>
+                    <a:p>
+                      <a:pPr algn="ctr" fontAlgn="b">
+                        <a:buNone/>
+                      </a:pPr>
+                      <a:endParaRPr lang="en-ZA" sz="1600" b="0" i="0" u="none" strike="noStrike" dirty="0">
+                        <a:solidFill>
+                          <a:srgbClr val="000000"/>
+                        </a:solidFill>
+                        <a:effectLst/>
+                        <a:latin typeface="Verdana" panose="020B0604030504040204" pitchFamily="34" charset="0"/>
+                        <a:ea typeface="Verdana" panose="020B0604030504040204" pitchFamily="34" charset="0"/>
+                        <a:cs typeface="Verdana" panose="020B0604030504040204" pitchFamily="34" charset="0"/>
+                      </a:endParaRPr>
+                    </a:p>
+                  </a:txBody>
+                  <a:tcPr marL="45720" marR="45720" anchor="b">
+                    <a:noFill/>
+                  </a:tcPr>
+                </a:tc>
+                <a:tc>
+                  <a:txBody>
+                    <a:bodyPr/>
+                    <a:lstStyle/>
+                    <a:p>
+                      <a:pPr algn="ctr" fontAlgn="b">
+                        <a:buNone/>
+                      </a:pPr>
+                      <a:endParaRPr lang="en-ZA" sz="1600" b="0" i="0" u="none" strike="noStrike">
+                        <a:solidFill>
+                          <a:srgbClr val="000000"/>
+                        </a:solidFill>
+                        <a:effectLst/>
+                        <a:latin typeface="Verdana" panose="020B0604030504040204" pitchFamily="34" charset="0"/>
+                        <a:ea typeface="Verdana" panose="020B0604030504040204" pitchFamily="34" charset="0"/>
+                        <a:cs typeface="Verdana" panose="020B0604030504040204" pitchFamily="34" charset="0"/>
+                      </a:endParaRPr>
+                    </a:p>
+                  </a:txBody>
+                  <a:tcPr marL="45720" marR="45720" anchor="b">
+                    <a:noFill/>
+                  </a:tcPr>
+                </a:tc>
+                <a:extLst>
+                  <a:ext uri="{0D108BD9-81ED-4DB2-BD59-A6C34878D82A}">
+                    <a16:rowId xmlns:a16="http://schemas.microsoft.com/office/drawing/2014/main" val="2560179810"/>
+                  </a:ext>
+                </a:extLst>
+              </a:tr>
+              <a:tr h="326385">
+                <a:tc>
+                  <a:txBody>
+                    <a:bodyPr/>
+                    <a:lstStyle/>
+                    <a:p>
+                      <a:pPr algn="l" fontAlgn="b">
+                        <a:buNone/>
+                      </a:pPr>
+                      <a:r>
+                        <a:rPr lang="en-ZA" sz="1600" u="none" strike="noStrike" dirty="0" err="1">
+                          <a:effectLst/>
+                          <a:latin typeface="Verdana" panose="020B0604030504040204" pitchFamily="34" charset="0"/>
+                          <a:ea typeface="Verdana" panose="020B0604030504040204" pitchFamily="34" charset="0"/>
+                          <a:cs typeface="Verdana" panose="020B0604030504040204" pitchFamily="34" charset="0"/>
+                        </a:rPr>
+                        <a:t>PrEP</a:t>
+                      </a:r>
+                      <a:r>
+                        <a:rPr lang="en-ZA" sz="1600" u="none" strike="noStrike" dirty="0">
+                          <a:effectLst/>
+                          <a:latin typeface="Verdana" panose="020B0604030504040204" pitchFamily="34" charset="0"/>
+                          <a:ea typeface="Verdana" panose="020B0604030504040204" pitchFamily="34" charset="0"/>
+                          <a:cs typeface="Verdana" panose="020B0604030504040204" pitchFamily="34" charset="0"/>
+                        </a:rPr>
+                        <a:t> (oral)</a:t>
+                      </a:r>
+                      <a:endParaRPr lang="en-ZA" sz="1600" b="0" i="0" u="none" strike="noStrike" dirty="0">
+                        <a:solidFill>
+                          <a:srgbClr val="000000"/>
+                        </a:solidFill>
+                        <a:effectLst/>
+                        <a:latin typeface="Verdana" panose="020B0604030504040204" pitchFamily="34" charset="0"/>
+                        <a:ea typeface="Verdana" panose="020B0604030504040204" pitchFamily="34" charset="0"/>
+                        <a:cs typeface="Verdana" panose="020B0604030504040204" pitchFamily="34" charset="0"/>
+                      </a:endParaRPr>
+                    </a:p>
+                  </a:txBody>
+                  <a:tcPr marL="45720" marR="45720" anchor="b">
+                    <a:noFill/>
+                  </a:tcPr>
+                </a:tc>
+                <a:tc>
+                  <a:txBody>
+                    <a:bodyPr/>
+                    <a:lstStyle/>
+                    <a:p>
+                      <a:pPr algn="ctr" fontAlgn="b">
+                        <a:buNone/>
+                      </a:pPr>
+                      <a:r>
+                        <a:rPr lang="en-ZA" sz="1600" u="none" strike="noStrike" dirty="0">
+                          <a:effectLst/>
+                          <a:latin typeface="Verdana" panose="020B0604030504040204" pitchFamily="34" charset="0"/>
+                          <a:ea typeface="Verdana" panose="020B0604030504040204" pitchFamily="34" charset="0"/>
+                          <a:cs typeface="Verdana" panose="020B0604030504040204" pitchFamily="34" charset="0"/>
+                        </a:rPr>
+                        <a:t>X</a:t>
+                      </a:r>
+                      <a:endParaRPr lang="en-ZA" sz="1600" b="0" i="0" u="none" strike="noStrike" dirty="0">
+                        <a:solidFill>
+                          <a:srgbClr val="000000"/>
+                        </a:solidFill>
+                        <a:effectLst/>
+                        <a:latin typeface="Verdana" panose="020B0604030504040204" pitchFamily="34" charset="0"/>
+                        <a:ea typeface="Verdana" panose="020B0604030504040204" pitchFamily="34" charset="0"/>
+                        <a:cs typeface="Verdana" panose="020B0604030504040204" pitchFamily="34" charset="0"/>
+                      </a:endParaRPr>
+                    </a:p>
+                  </a:txBody>
+                  <a:tcPr marL="45720" marR="45720" anchor="b">
+                    <a:noFill/>
+                  </a:tcPr>
+                </a:tc>
+                <a:tc>
+                  <a:txBody>
+                    <a:bodyPr/>
+                    <a:lstStyle/>
+                    <a:p>
+                      <a:pPr algn="ctr" fontAlgn="b">
+                        <a:buNone/>
+                      </a:pPr>
+                      <a:endParaRPr lang="en-ZA" sz="1600" b="0" i="0" u="none" strike="noStrike">
+                        <a:solidFill>
+                          <a:srgbClr val="000000"/>
+                        </a:solidFill>
+                        <a:effectLst/>
+                        <a:latin typeface="Verdana" panose="020B0604030504040204" pitchFamily="34" charset="0"/>
+                        <a:ea typeface="Verdana" panose="020B0604030504040204" pitchFamily="34" charset="0"/>
+                        <a:cs typeface="Verdana" panose="020B0604030504040204" pitchFamily="34" charset="0"/>
+                      </a:endParaRPr>
+                    </a:p>
+                  </a:txBody>
+                  <a:tcPr marL="45720" marR="45720" anchor="b">
+                    <a:noFill/>
+                  </a:tcPr>
+                </a:tc>
+                <a:tc>
+                  <a:txBody>
+                    <a:bodyPr/>
+                    <a:lstStyle/>
+                    <a:p>
+                      <a:pPr algn="ctr" fontAlgn="b">
+                        <a:buNone/>
+                      </a:pPr>
+                      <a:endParaRPr lang="en-ZA" sz="1600" b="0" i="0" u="none" strike="noStrike" dirty="0">
+                        <a:solidFill>
+                          <a:srgbClr val="000000"/>
+                        </a:solidFill>
+                        <a:effectLst/>
+                        <a:latin typeface="Verdana" panose="020B0604030504040204" pitchFamily="34" charset="0"/>
+                        <a:ea typeface="Verdana" panose="020B0604030504040204" pitchFamily="34" charset="0"/>
+                        <a:cs typeface="Verdana" panose="020B0604030504040204" pitchFamily="34" charset="0"/>
+                      </a:endParaRPr>
+                    </a:p>
+                  </a:txBody>
+                  <a:tcPr marL="45720" marR="45720" anchor="b">
+                    <a:noFill/>
+                  </a:tcPr>
+                </a:tc>
+                <a:tc>
+                  <a:txBody>
+                    <a:bodyPr/>
+                    <a:lstStyle/>
+                    <a:p>
+                      <a:pPr algn="ctr" fontAlgn="b">
+                        <a:buNone/>
+                      </a:pPr>
+                      <a:endParaRPr lang="en-ZA" sz="1600" b="0" i="0" u="none" strike="noStrike" dirty="0">
+                        <a:solidFill>
+                          <a:srgbClr val="000000"/>
+                        </a:solidFill>
+                        <a:effectLst/>
+                        <a:latin typeface="Verdana" panose="020B0604030504040204" pitchFamily="34" charset="0"/>
+                        <a:ea typeface="Verdana" panose="020B0604030504040204" pitchFamily="34" charset="0"/>
+                        <a:cs typeface="Verdana" panose="020B0604030504040204" pitchFamily="34" charset="0"/>
+                      </a:endParaRPr>
+                    </a:p>
+                  </a:txBody>
+                  <a:tcPr marL="45720" marR="45720" anchor="b">
+                    <a:noFill/>
+                  </a:tcPr>
+                </a:tc>
+                <a:tc>
+                  <a:txBody>
+                    <a:bodyPr/>
+                    <a:lstStyle/>
+                    <a:p>
+                      <a:pPr algn="ctr" fontAlgn="b">
+                        <a:buNone/>
+                      </a:pPr>
+                      <a:endParaRPr lang="en-ZA" sz="1600" b="0" i="0" u="none" strike="noStrike" dirty="0">
+                        <a:solidFill>
+                          <a:srgbClr val="000000"/>
+                        </a:solidFill>
+                        <a:effectLst/>
+                        <a:latin typeface="Verdana" panose="020B0604030504040204" pitchFamily="34" charset="0"/>
+                        <a:ea typeface="Verdana" panose="020B0604030504040204" pitchFamily="34" charset="0"/>
+                        <a:cs typeface="Verdana" panose="020B0604030504040204" pitchFamily="34" charset="0"/>
+                      </a:endParaRPr>
+                    </a:p>
+                  </a:txBody>
+                  <a:tcPr marL="45720" marR="45720" anchor="b">
+                    <a:noFill/>
+                  </a:tcPr>
+                </a:tc>
+                <a:tc>
+                  <a:txBody>
+                    <a:bodyPr/>
+                    <a:lstStyle/>
+                    <a:p>
+                      <a:pPr algn="ctr" fontAlgn="b">
+                        <a:buNone/>
+                      </a:pPr>
+                      <a:endParaRPr lang="en-ZA" sz="1600" b="0" i="0" u="none" strike="noStrike" dirty="0">
+                        <a:solidFill>
+                          <a:srgbClr val="000000"/>
+                        </a:solidFill>
+                        <a:effectLst/>
+                        <a:latin typeface="Verdana" panose="020B0604030504040204" pitchFamily="34" charset="0"/>
+                        <a:ea typeface="Verdana" panose="020B0604030504040204" pitchFamily="34" charset="0"/>
+                        <a:cs typeface="Verdana" panose="020B0604030504040204" pitchFamily="34" charset="0"/>
+                      </a:endParaRPr>
+                    </a:p>
+                  </a:txBody>
+                  <a:tcPr marL="45720" marR="45720" anchor="b">
+                    <a:noFill/>
+                  </a:tcPr>
+                </a:tc>
+                <a:extLst>
+                  <a:ext uri="{0D108BD9-81ED-4DB2-BD59-A6C34878D82A}">
+                    <a16:rowId xmlns:a16="http://schemas.microsoft.com/office/drawing/2014/main" val="393452433"/>
+                  </a:ext>
+                </a:extLst>
+              </a:tr>
+              <a:tr h="326385">
+                <a:tc>
+                  <a:txBody>
+                    <a:bodyPr/>
+                    <a:lstStyle/>
+                    <a:p>
+                      <a:pPr algn="l" fontAlgn="b">
+                        <a:buNone/>
+                      </a:pPr>
+                      <a:r>
+                        <a:rPr lang="en-ZA" sz="1600" u="none" strike="noStrike" dirty="0" err="1">
+                          <a:effectLst/>
+                          <a:latin typeface="Verdana" panose="020B0604030504040204" pitchFamily="34" charset="0"/>
+                          <a:ea typeface="Verdana" panose="020B0604030504040204" pitchFamily="34" charset="0"/>
+                          <a:cs typeface="Verdana" panose="020B0604030504040204" pitchFamily="34" charset="0"/>
+                        </a:rPr>
+                        <a:t>PrEP</a:t>
+                      </a:r>
+                      <a:r>
+                        <a:rPr lang="en-ZA" sz="1600" u="none" strike="noStrike" dirty="0">
+                          <a:effectLst/>
+                          <a:latin typeface="Verdana" panose="020B0604030504040204" pitchFamily="34" charset="0"/>
+                          <a:ea typeface="Verdana" panose="020B0604030504040204" pitchFamily="34" charset="0"/>
+                          <a:cs typeface="Verdana" panose="020B0604030504040204" pitchFamily="34" charset="0"/>
+                        </a:rPr>
+                        <a:t> (</a:t>
+                      </a:r>
+                      <a:r>
+                        <a:rPr lang="en-ZA" sz="1600" u="none" strike="noStrike" dirty="0" err="1">
+                          <a:effectLst/>
+                          <a:latin typeface="Verdana" panose="020B0604030504040204" pitchFamily="34" charset="0"/>
+                          <a:ea typeface="Verdana" panose="020B0604030504040204" pitchFamily="34" charset="0"/>
+                          <a:cs typeface="Verdana" panose="020B0604030504040204" pitchFamily="34" charset="0"/>
+                        </a:rPr>
+                        <a:t>Lenacapavir</a:t>
+                      </a:r>
+                      <a:r>
+                        <a:rPr lang="en-ZA" sz="1600" u="none" strike="noStrike" dirty="0">
+                          <a:effectLst/>
+                          <a:latin typeface="Verdana" panose="020B0604030504040204" pitchFamily="34" charset="0"/>
+                          <a:ea typeface="Verdana" panose="020B0604030504040204" pitchFamily="34" charset="0"/>
+                          <a:cs typeface="Verdana" panose="020B0604030504040204" pitchFamily="34" charset="0"/>
+                        </a:rPr>
+                        <a:t>)</a:t>
+                      </a:r>
+                      <a:endParaRPr lang="en-ZA" sz="1600" b="0" i="0" u="none" strike="noStrike" dirty="0">
+                        <a:solidFill>
+                          <a:srgbClr val="000000"/>
+                        </a:solidFill>
+                        <a:effectLst/>
+                        <a:latin typeface="Verdana" panose="020B0604030504040204" pitchFamily="34" charset="0"/>
+                        <a:ea typeface="Verdana" panose="020B0604030504040204" pitchFamily="34" charset="0"/>
+                        <a:cs typeface="Verdana" panose="020B0604030504040204" pitchFamily="34" charset="0"/>
+                      </a:endParaRPr>
+                    </a:p>
+                  </a:txBody>
+                  <a:tcPr marL="45720" marR="45720" anchor="b">
+                    <a:noFill/>
+                  </a:tcPr>
+                </a:tc>
+                <a:tc>
+                  <a:txBody>
+                    <a:bodyPr/>
+                    <a:lstStyle/>
+                    <a:p>
+                      <a:pPr algn="ctr" fontAlgn="b">
+                        <a:buNone/>
+                      </a:pPr>
+                      <a:r>
+                        <a:rPr lang="en-ZA" sz="1600" u="none" strike="noStrike">
+                          <a:effectLst/>
+                          <a:latin typeface="Verdana" panose="020B0604030504040204" pitchFamily="34" charset="0"/>
+                          <a:ea typeface="Verdana" panose="020B0604030504040204" pitchFamily="34" charset="0"/>
+                          <a:cs typeface="Verdana" panose="020B0604030504040204" pitchFamily="34" charset="0"/>
+                        </a:rPr>
+                        <a:t>X</a:t>
+                      </a:r>
+                      <a:endParaRPr lang="en-ZA" sz="1600" b="0" i="0" u="none" strike="noStrike">
+                        <a:solidFill>
+                          <a:srgbClr val="000000"/>
+                        </a:solidFill>
+                        <a:effectLst/>
+                        <a:latin typeface="Verdana" panose="020B0604030504040204" pitchFamily="34" charset="0"/>
+                        <a:ea typeface="Verdana" panose="020B0604030504040204" pitchFamily="34" charset="0"/>
+                        <a:cs typeface="Verdana" panose="020B0604030504040204" pitchFamily="34" charset="0"/>
+                      </a:endParaRPr>
+                    </a:p>
+                  </a:txBody>
+                  <a:tcPr marL="45720" marR="45720" anchor="b">
+                    <a:noFill/>
+                  </a:tcPr>
+                </a:tc>
+                <a:tc>
+                  <a:txBody>
+                    <a:bodyPr/>
+                    <a:lstStyle/>
+                    <a:p>
+                      <a:pPr algn="ctr" fontAlgn="b">
+                        <a:buNone/>
+                      </a:pPr>
+                      <a:endParaRPr lang="en-ZA" sz="1600" b="0" i="0" u="none" strike="noStrike" dirty="0">
+                        <a:solidFill>
+                          <a:srgbClr val="000000"/>
+                        </a:solidFill>
+                        <a:effectLst/>
+                        <a:latin typeface="Verdana" panose="020B0604030504040204" pitchFamily="34" charset="0"/>
+                        <a:ea typeface="Verdana" panose="020B0604030504040204" pitchFamily="34" charset="0"/>
+                        <a:cs typeface="Verdana" panose="020B0604030504040204" pitchFamily="34" charset="0"/>
+                      </a:endParaRPr>
+                    </a:p>
+                  </a:txBody>
+                  <a:tcPr marL="45720" marR="45720" anchor="b">
+                    <a:noFill/>
+                  </a:tcPr>
+                </a:tc>
+                <a:tc>
+                  <a:txBody>
+                    <a:bodyPr/>
+                    <a:lstStyle/>
+                    <a:p>
+                      <a:pPr algn="ctr" fontAlgn="b">
+                        <a:buNone/>
+                      </a:pPr>
+                      <a:endParaRPr lang="en-ZA" sz="1600" b="0" i="0" u="none" strike="noStrike" dirty="0">
+                        <a:solidFill>
+                          <a:srgbClr val="000000"/>
+                        </a:solidFill>
+                        <a:effectLst/>
+                        <a:latin typeface="Verdana" panose="020B0604030504040204" pitchFamily="34" charset="0"/>
+                        <a:ea typeface="Verdana" panose="020B0604030504040204" pitchFamily="34" charset="0"/>
+                        <a:cs typeface="Verdana" panose="020B0604030504040204" pitchFamily="34" charset="0"/>
+                      </a:endParaRPr>
+                    </a:p>
+                  </a:txBody>
+                  <a:tcPr marL="45720" marR="45720" anchor="b">
+                    <a:noFill/>
+                  </a:tcPr>
+                </a:tc>
+                <a:tc>
+                  <a:txBody>
+                    <a:bodyPr/>
+                    <a:lstStyle/>
+                    <a:p>
+                      <a:pPr algn="ctr" fontAlgn="b">
+                        <a:buNone/>
+                      </a:pPr>
+                      <a:endParaRPr lang="en-ZA" sz="1600" b="0" i="0" u="none" strike="noStrike" dirty="0">
+                        <a:solidFill>
+                          <a:srgbClr val="000000"/>
+                        </a:solidFill>
+                        <a:effectLst/>
+                        <a:latin typeface="Verdana" panose="020B0604030504040204" pitchFamily="34" charset="0"/>
+                        <a:ea typeface="Verdana" panose="020B0604030504040204" pitchFamily="34" charset="0"/>
+                        <a:cs typeface="Verdana" panose="020B0604030504040204" pitchFamily="34" charset="0"/>
+                      </a:endParaRPr>
+                    </a:p>
+                  </a:txBody>
+                  <a:tcPr marL="45720" marR="45720" anchor="b">
+                    <a:noFill/>
+                  </a:tcPr>
+                </a:tc>
+                <a:tc>
+                  <a:txBody>
+                    <a:bodyPr/>
+                    <a:lstStyle/>
+                    <a:p>
+                      <a:pPr algn="ctr" fontAlgn="b">
+                        <a:buNone/>
+                      </a:pPr>
+                      <a:endParaRPr lang="en-ZA" sz="1600" b="0" i="0" u="none" strike="noStrike" dirty="0">
+                        <a:solidFill>
+                          <a:srgbClr val="000000"/>
+                        </a:solidFill>
+                        <a:effectLst/>
+                        <a:latin typeface="Verdana" panose="020B0604030504040204" pitchFamily="34" charset="0"/>
+                        <a:ea typeface="Verdana" panose="020B0604030504040204" pitchFamily="34" charset="0"/>
+                        <a:cs typeface="Verdana" panose="020B0604030504040204" pitchFamily="34" charset="0"/>
+                      </a:endParaRPr>
+                    </a:p>
+                  </a:txBody>
+                  <a:tcPr marL="45720" marR="45720" anchor="b">
+                    <a:noFill/>
+                  </a:tcPr>
+                </a:tc>
+                <a:tc>
+                  <a:txBody>
+                    <a:bodyPr/>
+                    <a:lstStyle/>
+                    <a:p>
+                      <a:pPr algn="ctr" fontAlgn="b">
+                        <a:buNone/>
+                      </a:pPr>
+                      <a:endParaRPr lang="en-ZA" sz="1600" b="0" i="0" u="none" strike="noStrike" dirty="0">
+                        <a:solidFill>
+                          <a:srgbClr val="000000"/>
+                        </a:solidFill>
+                        <a:effectLst/>
+                        <a:latin typeface="Verdana" panose="020B0604030504040204" pitchFamily="34" charset="0"/>
+                        <a:ea typeface="Verdana" panose="020B0604030504040204" pitchFamily="34" charset="0"/>
+                        <a:cs typeface="Verdana" panose="020B0604030504040204" pitchFamily="34" charset="0"/>
+                      </a:endParaRPr>
+                    </a:p>
+                  </a:txBody>
+                  <a:tcPr marL="45720" marR="45720" anchor="b">
+                    <a:noFill/>
+                  </a:tcPr>
+                </a:tc>
+                <a:extLst>
+                  <a:ext uri="{0D108BD9-81ED-4DB2-BD59-A6C34878D82A}">
+                    <a16:rowId xmlns:a16="http://schemas.microsoft.com/office/drawing/2014/main" val="3082328327"/>
+                  </a:ext>
+                </a:extLst>
+              </a:tr>
+              <a:tr h="326385">
+                <a:tc>
+                  <a:txBody>
+                    <a:bodyPr/>
+                    <a:lstStyle/>
+                    <a:p>
+                      <a:pPr algn="l" fontAlgn="b">
+                        <a:buNone/>
+                      </a:pPr>
+                      <a:r>
+                        <a:rPr lang="en-ZA" sz="1600" u="none" strike="noStrike" dirty="0">
+                          <a:effectLst/>
+                          <a:latin typeface="Verdana" panose="020B0604030504040204" pitchFamily="34" charset="0"/>
+                          <a:ea typeface="Verdana" panose="020B0604030504040204" pitchFamily="34" charset="0"/>
+                          <a:cs typeface="Verdana" panose="020B0604030504040204" pitchFamily="34" charset="0"/>
+                        </a:rPr>
+                        <a:t>VMMC</a:t>
+                      </a:r>
+                      <a:endParaRPr lang="en-ZA" sz="1600" b="0" i="0" u="none" strike="noStrike" dirty="0">
+                        <a:solidFill>
+                          <a:srgbClr val="000000"/>
+                        </a:solidFill>
+                        <a:effectLst/>
+                        <a:latin typeface="Verdana" panose="020B0604030504040204" pitchFamily="34" charset="0"/>
+                        <a:ea typeface="Verdana" panose="020B0604030504040204" pitchFamily="34" charset="0"/>
+                        <a:cs typeface="Verdana" panose="020B0604030504040204" pitchFamily="34" charset="0"/>
+                      </a:endParaRPr>
+                    </a:p>
+                  </a:txBody>
+                  <a:tcPr marL="45720" marR="45720" anchor="b">
+                    <a:noFill/>
+                  </a:tcPr>
+                </a:tc>
+                <a:tc>
+                  <a:txBody>
+                    <a:bodyPr/>
+                    <a:lstStyle/>
+                    <a:p>
+                      <a:pPr algn="ctr" fontAlgn="b">
+                        <a:buNone/>
+                      </a:pPr>
+                      <a:r>
+                        <a:rPr lang="en-ZA" sz="1600" u="none" strike="noStrike">
+                          <a:effectLst/>
+                          <a:latin typeface="Verdana" panose="020B0604030504040204" pitchFamily="34" charset="0"/>
+                          <a:ea typeface="Verdana" panose="020B0604030504040204" pitchFamily="34" charset="0"/>
+                          <a:cs typeface="Verdana" panose="020B0604030504040204" pitchFamily="34" charset="0"/>
+                        </a:rPr>
+                        <a:t>X</a:t>
+                      </a:r>
+                      <a:endParaRPr lang="en-ZA" sz="1600" b="0" i="0" u="none" strike="noStrike">
+                        <a:solidFill>
+                          <a:srgbClr val="000000"/>
+                        </a:solidFill>
+                        <a:effectLst/>
+                        <a:latin typeface="Verdana" panose="020B0604030504040204" pitchFamily="34" charset="0"/>
+                        <a:ea typeface="Verdana" panose="020B0604030504040204" pitchFamily="34" charset="0"/>
+                        <a:cs typeface="Verdana" panose="020B0604030504040204" pitchFamily="34" charset="0"/>
+                      </a:endParaRPr>
+                    </a:p>
+                  </a:txBody>
+                  <a:tcPr marL="45720" marR="45720" anchor="b">
+                    <a:noFill/>
+                  </a:tcPr>
+                </a:tc>
+                <a:tc>
+                  <a:txBody>
+                    <a:bodyPr/>
+                    <a:lstStyle/>
+                    <a:p>
+                      <a:pPr algn="ctr" fontAlgn="b">
+                        <a:buNone/>
+                      </a:pPr>
+                      <a:endParaRPr lang="en-ZA" sz="1600" b="0" i="0" u="none" strike="noStrike">
+                        <a:solidFill>
+                          <a:srgbClr val="000000"/>
+                        </a:solidFill>
+                        <a:effectLst/>
+                        <a:latin typeface="Verdana" panose="020B0604030504040204" pitchFamily="34" charset="0"/>
+                        <a:ea typeface="Verdana" panose="020B0604030504040204" pitchFamily="34" charset="0"/>
+                        <a:cs typeface="Verdana" panose="020B0604030504040204" pitchFamily="34" charset="0"/>
+                      </a:endParaRPr>
+                    </a:p>
+                  </a:txBody>
+                  <a:tcPr marL="45720" marR="45720" anchor="b">
+                    <a:noFill/>
+                  </a:tcPr>
+                </a:tc>
+                <a:tc>
+                  <a:txBody>
+                    <a:bodyPr/>
+                    <a:lstStyle/>
+                    <a:p>
+                      <a:pPr algn="ctr" fontAlgn="b">
+                        <a:buNone/>
+                      </a:pPr>
+                      <a:endParaRPr lang="en-ZA" sz="1600" b="0" i="0" u="none" strike="noStrike">
+                        <a:solidFill>
+                          <a:srgbClr val="000000"/>
+                        </a:solidFill>
+                        <a:effectLst/>
+                        <a:latin typeface="Verdana" panose="020B0604030504040204" pitchFamily="34" charset="0"/>
+                        <a:ea typeface="Verdana" panose="020B0604030504040204" pitchFamily="34" charset="0"/>
+                        <a:cs typeface="Verdana" panose="020B0604030504040204" pitchFamily="34" charset="0"/>
+                      </a:endParaRPr>
+                    </a:p>
+                  </a:txBody>
+                  <a:tcPr marL="45720" marR="45720" anchor="b">
+                    <a:noFill/>
+                  </a:tcPr>
+                </a:tc>
+                <a:tc>
+                  <a:txBody>
+                    <a:bodyPr/>
+                    <a:lstStyle/>
+                    <a:p>
+                      <a:pPr algn="ctr" fontAlgn="b">
+                        <a:buNone/>
+                      </a:pPr>
+                      <a:endParaRPr lang="en-ZA" sz="1600" b="0" i="0" u="none" strike="noStrike">
+                        <a:solidFill>
+                          <a:srgbClr val="000000"/>
+                        </a:solidFill>
+                        <a:effectLst/>
+                        <a:latin typeface="Verdana" panose="020B0604030504040204" pitchFamily="34" charset="0"/>
+                        <a:ea typeface="Verdana" panose="020B0604030504040204" pitchFamily="34" charset="0"/>
+                        <a:cs typeface="Verdana" panose="020B0604030504040204" pitchFamily="34" charset="0"/>
+                      </a:endParaRPr>
+                    </a:p>
+                  </a:txBody>
+                  <a:tcPr marL="45720" marR="45720" anchor="b">
+                    <a:noFill/>
+                  </a:tcPr>
+                </a:tc>
+                <a:tc>
+                  <a:txBody>
+                    <a:bodyPr/>
+                    <a:lstStyle/>
+                    <a:p>
+                      <a:pPr algn="ctr" fontAlgn="b">
+                        <a:buNone/>
+                      </a:pPr>
+                      <a:endParaRPr lang="en-ZA" sz="1600" b="0" i="0" u="none" strike="noStrike" dirty="0">
+                        <a:solidFill>
+                          <a:srgbClr val="000000"/>
+                        </a:solidFill>
+                        <a:effectLst/>
+                        <a:latin typeface="Verdana" panose="020B0604030504040204" pitchFamily="34" charset="0"/>
+                        <a:ea typeface="Verdana" panose="020B0604030504040204" pitchFamily="34" charset="0"/>
+                        <a:cs typeface="Verdana" panose="020B0604030504040204" pitchFamily="34" charset="0"/>
+                      </a:endParaRPr>
+                    </a:p>
+                  </a:txBody>
+                  <a:tcPr marL="45720" marR="45720" anchor="b">
+                    <a:noFill/>
+                  </a:tcPr>
+                </a:tc>
+                <a:tc>
+                  <a:txBody>
+                    <a:bodyPr/>
+                    <a:lstStyle/>
+                    <a:p>
+                      <a:pPr algn="ctr" fontAlgn="b">
+                        <a:buNone/>
+                      </a:pPr>
+                      <a:endParaRPr lang="en-ZA" sz="1600" b="0" i="0" u="none" strike="noStrike" dirty="0">
+                        <a:solidFill>
+                          <a:srgbClr val="000000"/>
+                        </a:solidFill>
+                        <a:effectLst/>
+                        <a:latin typeface="Verdana" panose="020B0604030504040204" pitchFamily="34" charset="0"/>
+                        <a:ea typeface="Verdana" panose="020B0604030504040204" pitchFamily="34" charset="0"/>
+                        <a:cs typeface="Verdana" panose="020B0604030504040204" pitchFamily="34" charset="0"/>
+                      </a:endParaRPr>
+                    </a:p>
+                  </a:txBody>
+                  <a:tcPr marL="45720" marR="45720" anchor="b">
+                    <a:noFill/>
+                  </a:tcPr>
+                </a:tc>
+                <a:extLst>
+                  <a:ext uri="{0D108BD9-81ED-4DB2-BD59-A6C34878D82A}">
+                    <a16:rowId xmlns:a16="http://schemas.microsoft.com/office/drawing/2014/main" val="213087910"/>
+                  </a:ext>
+                </a:extLst>
+              </a:tr>
+            </a:tbl>
+          </a:graphicData>
+        </a:graphic>
+      </p:graphicFrame>
     </p:spTree>
     <p:extLst>
       <p:ext uri="{BB962C8B-B14F-4D97-AF65-F5344CB8AC3E}">
@@ -9661,6 +11931,3898 @@
 </file>
 
 <file path=ppt/slides/slide5.xml><?xml version="1.0" encoding="utf-8"?>
+<p:sld xmlns:a="http://schemas.openxmlformats.org/drawingml/2006/main" xmlns:r="http://schemas.openxmlformats.org/officeDocument/2006/relationships" xmlns:p="http://schemas.openxmlformats.org/presentationml/2006/main">
+  <p:cSld>
+    <p:spTree>
+      <p:nvGrpSpPr>
+        <p:cNvPr id="1" name="">
+          <a:extLst>
+            <a:ext uri="{FF2B5EF4-FFF2-40B4-BE49-F238E27FC236}">
+              <a16:creationId xmlns:a16="http://schemas.microsoft.com/office/drawing/2014/main" id="{8DCC42B9-0B7A-A5F1-5522-5B447F38849D}"/>
+            </a:ext>
+          </a:extLst>
+        </p:cNvPr>
+        <p:cNvGrpSpPr/>
+        <p:nvPr/>
+      </p:nvGrpSpPr>
+      <p:grpSpPr>
+        <a:xfrm>
+          <a:off x="0" y="0"/>
+          <a:ext cx="0" cy="0"/>
+          <a:chOff x="0" y="0"/>
+          <a:chExt cx="0" cy="0"/>
+        </a:xfrm>
+      </p:grpSpPr>
+      <p:sp>
+        <p:nvSpPr>
+          <p:cNvPr id="2" name="Titel 1">
+            <a:extLst>
+              <a:ext uri="{FF2B5EF4-FFF2-40B4-BE49-F238E27FC236}">
+                <a16:creationId xmlns:a16="http://schemas.microsoft.com/office/drawing/2014/main" id="{F1356E3F-A3A5-7BF8-230F-1440108EFAD4}"/>
+              </a:ext>
+            </a:extLst>
+          </p:cNvPr>
+          <p:cNvSpPr>
+            <a:spLocks noGrp="1"/>
+          </p:cNvSpPr>
+          <p:nvPr>
+            <p:ph type="title"/>
+          </p:nvPr>
+        </p:nvSpPr>
+        <p:spPr>
+          <a:xfrm>
+            <a:off x="442913" y="1401624"/>
+            <a:ext cx="11372850" cy="1260000"/>
+          </a:xfrm>
+        </p:spPr>
+        <p:txBody>
+          <a:bodyPr/>
+          <a:lstStyle/>
+          <a:p>
+            <a:r>
+              <a:rPr lang="en-GB" noProof="0" dirty="0">
+                <a:solidFill>
+                  <a:schemeClr val="accent1"/>
+                </a:solidFill>
+              </a:rPr>
+              <a:t>What‘s Included: </a:t>
+            </a:r>
+            <a:r>
+              <a:rPr lang="en-GB" noProof="0" dirty="0">
+                <a:solidFill>
+                  <a:srgbClr val="00B0F0"/>
+                </a:solidFill>
+              </a:rPr>
+              <a:t>Testing</a:t>
+            </a:r>
+          </a:p>
+        </p:txBody>
+      </p:sp>
+      <p:graphicFrame>
+        <p:nvGraphicFramePr>
+          <p:cNvPr id="6" name="Table 5">
+            <a:extLst>
+              <a:ext uri="{FF2B5EF4-FFF2-40B4-BE49-F238E27FC236}">
+                <a16:creationId xmlns:a16="http://schemas.microsoft.com/office/drawing/2014/main" id="{2F611F5E-C8B2-5AA9-4D42-04C42B600A1E}"/>
+              </a:ext>
+            </a:extLst>
+          </p:cNvPr>
+          <p:cNvGraphicFramePr>
+            <a:graphicFrameLocks noGrp="1"/>
+          </p:cNvGraphicFramePr>
+          <p:nvPr>
+            <p:extLst>
+              <p:ext uri="{D42A27DB-BD31-4B8C-83A1-F6EECF244321}">
+                <p14:modId xmlns:p14="http://schemas.microsoft.com/office/powerpoint/2010/main" val="379309088"/>
+              </p:ext>
+            </p:extLst>
+          </p:nvPr>
+        </p:nvGraphicFramePr>
+        <p:xfrm>
+          <a:off x="525779" y="2388870"/>
+          <a:ext cx="11289984" cy="3799062"/>
+        </p:xfrm>
+        <a:graphic>
+          <a:graphicData uri="http://schemas.openxmlformats.org/drawingml/2006/table">
+            <a:tbl>
+              <a:tblPr>
+                <a:tableStyleId>{616DA210-FB5B-4158-B5E0-FEB733F419BA}</a:tableStyleId>
+              </a:tblPr>
+              <a:tblGrid>
+                <a:gridCol w="3531870">
+                  <a:extLst>
+                    <a:ext uri="{9D8B030D-6E8A-4147-A177-3AD203B41FA5}">
+                      <a16:colId xmlns:a16="http://schemas.microsoft.com/office/drawing/2014/main" val="4120267808"/>
+                    </a:ext>
+                  </a:extLst>
+                </a:gridCol>
+                <a:gridCol w="1293019">
+                  <a:extLst>
+                    <a:ext uri="{9D8B030D-6E8A-4147-A177-3AD203B41FA5}">
+                      <a16:colId xmlns:a16="http://schemas.microsoft.com/office/drawing/2014/main" val="1209723872"/>
+                    </a:ext>
+                  </a:extLst>
+                </a:gridCol>
+                <a:gridCol w="1293019">
+                  <a:extLst>
+                    <a:ext uri="{9D8B030D-6E8A-4147-A177-3AD203B41FA5}">
+                      <a16:colId xmlns:a16="http://schemas.microsoft.com/office/drawing/2014/main" val="2743590385"/>
+                    </a:ext>
+                  </a:extLst>
+                </a:gridCol>
+                <a:gridCol w="1293019">
+                  <a:extLst>
+                    <a:ext uri="{9D8B030D-6E8A-4147-A177-3AD203B41FA5}">
+                      <a16:colId xmlns:a16="http://schemas.microsoft.com/office/drawing/2014/main" val="4208286694"/>
+                    </a:ext>
+                  </a:extLst>
+                </a:gridCol>
+                <a:gridCol w="1293019">
+                  <a:extLst>
+                    <a:ext uri="{9D8B030D-6E8A-4147-A177-3AD203B41FA5}">
+                      <a16:colId xmlns:a16="http://schemas.microsoft.com/office/drawing/2014/main" val="3849485650"/>
+                    </a:ext>
+                  </a:extLst>
+                </a:gridCol>
+                <a:gridCol w="1293019">
+                  <a:extLst>
+                    <a:ext uri="{9D8B030D-6E8A-4147-A177-3AD203B41FA5}">
+                      <a16:colId xmlns:a16="http://schemas.microsoft.com/office/drawing/2014/main" val="65177762"/>
+                    </a:ext>
+                  </a:extLst>
+                </a:gridCol>
+                <a:gridCol w="1293019">
+                  <a:extLst>
+                    <a:ext uri="{9D8B030D-6E8A-4147-A177-3AD203B41FA5}">
+                      <a16:colId xmlns:a16="http://schemas.microsoft.com/office/drawing/2014/main" val="3550359160"/>
+                    </a:ext>
+                  </a:extLst>
+                </a:gridCol>
+              </a:tblGrid>
+              <a:tr h="265223">
+                <a:tc>
+                  <a:txBody>
+                    <a:bodyPr/>
+                    <a:lstStyle/>
+                    <a:p>
+                      <a:pPr algn="ctr" fontAlgn="b">
+                        <a:buNone/>
+                      </a:pPr>
+                      <a:endParaRPr lang="en-ZA" sz="1600" b="1" i="0" u="none" strike="noStrike" dirty="0">
+                        <a:solidFill>
+                          <a:srgbClr val="000000"/>
+                        </a:solidFill>
+                        <a:effectLst/>
+                        <a:latin typeface="Verdana" panose="020B0604030504040204" pitchFamily="34" charset="0"/>
+                        <a:ea typeface="Verdana" panose="020B0604030504040204" pitchFamily="34" charset="0"/>
+                        <a:cs typeface="Verdana" panose="020B0604030504040204" pitchFamily="34" charset="0"/>
+                      </a:endParaRPr>
+                    </a:p>
+                  </a:txBody>
+                  <a:tcPr marL="45720" marR="45720" anchor="b">
+                    <a:solidFill>
+                      <a:srgbClr val="FFFFFF"/>
+                    </a:solidFill>
+                  </a:tcPr>
+                </a:tc>
+                <a:tc gridSpan="6">
+                  <a:txBody>
+                    <a:bodyPr/>
+                    <a:lstStyle/>
+                    <a:p>
+                      <a:pPr algn="ctr" fontAlgn="b">
+                        <a:buNone/>
+                      </a:pPr>
+                      <a:r>
+                        <a:rPr lang="en-ZA" sz="1600" b="1" u="none" strike="noStrike" dirty="0">
+                          <a:effectLst/>
+                          <a:latin typeface="Verdana" panose="020B0604030504040204" pitchFamily="34" charset="0"/>
+                          <a:ea typeface="Verdana" panose="020B0604030504040204" pitchFamily="34" charset="0"/>
+                          <a:cs typeface="Verdana" panose="020B0604030504040204" pitchFamily="34" charset="0"/>
+                        </a:rPr>
+                        <a:t>Outcome affected</a:t>
+                      </a:r>
+                      <a:endParaRPr lang="en-ZA" sz="1600" b="1" i="0" u="none" strike="noStrike" dirty="0">
+                        <a:solidFill>
+                          <a:srgbClr val="000000"/>
+                        </a:solidFill>
+                        <a:effectLst/>
+                        <a:latin typeface="Verdana" panose="020B0604030504040204" pitchFamily="34" charset="0"/>
+                        <a:ea typeface="Verdana" panose="020B0604030504040204" pitchFamily="34" charset="0"/>
+                        <a:cs typeface="Verdana" panose="020B0604030504040204" pitchFamily="34" charset="0"/>
+                      </a:endParaRPr>
+                    </a:p>
+                  </a:txBody>
+                  <a:tcPr marL="45720" marR="45720" anchor="b">
+                    <a:solidFill>
+                      <a:srgbClr val="FFFFFF"/>
+                    </a:solidFill>
+                  </a:tcPr>
+                </a:tc>
+                <a:tc hMerge="1">
+                  <a:txBody>
+                    <a:bodyPr/>
+                    <a:lstStyle/>
+                    <a:p>
+                      <a:endParaRPr lang="en-GB"/>
+                    </a:p>
+                  </a:txBody>
+                  <a:tcPr/>
+                </a:tc>
+                <a:tc hMerge="1">
+                  <a:txBody>
+                    <a:bodyPr/>
+                    <a:lstStyle/>
+                    <a:p>
+                      <a:endParaRPr lang="en-GB"/>
+                    </a:p>
+                  </a:txBody>
+                  <a:tcPr/>
+                </a:tc>
+                <a:tc hMerge="1">
+                  <a:txBody>
+                    <a:bodyPr/>
+                    <a:lstStyle/>
+                    <a:p>
+                      <a:endParaRPr lang="en-GB"/>
+                    </a:p>
+                  </a:txBody>
+                  <a:tcPr/>
+                </a:tc>
+                <a:tc hMerge="1">
+                  <a:txBody>
+                    <a:bodyPr/>
+                    <a:lstStyle/>
+                    <a:p>
+                      <a:endParaRPr lang="en-GB"/>
+                    </a:p>
+                  </a:txBody>
+                  <a:tcPr/>
+                </a:tc>
+                <a:tc hMerge="1">
+                  <a:txBody>
+                    <a:bodyPr/>
+                    <a:lstStyle/>
+                    <a:p>
+                      <a:endParaRPr lang="en-GB"/>
+                    </a:p>
+                  </a:txBody>
+                  <a:tcPr/>
+                </a:tc>
+                <a:extLst>
+                  <a:ext uri="{0D108BD9-81ED-4DB2-BD59-A6C34878D82A}">
+                    <a16:rowId xmlns:a16="http://schemas.microsoft.com/office/drawing/2014/main" val="3572059884"/>
+                  </a:ext>
+                </a:extLst>
+              </a:tr>
+              <a:tr h="458112">
+                <a:tc>
+                  <a:txBody>
+                    <a:bodyPr/>
+                    <a:lstStyle/>
+                    <a:p>
+                      <a:pPr algn="l" fontAlgn="b">
+                        <a:buNone/>
+                      </a:pPr>
+                      <a:r>
+                        <a:rPr lang="en-ZA" sz="1600" b="1" i="0" u="none" strike="noStrike" dirty="0">
+                          <a:solidFill>
+                            <a:srgbClr val="000000"/>
+                          </a:solidFill>
+                          <a:effectLst/>
+                          <a:latin typeface="Verdana" panose="020B0604030504040204" pitchFamily="34" charset="0"/>
+                          <a:ea typeface="Verdana" panose="020B0604030504040204" pitchFamily="34" charset="0"/>
+                          <a:cs typeface="Verdana" panose="020B0604030504040204" pitchFamily="34" charset="0"/>
+                        </a:rPr>
+                        <a:t>intervention</a:t>
+                      </a:r>
+                    </a:p>
+                  </a:txBody>
+                  <a:tcPr marL="45720" marR="45720" anchor="b">
+                    <a:solidFill>
+                      <a:srgbClr val="3CB0F1"/>
+                    </a:solidFill>
+                  </a:tcPr>
+                </a:tc>
+                <a:tc>
+                  <a:txBody>
+                    <a:bodyPr/>
+                    <a:lstStyle/>
+                    <a:p>
+                      <a:pPr algn="ctr" fontAlgn="b">
+                        <a:buNone/>
+                      </a:pPr>
+                      <a:r>
+                        <a:rPr lang="en-ZA" sz="1600" b="1" u="none" strike="noStrike" dirty="0">
+                          <a:effectLst/>
+                          <a:latin typeface="Verdana" panose="020B0604030504040204" pitchFamily="34" charset="0"/>
+                          <a:ea typeface="Verdana" panose="020B0604030504040204" pitchFamily="34" charset="0"/>
+                          <a:cs typeface="Verdana" panose="020B0604030504040204" pitchFamily="34" charset="0"/>
+                        </a:rPr>
+                        <a:t>adult infections</a:t>
+                      </a:r>
+                      <a:endParaRPr lang="en-ZA" sz="1600" b="1" i="0" u="none" strike="noStrike" dirty="0">
+                        <a:solidFill>
+                          <a:srgbClr val="000000"/>
+                        </a:solidFill>
+                        <a:effectLst/>
+                        <a:latin typeface="Verdana" panose="020B0604030504040204" pitchFamily="34" charset="0"/>
+                        <a:ea typeface="Verdana" panose="020B0604030504040204" pitchFamily="34" charset="0"/>
+                        <a:cs typeface="Verdana" panose="020B0604030504040204" pitchFamily="34" charset="0"/>
+                      </a:endParaRPr>
+                    </a:p>
+                  </a:txBody>
+                  <a:tcPr marL="45720" marR="45720" anchor="b">
+                    <a:solidFill>
+                      <a:srgbClr val="3CB0F1"/>
+                    </a:solidFill>
+                  </a:tcPr>
+                </a:tc>
+                <a:tc>
+                  <a:txBody>
+                    <a:bodyPr/>
+                    <a:lstStyle/>
+                    <a:p>
+                      <a:pPr algn="ctr" fontAlgn="b">
+                        <a:buNone/>
+                      </a:pPr>
+                      <a:r>
+                        <a:rPr lang="en-ZA" sz="1600" b="1" u="none" strike="noStrike" dirty="0">
+                          <a:effectLst/>
+                          <a:latin typeface="Verdana" panose="020B0604030504040204" pitchFamily="34" charset="0"/>
+                          <a:ea typeface="Verdana" panose="020B0604030504040204" pitchFamily="34" charset="0"/>
+                          <a:cs typeface="Verdana" panose="020B0604030504040204" pitchFamily="34" charset="0"/>
+                        </a:rPr>
+                        <a:t>infant infections </a:t>
+                      </a:r>
+                      <a:endParaRPr lang="en-ZA" sz="1600" b="1" i="0" u="none" strike="noStrike" dirty="0">
+                        <a:solidFill>
+                          <a:srgbClr val="000000"/>
+                        </a:solidFill>
+                        <a:effectLst/>
+                        <a:latin typeface="Verdana" panose="020B0604030504040204" pitchFamily="34" charset="0"/>
+                        <a:ea typeface="Verdana" panose="020B0604030504040204" pitchFamily="34" charset="0"/>
+                        <a:cs typeface="Verdana" panose="020B0604030504040204" pitchFamily="34" charset="0"/>
+                      </a:endParaRPr>
+                    </a:p>
+                  </a:txBody>
+                  <a:tcPr marL="45720" marR="45720" anchor="b">
+                    <a:solidFill>
+                      <a:srgbClr val="3CB0F1"/>
+                    </a:solidFill>
+                  </a:tcPr>
+                </a:tc>
+                <a:tc>
+                  <a:txBody>
+                    <a:bodyPr/>
+                    <a:lstStyle/>
+                    <a:p>
+                      <a:pPr algn="ctr" fontAlgn="b">
+                        <a:buNone/>
+                      </a:pPr>
+                      <a:r>
+                        <a:rPr lang="en-ZA" sz="1600" b="1" u="none" strike="noStrike" dirty="0">
+                          <a:effectLst/>
+                          <a:latin typeface="Verdana" panose="020B0604030504040204" pitchFamily="34" charset="0"/>
+                          <a:ea typeface="Verdana" panose="020B0604030504040204" pitchFamily="34" charset="0"/>
+                          <a:cs typeface="Verdana" panose="020B0604030504040204" pitchFamily="34" charset="0"/>
+                        </a:rPr>
+                        <a:t>first 95</a:t>
+                      </a:r>
+                      <a:endParaRPr lang="en-ZA" sz="1600" b="1" i="0" u="none" strike="noStrike" dirty="0">
+                        <a:solidFill>
+                          <a:srgbClr val="000000"/>
+                        </a:solidFill>
+                        <a:effectLst/>
+                        <a:latin typeface="Verdana" panose="020B0604030504040204" pitchFamily="34" charset="0"/>
+                        <a:ea typeface="Verdana" panose="020B0604030504040204" pitchFamily="34" charset="0"/>
+                        <a:cs typeface="Verdana" panose="020B0604030504040204" pitchFamily="34" charset="0"/>
+                      </a:endParaRPr>
+                    </a:p>
+                  </a:txBody>
+                  <a:tcPr marL="45720" marR="45720" anchor="b">
+                    <a:solidFill>
+                      <a:srgbClr val="3CB0F1"/>
+                    </a:solidFill>
+                  </a:tcPr>
+                </a:tc>
+                <a:tc>
+                  <a:txBody>
+                    <a:bodyPr/>
+                    <a:lstStyle/>
+                    <a:p>
+                      <a:pPr algn="ctr" fontAlgn="b">
+                        <a:buNone/>
+                      </a:pPr>
+                      <a:r>
+                        <a:rPr lang="en-ZA" sz="1600" b="1" u="none" strike="noStrike" dirty="0">
+                          <a:effectLst/>
+                          <a:latin typeface="Verdana" panose="020B0604030504040204" pitchFamily="34" charset="0"/>
+                          <a:ea typeface="Verdana" panose="020B0604030504040204" pitchFamily="34" charset="0"/>
+                          <a:cs typeface="Verdana" panose="020B0604030504040204" pitchFamily="34" charset="0"/>
+                        </a:rPr>
+                        <a:t>second 95</a:t>
+                      </a:r>
+                      <a:endParaRPr lang="en-ZA" sz="1600" b="1" i="0" u="none" strike="noStrike" dirty="0">
+                        <a:solidFill>
+                          <a:srgbClr val="000000"/>
+                        </a:solidFill>
+                        <a:effectLst/>
+                        <a:latin typeface="Verdana" panose="020B0604030504040204" pitchFamily="34" charset="0"/>
+                        <a:ea typeface="Verdana" panose="020B0604030504040204" pitchFamily="34" charset="0"/>
+                        <a:cs typeface="Verdana" panose="020B0604030504040204" pitchFamily="34" charset="0"/>
+                      </a:endParaRPr>
+                    </a:p>
+                  </a:txBody>
+                  <a:tcPr marL="45720" marR="45720" anchor="b">
+                    <a:solidFill>
+                      <a:srgbClr val="3CB0F1"/>
+                    </a:solidFill>
+                  </a:tcPr>
+                </a:tc>
+                <a:tc>
+                  <a:txBody>
+                    <a:bodyPr/>
+                    <a:lstStyle/>
+                    <a:p>
+                      <a:pPr algn="ctr" fontAlgn="b">
+                        <a:buNone/>
+                      </a:pPr>
+                      <a:r>
+                        <a:rPr lang="en-ZA" sz="1600" b="1" u="none" strike="noStrike" dirty="0">
+                          <a:effectLst/>
+                          <a:latin typeface="Verdana" panose="020B0604030504040204" pitchFamily="34" charset="0"/>
+                          <a:ea typeface="Verdana" panose="020B0604030504040204" pitchFamily="34" charset="0"/>
+                          <a:cs typeface="Verdana" panose="020B0604030504040204" pitchFamily="34" charset="0"/>
+                        </a:rPr>
+                        <a:t>third 95</a:t>
+                      </a:r>
+                      <a:endParaRPr lang="en-ZA" sz="1600" b="1" i="0" u="none" strike="noStrike" dirty="0">
+                        <a:solidFill>
+                          <a:srgbClr val="000000"/>
+                        </a:solidFill>
+                        <a:effectLst/>
+                        <a:latin typeface="Verdana" panose="020B0604030504040204" pitchFamily="34" charset="0"/>
+                        <a:ea typeface="Verdana" panose="020B0604030504040204" pitchFamily="34" charset="0"/>
+                        <a:cs typeface="Verdana" panose="020B0604030504040204" pitchFamily="34" charset="0"/>
+                      </a:endParaRPr>
+                    </a:p>
+                  </a:txBody>
+                  <a:tcPr marL="45720" marR="45720" anchor="b">
+                    <a:solidFill>
+                      <a:srgbClr val="3CB0F1"/>
+                    </a:solidFill>
+                  </a:tcPr>
+                </a:tc>
+                <a:tc>
+                  <a:txBody>
+                    <a:bodyPr/>
+                    <a:lstStyle/>
+                    <a:p>
+                      <a:pPr algn="ctr" fontAlgn="b">
+                        <a:buNone/>
+                      </a:pPr>
+                      <a:r>
+                        <a:rPr lang="en-ZA" sz="1600" b="1" u="none" strike="noStrike" dirty="0">
+                          <a:effectLst/>
+                          <a:latin typeface="Verdana" panose="020B0604030504040204" pitchFamily="34" charset="0"/>
+                          <a:ea typeface="Verdana" panose="020B0604030504040204" pitchFamily="34" charset="0"/>
+                          <a:cs typeface="Verdana" panose="020B0604030504040204" pitchFamily="34" charset="0"/>
+                        </a:rPr>
+                        <a:t>mortality</a:t>
+                      </a:r>
+                      <a:endParaRPr lang="en-ZA" sz="1600" b="1" i="0" u="none" strike="noStrike" dirty="0">
+                        <a:solidFill>
+                          <a:srgbClr val="000000"/>
+                        </a:solidFill>
+                        <a:effectLst/>
+                        <a:latin typeface="Verdana" panose="020B0604030504040204" pitchFamily="34" charset="0"/>
+                        <a:ea typeface="Verdana" panose="020B0604030504040204" pitchFamily="34" charset="0"/>
+                        <a:cs typeface="Verdana" panose="020B0604030504040204" pitchFamily="34" charset="0"/>
+                      </a:endParaRPr>
+                    </a:p>
+                  </a:txBody>
+                  <a:tcPr marL="45720" marR="45720" anchor="b">
+                    <a:solidFill>
+                      <a:srgbClr val="3CB0F1"/>
+                    </a:solidFill>
+                  </a:tcPr>
+                </a:tc>
+                <a:extLst>
+                  <a:ext uri="{0D108BD9-81ED-4DB2-BD59-A6C34878D82A}">
+                    <a16:rowId xmlns:a16="http://schemas.microsoft.com/office/drawing/2014/main" val="2377431970"/>
+                  </a:ext>
+                </a:extLst>
+              </a:tr>
+              <a:tr h="398958">
+                <a:tc>
+                  <a:txBody>
+                    <a:bodyPr/>
+                    <a:lstStyle/>
+                    <a:p>
+                      <a:pPr algn="l" fontAlgn="b">
+                        <a:buNone/>
+                      </a:pPr>
+                      <a:r>
+                        <a:rPr lang="en-ZA" sz="1600" u="none" strike="noStrike" dirty="0">
+                          <a:effectLst/>
+                          <a:latin typeface="Verdana" panose="020B0604030504040204" pitchFamily="34" charset="0"/>
+                          <a:ea typeface="Verdana" panose="020B0604030504040204" pitchFamily="34" charset="0"/>
+                          <a:cs typeface="Verdana" panose="020B0604030504040204" pitchFamily="34" charset="0"/>
+                        </a:rPr>
+                        <a:t>Testing: facility-based (general)</a:t>
+                      </a:r>
+                      <a:endParaRPr lang="en-ZA" sz="1600" b="0" i="0" u="none" strike="noStrike" dirty="0">
+                        <a:solidFill>
+                          <a:srgbClr val="000000"/>
+                        </a:solidFill>
+                        <a:effectLst/>
+                        <a:latin typeface="Verdana" panose="020B0604030504040204" pitchFamily="34" charset="0"/>
+                        <a:ea typeface="Verdana" panose="020B0604030504040204" pitchFamily="34" charset="0"/>
+                        <a:cs typeface="Verdana" panose="020B0604030504040204" pitchFamily="34" charset="0"/>
+                      </a:endParaRPr>
+                    </a:p>
+                  </a:txBody>
+                  <a:tcPr marL="3234" marR="3234" marT="3234" marB="0" anchor="b">
+                    <a:noFill/>
+                  </a:tcPr>
+                </a:tc>
+                <a:tc>
+                  <a:txBody>
+                    <a:bodyPr/>
+                    <a:lstStyle/>
+                    <a:p>
+                      <a:pPr algn="ctr" fontAlgn="b">
+                        <a:buNone/>
+                      </a:pPr>
+                      <a:endParaRPr lang="en-ZA" sz="1600" b="0" i="0" u="none" strike="noStrike">
+                        <a:solidFill>
+                          <a:srgbClr val="000000"/>
+                        </a:solidFill>
+                        <a:effectLst/>
+                        <a:latin typeface="Verdana" panose="020B0604030504040204" pitchFamily="34" charset="0"/>
+                        <a:ea typeface="Verdana" panose="020B0604030504040204" pitchFamily="34" charset="0"/>
+                        <a:cs typeface="Verdana" panose="020B0604030504040204" pitchFamily="34" charset="0"/>
+                      </a:endParaRPr>
+                    </a:p>
+                  </a:txBody>
+                  <a:tcPr marL="3234" marR="3234" marT="3234" marB="0" anchor="b">
+                    <a:noFill/>
+                  </a:tcPr>
+                </a:tc>
+                <a:tc>
+                  <a:txBody>
+                    <a:bodyPr/>
+                    <a:lstStyle/>
+                    <a:p>
+                      <a:pPr algn="ctr" fontAlgn="b">
+                        <a:buNone/>
+                      </a:pPr>
+                      <a:endParaRPr lang="en-ZA" sz="1600" b="0" i="0" u="none" strike="noStrike" dirty="0">
+                        <a:solidFill>
+                          <a:srgbClr val="000000"/>
+                        </a:solidFill>
+                        <a:effectLst/>
+                        <a:latin typeface="Verdana" panose="020B0604030504040204" pitchFamily="34" charset="0"/>
+                        <a:ea typeface="Verdana" panose="020B0604030504040204" pitchFamily="34" charset="0"/>
+                        <a:cs typeface="Verdana" panose="020B0604030504040204" pitchFamily="34" charset="0"/>
+                      </a:endParaRPr>
+                    </a:p>
+                  </a:txBody>
+                  <a:tcPr marL="3234" marR="3234" marT="3234" marB="0" anchor="b">
+                    <a:noFill/>
+                  </a:tcPr>
+                </a:tc>
+                <a:tc>
+                  <a:txBody>
+                    <a:bodyPr/>
+                    <a:lstStyle/>
+                    <a:p>
+                      <a:pPr algn="ctr" fontAlgn="b">
+                        <a:buNone/>
+                      </a:pPr>
+                      <a:r>
+                        <a:rPr lang="en-ZA" sz="1600" u="none" strike="noStrike" dirty="0">
+                          <a:effectLst/>
+                          <a:latin typeface="Verdana" panose="020B0604030504040204" pitchFamily="34" charset="0"/>
+                          <a:ea typeface="Verdana" panose="020B0604030504040204" pitchFamily="34" charset="0"/>
+                          <a:cs typeface="Verdana" panose="020B0604030504040204" pitchFamily="34" charset="0"/>
+                        </a:rPr>
+                        <a:t>X</a:t>
+                      </a:r>
+                      <a:endParaRPr lang="en-ZA" sz="1600" b="0" i="0" u="none" strike="noStrike" dirty="0">
+                        <a:solidFill>
+                          <a:srgbClr val="000000"/>
+                        </a:solidFill>
+                        <a:effectLst/>
+                        <a:latin typeface="Verdana" panose="020B0604030504040204" pitchFamily="34" charset="0"/>
+                        <a:ea typeface="Verdana" panose="020B0604030504040204" pitchFamily="34" charset="0"/>
+                        <a:cs typeface="Verdana" panose="020B0604030504040204" pitchFamily="34" charset="0"/>
+                      </a:endParaRPr>
+                    </a:p>
+                  </a:txBody>
+                  <a:tcPr marL="3234" marR="3234" marT="3234" marB="0" anchor="b">
+                    <a:noFill/>
+                  </a:tcPr>
+                </a:tc>
+                <a:tc>
+                  <a:txBody>
+                    <a:bodyPr/>
+                    <a:lstStyle/>
+                    <a:p>
+                      <a:pPr algn="ctr" fontAlgn="b">
+                        <a:buNone/>
+                      </a:pPr>
+                      <a:r>
+                        <a:rPr lang="en-ZA" sz="1600" u="none" strike="noStrike" dirty="0">
+                          <a:effectLst/>
+                          <a:latin typeface="Verdana" panose="020B0604030504040204" pitchFamily="34" charset="0"/>
+                          <a:ea typeface="Verdana" panose="020B0604030504040204" pitchFamily="34" charset="0"/>
+                          <a:cs typeface="Verdana" panose="020B0604030504040204" pitchFamily="34" charset="0"/>
+                        </a:rPr>
+                        <a:t>X</a:t>
+                      </a:r>
+                      <a:endParaRPr lang="en-ZA" sz="1600" b="0" i="0" u="none" strike="noStrike" dirty="0">
+                        <a:solidFill>
+                          <a:srgbClr val="000000"/>
+                        </a:solidFill>
+                        <a:effectLst/>
+                        <a:latin typeface="Verdana" panose="020B0604030504040204" pitchFamily="34" charset="0"/>
+                        <a:ea typeface="Verdana" panose="020B0604030504040204" pitchFamily="34" charset="0"/>
+                        <a:cs typeface="Verdana" panose="020B0604030504040204" pitchFamily="34" charset="0"/>
+                      </a:endParaRPr>
+                    </a:p>
+                  </a:txBody>
+                  <a:tcPr marL="3234" marR="3234" marT="3234" marB="0" anchor="b">
+                    <a:noFill/>
+                  </a:tcPr>
+                </a:tc>
+                <a:tc>
+                  <a:txBody>
+                    <a:bodyPr/>
+                    <a:lstStyle/>
+                    <a:p>
+                      <a:pPr algn="ctr" fontAlgn="b">
+                        <a:buNone/>
+                      </a:pPr>
+                      <a:r>
+                        <a:rPr lang="en-ZA" sz="1600" u="none" strike="noStrike" dirty="0">
+                          <a:effectLst/>
+                          <a:latin typeface="Verdana" panose="020B0604030504040204" pitchFamily="34" charset="0"/>
+                          <a:ea typeface="Verdana" panose="020B0604030504040204" pitchFamily="34" charset="0"/>
+                          <a:cs typeface="Verdana" panose="020B0604030504040204" pitchFamily="34" charset="0"/>
+                        </a:rPr>
+                        <a:t>X</a:t>
+                      </a:r>
+                      <a:endParaRPr lang="en-ZA" sz="1600" b="0" i="0" u="none" strike="noStrike" dirty="0">
+                        <a:solidFill>
+                          <a:srgbClr val="000000"/>
+                        </a:solidFill>
+                        <a:effectLst/>
+                        <a:latin typeface="Verdana" panose="020B0604030504040204" pitchFamily="34" charset="0"/>
+                        <a:ea typeface="Verdana" panose="020B0604030504040204" pitchFamily="34" charset="0"/>
+                        <a:cs typeface="Verdana" panose="020B0604030504040204" pitchFamily="34" charset="0"/>
+                      </a:endParaRPr>
+                    </a:p>
+                  </a:txBody>
+                  <a:tcPr marL="3234" marR="3234" marT="3234" marB="0" anchor="b">
+                    <a:noFill/>
+                  </a:tcPr>
+                </a:tc>
+                <a:tc>
+                  <a:txBody>
+                    <a:bodyPr/>
+                    <a:lstStyle/>
+                    <a:p>
+                      <a:pPr algn="ctr" fontAlgn="b">
+                        <a:buNone/>
+                      </a:pPr>
+                      <a:endParaRPr lang="en-ZA" sz="1600" b="0" i="0" u="none" strike="noStrike" dirty="0">
+                        <a:solidFill>
+                          <a:srgbClr val="000000"/>
+                        </a:solidFill>
+                        <a:effectLst/>
+                        <a:latin typeface="Verdana" panose="020B0604030504040204" pitchFamily="34" charset="0"/>
+                        <a:ea typeface="Verdana" panose="020B0604030504040204" pitchFamily="34" charset="0"/>
+                        <a:cs typeface="Verdana" panose="020B0604030504040204" pitchFamily="34" charset="0"/>
+                      </a:endParaRPr>
+                    </a:p>
+                  </a:txBody>
+                  <a:tcPr marL="3234" marR="3234" marT="3234" marB="0" anchor="b">
+                    <a:noFill/>
+                  </a:tcPr>
+                </a:tc>
+                <a:extLst>
+                  <a:ext uri="{0D108BD9-81ED-4DB2-BD59-A6C34878D82A}">
+                    <a16:rowId xmlns:a16="http://schemas.microsoft.com/office/drawing/2014/main" val="2337716733"/>
+                  </a:ext>
+                </a:extLst>
+              </a:tr>
+              <a:tr h="398958">
+                <a:tc>
+                  <a:txBody>
+                    <a:bodyPr/>
+                    <a:lstStyle/>
+                    <a:p>
+                      <a:pPr algn="l" fontAlgn="b">
+                        <a:buNone/>
+                      </a:pPr>
+                      <a:r>
+                        <a:rPr lang="en-ZA" sz="1600" u="none" strike="noStrike" dirty="0">
+                          <a:effectLst/>
+                          <a:latin typeface="Verdana" panose="020B0604030504040204" pitchFamily="34" charset="0"/>
+                          <a:ea typeface="Verdana" panose="020B0604030504040204" pitchFamily="34" charset="0"/>
+                          <a:cs typeface="Verdana" panose="020B0604030504040204" pitchFamily="34" charset="0"/>
+                        </a:rPr>
+                        <a:t>Testing: facility-based (targeted)</a:t>
+                      </a:r>
+                      <a:endParaRPr lang="en-ZA" sz="1600" b="0" i="0" u="none" strike="noStrike" dirty="0">
+                        <a:solidFill>
+                          <a:srgbClr val="000000"/>
+                        </a:solidFill>
+                        <a:effectLst/>
+                        <a:latin typeface="Verdana" panose="020B0604030504040204" pitchFamily="34" charset="0"/>
+                        <a:ea typeface="Verdana" panose="020B0604030504040204" pitchFamily="34" charset="0"/>
+                        <a:cs typeface="Verdana" panose="020B0604030504040204" pitchFamily="34" charset="0"/>
+                      </a:endParaRPr>
+                    </a:p>
+                  </a:txBody>
+                  <a:tcPr marL="3234" marR="3234" marT="3234" marB="0" anchor="b">
+                    <a:noFill/>
+                  </a:tcPr>
+                </a:tc>
+                <a:tc>
+                  <a:txBody>
+                    <a:bodyPr/>
+                    <a:lstStyle/>
+                    <a:p>
+                      <a:pPr algn="ctr" fontAlgn="b">
+                        <a:buNone/>
+                      </a:pPr>
+                      <a:endParaRPr lang="en-ZA" sz="1600" b="0" i="0" u="none" strike="noStrike" dirty="0">
+                        <a:solidFill>
+                          <a:srgbClr val="000000"/>
+                        </a:solidFill>
+                        <a:effectLst/>
+                        <a:latin typeface="Verdana" panose="020B0604030504040204" pitchFamily="34" charset="0"/>
+                        <a:ea typeface="Verdana" panose="020B0604030504040204" pitchFamily="34" charset="0"/>
+                        <a:cs typeface="Verdana" panose="020B0604030504040204" pitchFamily="34" charset="0"/>
+                      </a:endParaRPr>
+                    </a:p>
+                  </a:txBody>
+                  <a:tcPr marL="3234" marR="3234" marT="3234" marB="0" anchor="b">
+                    <a:noFill/>
+                  </a:tcPr>
+                </a:tc>
+                <a:tc>
+                  <a:txBody>
+                    <a:bodyPr/>
+                    <a:lstStyle/>
+                    <a:p>
+                      <a:pPr algn="ctr" fontAlgn="b">
+                        <a:buNone/>
+                      </a:pPr>
+                      <a:endParaRPr lang="en-ZA" sz="1600" b="0" i="0" u="none" strike="noStrike">
+                        <a:solidFill>
+                          <a:srgbClr val="000000"/>
+                        </a:solidFill>
+                        <a:effectLst/>
+                        <a:latin typeface="Verdana" panose="020B0604030504040204" pitchFamily="34" charset="0"/>
+                        <a:ea typeface="Verdana" panose="020B0604030504040204" pitchFamily="34" charset="0"/>
+                        <a:cs typeface="Verdana" panose="020B0604030504040204" pitchFamily="34" charset="0"/>
+                      </a:endParaRPr>
+                    </a:p>
+                  </a:txBody>
+                  <a:tcPr marL="3234" marR="3234" marT="3234" marB="0" anchor="b">
+                    <a:noFill/>
+                  </a:tcPr>
+                </a:tc>
+                <a:tc>
+                  <a:txBody>
+                    <a:bodyPr/>
+                    <a:lstStyle/>
+                    <a:p>
+                      <a:pPr algn="ctr" fontAlgn="b">
+                        <a:buNone/>
+                      </a:pPr>
+                      <a:r>
+                        <a:rPr lang="en-ZA" sz="1600" u="none" strike="noStrike" dirty="0">
+                          <a:effectLst/>
+                          <a:latin typeface="Verdana" panose="020B0604030504040204" pitchFamily="34" charset="0"/>
+                          <a:ea typeface="Verdana" panose="020B0604030504040204" pitchFamily="34" charset="0"/>
+                          <a:cs typeface="Verdana" panose="020B0604030504040204" pitchFamily="34" charset="0"/>
+                        </a:rPr>
+                        <a:t>X</a:t>
+                      </a:r>
+                      <a:endParaRPr lang="en-ZA" sz="1600" b="0" i="0" u="none" strike="noStrike" dirty="0">
+                        <a:solidFill>
+                          <a:srgbClr val="000000"/>
+                        </a:solidFill>
+                        <a:effectLst/>
+                        <a:latin typeface="Verdana" panose="020B0604030504040204" pitchFamily="34" charset="0"/>
+                        <a:ea typeface="Verdana" panose="020B0604030504040204" pitchFamily="34" charset="0"/>
+                        <a:cs typeface="Verdana" panose="020B0604030504040204" pitchFamily="34" charset="0"/>
+                      </a:endParaRPr>
+                    </a:p>
+                  </a:txBody>
+                  <a:tcPr marL="3234" marR="3234" marT="3234" marB="0" anchor="b">
+                    <a:noFill/>
+                  </a:tcPr>
+                </a:tc>
+                <a:tc>
+                  <a:txBody>
+                    <a:bodyPr/>
+                    <a:lstStyle/>
+                    <a:p>
+                      <a:pPr algn="ctr" fontAlgn="b">
+                        <a:buNone/>
+                      </a:pPr>
+                      <a:r>
+                        <a:rPr lang="en-ZA" sz="1600" u="none" strike="noStrike" dirty="0">
+                          <a:effectLst/>
+                          <a:latin typeface="Verdana" panose="020B0604030504040204" pitchFamily="34" charset="0"/>
+                          <a:ea typeface="Verdana" panose="020B0604030504040204" pitchFamily="34" charset="0"/>
+                          <a:cs typeface="Verdana" panose="020B0604030504040204" pitchFamily="34" charset="0"/>
+                        </a:rPr>
+                        <a:t>X</a:t>
+                      </a:r>
+                      <a:endParaRPr lang="en-ZA" sz="1600" b="0" i="0" u="none" strike="noStrike" dirty="0">
+                        <a:solidFill>
+                          <a:srgbClr val="000000"/>
+                        </a:solidFill>
+                        <a:effectLst/>
+                        <a:latin typeface="Verdana" panose="020B0604030504040204" pitchFamily="34" charset="0"/>
+                        <a:ea typeface="Verdana" panose="020B0604030504040204" pitchFamily="34" charset="0"/>
+                        <a:cs typeface="Verdana" panose="020B0604030504040204" pitchFamily="34" charset="0"/>
+                      </a:endParaRPr>
+                    </a:p>
+                  </a:txBody>
+                  <a:tcPr marL="3234" marR="3234" marT="3234" marB="0" anchor="b">
+                    <a:noFill/>
+                  </a:tcPr>
+                </a:tc>
+                <a:tc>
+                  <a:txBody>
+                    <a:bodyPr/>
+                    <a:lstStyle/>
+                    <a:p>
+                      <a:pPr algn="ctr" fontAlgn="b">
+                        <a:buNone/>
+                      </a:pPr>
+                      <a:r>
+                        <a:rPr lang="en-ZA" sz="1600" u="none" strike="noStrike" dirty="0">
+                          <a:effectLst/>
+                          <a:latin typeface="Verdana" panose="020B0604030504040204" pitchFamily="34" charset="0"/>
+                          <a:ea typeface="Verdana" panose="020B0604030504040204" pitchFamily="34" charset="0"/>
+                          <a:cs typeface="Verdana" panose="020B0604030504040204" pitchFamily="34" charset="0"/>
+                        </a:rPr>
+                        <a:t>X</a:t>
+                      </a:r>
+                      <a:endParaRPr lang="en-ZA" sz="1600" b="0" i="0" u="none" strike="noStrike" dirty="0">
+                        <a:solidFill>
+                          <a:srgbClr val="000000"/>
+                        </a:solidFill>
+                        <a:effectLst/>
+                        <a:latin typeface="Verdana" panose="020B0604030504040204" pitchFamily="34" charset="0"/>
+                        <a:ea typeface="Verdana" panose="020B0604030504040204" pitchFamily="34" charset="0"/>
+                        <a:cs typeface="Verdana" panose="020B0604030504040204" pitchFamily="34" charset="0"/>
+                      </a:endParaRPr>
+                    </a:p>
+                  </a:txBody>
+                  <a:tcPr marL="3234" marR="3234" marT="3234" marB="0" anchor="b">
+                    <a:noFill/>
+                  </a:tcPr>
+                </a:tc>
+                <a:tc>
+                  <a:txBody>
+                    <a:bodyPr/>
+                    <a:lstStyle/>
+                    <a:p>
+                      <a:pPr algn="ctr" fontAlgn="b">
+                        <a:buNone/>
+                      </a:pPr>
+                      <a:endParaRPr lang="en-ZA" sz="1600" b="0" i="0" u="none" strike="noStrike" dirty="0">
+                        <a:solidFill>
+                          <a:srgbClr val="000000"/>
+                        </a:solidFill>
+                        <a:effectLst/>
+                        <a:latin typeface="Verdana" panose="020B0604030504040204" pitchFamily="34" charset="0"/>
+                        <a:ea typeface="Verdana" panose="020B0604030504040204" pitchFamily="34" charset="0"/>
+                        <a:cs typeface="Verdana" panose="020B0604030504040204" pitchFamily="34" charset="0"/>
+                      </a:endParaRPr>
+                    </a:p>
+                  </a:txBody>
+                  <a:tcPr marL="3234" marR="3234" marT="3234" marB="0" anchor="b">
+                    <a:noFill/>
+                  </a:tcPr>
+                </a:tc>
+                <a:extLst>
+                  <a:ext uri="{0D108BD9-81ED-4DB2-BD59-A6C34878D82A}">
+                    <a16:rowId xmlns:a16="http://schemas.microsoft.com/office/drawing/2014/main" val="330474901"/>
+                  </a:ext>
+                </a:extLst>
+              </a:tr>
+              <a:tr h="398958">
+                <a:tc>
+                  <a:txBody>
+                    <a:bodyPr/>
+                    <a:lstStyle/>
+                    <a:p>
+                      <a:pPr algn="l" fontAlgn="b">
+                        <a:buNone/>
+                      </a:pPr>
+                      <a:r>
+                        <a:rPr lang="en-ZA" sz="1600" u="none" strike="noStrike" dirty="0">
+                          <a:effectLst/>
+                          <a:latin typeface="Verdana" panose="020B0604030504040204" pitchFamily="34" charset="0"/>
+                          <a:ea typeface="Verdana" panose="020B0604030504040204" pitchFamily="34" charset="0"/>
+                          <a:cs typeface="Verdana" panose="020B0604030504040204" pitchFamily="34" charset="0"/>
+                        </a:rPr>
+                        <a:t>Testing: Network/Index</a:t>
+                      </a:r>
+                      <a:endParaRPr lang="en-ZA" sz="1600" b="0" i="0" u="none" strike="noStrike" dirty="0">
+                        <a:solidFill>
+                          <a:srgbClr val="000000"/>
+                        </a:solidFill>
+                        <a:effectLst/>
+                        <a:latin typeface="Verdana" panose="020B0604030504040204" pitchFamily="34" charset="0"/>
+                        <a:ea typeface="Verdana" panose="020B0604030504040204" pitchFamily="34" charset="0"/>
+                        <a:cs typeface="Verdana" panose="020B0604030504040204" pitchFamily="34" charset="0"/>
+                      </a:endParaRPr>
+                    </a:p>
+                  </a:txBody>
+                  <a:tcPr marL="3234" marR="3234" marT="3234" marB="0" anchor="b">
+                    <a:noFill/>
+                  </a:tcPr>
+                </a:tc>
+                <a:tc>
+                  <a:txBody>
+                    <a:bodyPr/>
+                    <a:lstStyle/>
+                    <a:p>
+                      <a:pPr algn="ctr" fontAlgn="b">
+                        <a:buNone/>
+                      </a:pPr>
+                      <a:endParaRPr lang="en-ZA" sz="1600" b="0" i="0" u="none" strike="noStrike" dirty="0">
+                        <a:solidFill>
+                          <a:srgbClr val="000000"/>
+                        </a:solidFill>
+                        <a:effectLst/>
+                        <a:latin typeface="Verdana" panose="020B0604030504040204" pitchFamily="34" charset="0"/>
+                        <a:ea typeface="Verdana" panose="020B0604030504040204" pitchFamily="34" charset="0"/>
+                        <a:cs typeface="Verdana" panose="020B0604030504040204" pitchFamily="34" charset="0"/>
+                      </a:endParaRPr>
+                    </a:p>
+                  </a:txBody>
+                  <a:tcPr marL="3234" marR="3234" marT="3234" marB="0" anchor="b">
+                    <a:noFill/>
+                  </a:tcPr>
+                </a:tc>
+                <a:tc>
+                  <a:txBody>
+                    <a:bodyPr/>
+                    <a:lstStyle/>
+                    <a:p>
+                      <a:pPr algn="ctr" fontAlgn="b">
+                        <a:buNone/>
+                      </a:pPr>
+                      <a:endParaRPr lang="en-ZA" sz="1600" b="0" i="0" u="none" strike="noStrike" dirty="0">
+                        <a:solidFill>
+                          <a:srgbClr val="000000"/>
+                        </a:solidFill>
+                        <a:effectLst/>
+                        <a:latin typeface="Verdana" panose="020B0604030504040204" pitchFamily="34" charset="0"/>
+                        <a:ea typeface="Verdana" panose="020B0604030504040204" pitchFamily="34" charset="0"/>
+                        <a:cs typeface="Verdana" panose="020B0604030504040204" pitchFamily="34" charset="0"/>
+                      </a:endParaRPr>
+                    </a:p>
+                  </a:txBody>
+                  <a:tcPr marL="3234" marR="3234" marT="3234" marB="0" anchor="b">
+                    <a:noFill/>
+                  </a:tcPr>
+                </a:tc>
+                <a:tc>
+                  <a:txBody>
+                    <a:bodyPr/>
+                    <a:lstStyle/>
+                    <a:p>
+                      <a:pPr algn="ctr" fontAlgn="b">
+                        <a:buNone/>
+                      </a:pPr>
+                      <a:r>
+                        <a:rPr lang="en-ZA" sz="1600" u="none" strike="noStrike">
+                          <a:effectLst/>
+                          <a:latin typeface="Verdana" panose="020B0604030504040204" pitchFamily="34" charset="0"/>
+                          <a:ea typeface="Verdana" panose="020B0604030504040204" pitchFamily="34" charset="0"/>
+                          <a:cs typeface="Verdana" panose="020B0604030504040204" pitchFamily="34" charset="0"/>
+                        </a:rPr>
+                        <a:t>X</a:t>
+                      </a:r>
+                      <a:endParaRPr lang="en-ZA" sz="1600" b="0" i="0" u="none" strike="noStrike">
+                        <a:solidFill>
+                          <a:srgbClr val="000000"/>
+                        </a:solidFill>
+                        <a:effectLst/>
+                        <a:latin typeface="Verdana" panose="020B0604030504040204" pitchFamily="34" charset="0"/>
+                        <a:ea typeface="Verdana" panose="020B0604030504040204" pitchFamily="34" charset="0"/>
+                        <a:cs typeface="Verdana" panose="020B0604030504040204" pitchFamily="34" charset="0"/>
+                      </a:endParaRPr>
+                    </a:p>
+                  </a:txBody>
+                  <a:tcPr marL="3234" marR="3234" marT="3234" marB="0" anchor="b">
+                    <a:noFill/>
+                  </a:tcPr>
+                </a:tc>
+                <a:tc>
+                  <a:txBody>
+                    <a:bodyPr/>
+                    <a:lstStyle/>
+                    <a:p>
+                      <a:pPr algn="ctr" fontAlgn="b">
+                        <a:buNone/>
+                      </a:pPr>
+                      <a:r>
+                        <a:rPr lang="en-ZA" sz="1600" u="none" strike="noStrike">
+                          <a:effectLst/>
+                          <a:latin typeface="Verdana" panose="020B0604030504040204" pitchFamily="34" charset="0"/>
+                          <a:ea typeface="Verdana" panose="020B0604030504040204" pitchFamily="34" charset="0"/>
+                          <a:cs typeface="Verdana" panose="020B0604030504040204" pitchFamily="34" charset="0"/>
+                        </a:rPr>
+                        <a:t>X</a:t>
+                      </a:r>
+                      <a:endParaRPr lang="en-ZA" sz="1600" b="0" i="0" u="none" strike="noStrike">
+                        <a:solidFill>
+                          <a:srgbClr val="000000"/>
+                        </a:solidFill>
+                        <a:effectLst/>
+                        <a:latin typeface="Verdana" panose="020B0604030504040204" pitchFamily="34" charset="0"/>
+                        <a:ea typeface="Verdana" panose="020B0604030504040204" pitchFamily="34" charset="0"/>
+                        <a:cs typeface="Verdana" panose="020B0604030504040204" pitchFamily="34" charset="0"/>
+                      </a:endParaRPr>
+                    </a:p>
+                  </a:txBody>
+                  <a:tcPr marL="3234" marR="3234" marT="3234" marB="0" anchor="b">
+                    <a:noFill/>
+                  </a:tcPr>
+                </a:tc>
+                <a:tc>
+                  <a:txBody>
+                    <a:bodyPr/>
+                    <a:lstStyle/>
+                    <a:p>
+                      <a:pPr algn="ctr" fontAlgn="b">
+                        <a:buNone/>
+                      </a:pPr>
+                      <a:r>
+                        <a:rPr lang="en-ZA" sz="1600" u="none" strike="noStrike">
+                          <a:effectLst/>
+                          <a:latin typeface="Verdana" panose="020B0604030504040204" pitchFamily="34" charset="0"/>
+                          <a:ea typeface="Verdana" panose="020B0604030504040204" pitchFamily="34" charset="0"/>
+                          <a:cs typeface="Verdana" panose="020B0604030504040204" pitchFamily="34" charset="0"/>
+                        </a:rPr>
+                        <a:t>X</a:t>
+                      </a:r>
+                      <a:endParaRPr lang="en-ZA" sz="1600" b="0" i="0" u="none" strike="noStrike">
+                        <a:solidFill>
+                          <a:srgbClr val="000000"/>
+                        </a:solidFill>
+                        <a:effectLst/>
+                        <a:latin typeface="Verdana" panose="020B0604030504040204" pitchFamily="34" charset="0"/>
+                        <a:ea typeface="Verdana" panose="020B0604030504040204" pitchFamily="34" charset="0"/>
+                        <a:cs typeface="Verdana" panose="020B0604030504040204" pitchFamily="34" charset="0"/>
+                      </a:endParaRPr>
+                    </a:p>
+                  </a:txBody>
+                  <a:tcPr marL="3234" marR="3234" marT="3234" marB="0" anchor="b">
+                    <a:noFill/>
+                  </a:tcPr>
+                </a:tc>
+                <a:tc>
+                  <a:txBody>
+                    <a:bodyPr/>
+                    <a:lstStyle/>
+                    <a:p>
+                      <a:pPr algn="ctr" fontAlgn="b">
+                        <a:buNone/>
+                      </a:pPr>
+                      <a:endParaRPr lang="en-ZA" sz="1600" b="0" i="0" u="none" strike="noStrike" dirty="0">
+                        <a:solidFill>
+                          <a:srgbClr val="000000"/>
+                        </a:solidFill>
+                        <a:effectLst/>
+                        <a:latin typeface="Verdana" panose="020B0604030504040204" pitchFamily="34" charset="0"/>
+                        <a:ea typeface="Verdana" panose="020B0604030504040204" pitchFamily="34" charset="0"/>
+                        <a:cs typeface="Verdana" panose="020B0604030504040204" pitchFamily="34" charset="0"/>
+                      </a:endParaRPr>
+                    </a:p>
+                  </a:txBody>
+                  <a:tcPr marL="3234" marR="3234" marT="3234" marB="0" anchor="b">
+                    <a:noFill/>
+                  </a:tcPr>
+                </a:tc>
+                <a:extLst>
+                  <a:ext uri="{0D108BD9-81ED-4DB2-BD59-A6C34878D82A}">
+                    <a16:rowId xmlns:a16="http://schemas.microsoft.com/office/drawing/2014/main" val="2560179810"/>
+                  </a:ext>
+                </a:extLst>
+              </a:tr>
+              <a:tr h="398958">
+                <a:tc>
+                  <a:txBody>
+                    <a:bodyPr/>
+                    <a:lstStyle/>
+                    <a:p>
+                      <a:pPr algn="l" fontAlgn="b">
+                        <a:buNone/>
+                      </a:pPr>
+                      <a:r>
+                        <a:rPr lang="en-ZA" sz="1600" u="none" strike="noStrike" dirty="0">
+                          <a:effectLst/>
+                          <a:latin typeface="Verdana" panose="020B0604030504040204" pitchFamily="34" charset="0"/>
+                          <a:ea typeface="Verdana" panose="020B0604030504040204" pitchFamily="34" charset="0"/>
+                          <a:cs typeface="Verdana" panose="020B0604030504040204" pitchFamily="34" charset="0"/>
+                        </a:rPr>
+                        <a:t>Testing: community-based</a:t>
+                      </a:r>
+                      <a:endParaRPr lang="en-ZA" sz="1600" b="0" i="0" u="none" strike="noStrike" dirty="0">
+                        <a:solidFill>
+                          <a:srgbClr val="000000"/>
+                        </a:solidFill>
+                        <a:effectLst/>
+                        <a:latin typeface="Verdana" panose="020B0604030504040204" pitchFamily="34" charset="0"/>
+                        <a:ea typeface="Verdana" panose="020B0604030504040204" pitchFamily="34" charset="0"/>
+                        <a:cs typeface="Verdana" panose="020B0604030504040204" pitchFamily="34" charset="0"/>
+                      </a:endParaRPr>
+                    </a:p>
+                  </a:txBody>
+                  <a:tcPr marL="3234" marR="3234" marT="3234" marB="0" anchor="b">
+                    <a:noFill/>
+                  </a:tcPr>
+                </a:tc>
+                <a:tc>
+                  <a:txBody>
+                    <a:bodyPr/>
+                    <a:lstStyle/>
+                    <a:p>
+                      <a:pPr algn="ctr" fontAlgn="b">
+                        <a:buNone/>
+                      </a:pPr>
+                      <a:endParaRPr lang="en-ZA" sz="1600" b="0" i="0" u="none" strike="noStrike" dirty="0">
+                        <a:solidFill>
+                          <a:srgbClr val="000000"/>
+                        </a:solidFill>
+                        <a:effectLst/>
+                        <a:latin typeface="Verdana" panose="020B0604030504040204" pitchFamily="34" charset="0"/>
+                        <a:ea typeface="Verdana" panose="020B0604030504040204" pitchFamily="34" charset="0"/>
+                        <a:cs typeface="Verdana" panose="020B0604030504040204" pitchFamily="34" charset="0"/>
+                      </a:endParaRPr>
+                    </a:p>
+                  </a:txBody>
+                  <a:tcPr marL="3234" marR="3234" marT="3234" marB="0" anchor="b">
+                    <a:noFill/>
+                  </a:tcPr>
+                </a:tc>
+                <a:tc>
+                  <a:txBody>
+                    <a:bodyPr/>
+                    <a:lstStyle/>
+                    <a:p>
+                      <a:pPr algn="ctr" fontAlgn="b">
+                        <a:buNone/>
+                      </a:pPr>
+                      <a:endParaRPr lang="en-ZA" sz="1600" b="0" i="0" u="none" strike="noStrike" dirty="0">
+                        <a:solidFill>
+                          <a:srgbClr val="000000"/>
+                        </a:solidFill>
+                        <a:effectLst/>
+                        <a:latin typeface="Verdana" panose="020B0604030504040204" pitchFamily="34" charset="0"/>
+                        <a:ea typeface="Verdana" panose="020B0604030504040204" pitchFamily="34" charset="0"/>
+                        <a:cs typeface="Verdana" panose="020B0604030504040204" pitchFamily="34" charset="0"/>
+                      </a:endParaRPr>
+                    </a:p>
+                  </a:txBody>
+                  <a:tcPr marL="3234" marR="3234" marT="3234" marB="0" anchor="b">
+                    <a:noFill/>
+                  </a:tcPr>
+                </a:tc>
+                <a:tc>
+                  <a:txBody>
+                    <a:bodyPr/>
+                    <a:lstStyle/>
+                    <a:p>
+                      <a:pPr algn="ctr" fontAlgn="b">
+                        <a:buNone/>
+                      </a:pPr>
+                      <a:r>
+                        <a:rPr lang="en-ZA" sz="1600" u="none" strike="noStrike" dirty="0">
+                          <a:effectLst/>
+                          <a:latin typeface="Verdana" panose="020B0604030504040204" pitchFamily="34" charset="0"/>
+                          <a:ea typeface="Verdana" panose="020B0604030504040204" pitchFamily="34" charset="0"/>
+                          <a:cs typeface="Verdana" panose="020B0604030504040204" pitchFamily="34" charset="0"/>
+                        </a:rPr>
+                        <a:t>X</a:t>
+                      </a:r>
+                      <a:endParaRPr lang="en-ZA" sz="1600" b="0" i="0" u="none" strike="noStrike" dirty="0">
+                        <a:solidFill>
+                          <a:srgbClr val="000000"/>
+                        </a:solidFill>
+                        <a:effectLst/>
+                        <a:latin typeface="Verdana" panose="020B0604030504040204" pitchFamily="34" charset="0"/>
+                        <a:ea typeface="Verdana" panose="020B0604030504040204" pitchFamily="34" charset="0"/>
+                        <a:cs typeface="Verdana" panose="020B0604030504040204" pitchFamily="34" charset="0"/>
+                      </a:endParaRPr>
+                    </a:p>
+                  </a:txBody>
+                  <a:tcPr marL="3234" marR="3234" marT="3234" marB="0" anchor="b">
+                    <a:noFill/>
+                  </a:tcPr>
+                </a:tc>
+                <a:tc>
+                  <a:txBody>
+                    <a:bodyPr/>
+                    <a:lstStyle/>
+                    <a:p>
+                      <a:pPr algn="ctr" fontAlgn="b">
+                        <a:buNone/>
+                      </a:pPr>
+                      <a:r>
+                        <a:rPr lang="en-ZA" sz="1600" u="none" strike="noStrike">
+                          <a:effectLst/>
+                          <a:latin typeface="Verdana" panose="020B0604030504040204" pitchFamily="34" charset="0"/>
+                          <a:ea typeface="Verdana" panose="020B0604030504040204" pitchFamily="34" charset="0"/>
+                          <a:cs typeface="Verdana" panose="020B0604030504040204" pitchFamily="34" charset="0"/>
+                        </a:rPr>
+                        <a:t>X</a:t>
+                      </a:r>
+                      <a:endParaRPr lang="en-ZA" sz="1600" b="0" i="0" u="none" strike="noStrike">
+                        <a:solidFill>
+                          <a:srgbClr val="000000"/>
+                        </a:solidFill>
+                        <a:effectLst/>
+                        <a:latin typeface="Verdana" panose="020B0604030504040204" pitchFamily="34" charset="0"/>
+                        <a:ea typeface="Verdana" panose="020B0604030504040204" pitchFamily="34" charset="0"/>
+                        <a:cs typeface="Verdana" panose="020B0604030504040204" pitchFamily="34" charset="0"/>
+                      </a:endParaRPr>
+                    </a:p>
+                  </a:txBody>
+                  <a:tcPr marL="3234" marR="3234" marT="3234" marB="0" anchor="b">
+                    <a:noFill/>
+                  </a:tcPr>
+                </a:tc>
+                <a:tc>
+                  <a:txBody>
+                    <a:bodyPr/>
+                    <a:lstStyle/>
+                    <a:p>
+                      <a:pPr algn="ctr" fontAlgn="b">
+                        <a:buNone/>
+                      </a:pPr>
+                      <a:r>
+                        <a:rPr lang="en-ZA" sz="1600" u="none" strike="noStrike" dirty="0">
+                          <a:effectLst/>
+                          <a:latin typeface="Verdana" panose="020B0604030504040204" pitchFamily="34" charset="0"/>
+                          <a:ea typeface="Verdana" panose="020B0604030504040204" pitchFamily="34" charset="0"/>
+                          <a:cs typeface="Verdana" panose="020B0604030504040204" pitchFamily="34" charset="0"/>
+                        </a:rPr>
+                        <a:t>X</a:t>
+                      </a:r>
+                      <a:endParaRPr lang="en-ZA" sz="1600" b="0" i="0" u="none" strike="noStrike" dirty="0">
+                        <a:solidFill>
+                          <a:srgbClr val="000000"/>
+                        </a:solidFill>
+                        <a:effectLst/>
+                        <a:latin typeface="Verdana" panose="020B0604030504040204" pitchFamily="34" charset="0"/>
+                        <a:ea typeface="Verdana" panose="020B0604030504040204" pitchFamily="34" charset="0"/>
+                        <a:cs typeface="Verdana" panose="020B0604030504040204" pitchFamily="34" charset="0"/>
+                      </a:endParaRPr>
+                    </a:p>
+                  </a:txBody>
+                  <a:tcPr marL="3234" marR="3234" marT="3234" marB="0" anchor="b">
+                    <a:noFill/>
+                  </a:tcPr>
+                </a:tc>
+                <a:tc>
+                  <a:txBody>
+                    <a:bodyPr/>
+                    <a:lstStyle/>
+                    <a:p>
+                      <a:pPr algn="ctr" fontAlgn="b">
+                        <a:buNone/>
+                      </a:pPr>
+                      <a:endParaRPr lang="en-ZA" sz="1600" b="0" i="0" u="none" strike="noStrike" dirty="0">
+                        <a:solidFill>
+                          <a:srgbClr val="000000"/>
+                        </a:solidFill>
+                        <a:effectLst/>
+                        <a:latin typeface="Verdana" panose="020B0604030504040204" pitchFamily="34" charset="0"/>
+                        <a:ea typeface="Verdana" panose="020B0604030504040204" pitchFamily="34" charset="0"/>
+                        <a:cs typeface="Verdana" panose="020B0604030504040204" pitchFamily="34" charset="0"/>
+                      </a:endParaRPr>
+                    </a:p>
+                  </a:txBody>
+                  <a:tcPr marL="3234" marR="3234" marT="3234" marB="0" anchor="b">
+                    <a:noFill/>
+                  </a:tcPr>
+                </a:tc>
+                <a:extLst>
+                  <a:ext uri="{0D108BD9-81ED-4DB2-BD59-A6C34878D82A}">
+                    <a16:rowId xmlns:a16="http://schemas.microsoft.com/office/drawing/2014/main" val="393452433"/>
+                  </a:ext>
+                </a:extLst>
+              </a:tr>
+              <a:tr h="398958">
+                <a:tc>
+                  <a:txBody>
+                    <a:bodyPr/>
+                    <a:lstStyle/>
+                    <a:p>
+                      <a:pPr algn="l" fontAlgn="b">
+                        <a:buNone/>
+                      </a:pPr>
+                      <a:r>
+                        <a:rPr lang="en-ZA" sz="1600" u="none" strike="noStrike" dirty="0">
+                          <a:effectLst/>
+                          <a:latin typeface="Verdana" panose="020B0604030504040204" pitchFamily="34" charset="0"/>
+                          <a:ea typeface="Verdana" panose="020B0604030504040204" pitchFamily="34" charset="0"/>
+                          <a:cs typeface="Verdana" panose="020B0604030504040204" pitchFamily="34" charset="0"/>
+                        </a:rPr>
+                        <a:t>Testing: for key populations &amp; STI services</a:t>
+                      </a:r>
+                      <a:endParaRPr lang="en-ZA" sz="1600" b="0" i="0" u="none" strike="noStrike" dirty="0">
+                        <a:solidFill>
+                          <a:srgbClr val="000000"/>
+                        </a:solidFill>
+                        <a:effectLst/>
+                        <a:latin typeface="Verdana" panose="020B0604030504040204" pitchFamily="34" charset="0"/>
+                        <a:ea typeface="Verdana" panose="020B0604030504040204" pitchFamily="34" charset="0"/>
+                        <a:cs typeface="Verdana" panose="020B0604030504040204" pitchFamily="34" charset="0"/>
+                      </a:endParaRPr>
+                    </a:p>
+                  </a:txBody>
+                  <a:tcPr marL="3234" marR="3234" marT="3234" marB="0" anchor="b">
+                    <a:noFill/>
+                  </a:tcPr>
+                </a:tc>
+                <a:tc>
+                  <a:txBody>
+                    <a:bodyPr/>
+                    <a:lstStyle/>
+                    <a:p>
+                      <a:pPr algn="ctr" fontAlgn="b">
+                        <a:buNone/>
+                      </a:pPr>
+                      <a:endParaRPr lang="en-ZA" sz="1600" b="0" i="0" u="none" strike="noStrike">
+                        <a:solidFill>
+                          <a:srgbClr val="000000"/>
+                        </a:solidFill>
+                        <a:effectLst/>
+                        <a:latin typeface="Verdana" panose="020B0604030504040204" pitchFamily="34" charset="0"/>
+                        <a:ea typeface="Verdana" panose="020B0604030504040204" pitchFamily="34" charset="0"/>
+                        <a:cs typeface="Verdana" panose="020B0604030504040204" pitchFamily="34" charset="0"/>
+                      </a:endParaRPr>
+                    </a:p>
+                  </a:txBody>
+                  <a:tcPr marL="3234" marR="3234" marT="3234" marB="0" anchor="b">
+                    <a:noFill/>
+                  </a:tcPr>
+                </a:tc>
+                <a:tc>
+                  <a:txBody>
+                    <a:bodyPr/>
+                    <a:lstStyle/>
+                    <a:p>
+                      <a:pPr algn="ctr" fontAlgn="b">
+                        <a:buNone/>
+                      </a:pPr>
+                      <a:endParaRPr lang="en-ZA" sz="1600" b="0" i="0" u="none" strike="noStrike">
+                        <a:solidFill>
+                          <a:srgbClr val="000000"/>
+                        </a:solidFill>
+                        <a:effectLst/>
+                        <a:latin typeface="Verdana" panose="020B0604030504040204" pitchFamily="34" charset="0"/>
+                        <a:ea typeface="Verdana" panose="020B0604030504040204" pitchFamily="34" charset="0"/>
+                        <a:cs typeface="Verdana" panose="020B0604030504040204" pitchFamily="34" charset="0"/>
+                      </a:endParaRPr>
+                    </a:p>
+                  </a:txBody>
+                  <a:tcPr marL="3234" marR="3234" marT="3234" marB="0" anchor="b">
+                    <a:noFill/>
+                  </a:tcPr>
+                </a:tc>
+                <a:tc>
+                  <a:txBody>
+                    <a:bodyPr/>
+                    <a:lstStyle/>
+                    <a:p>
+                      <a:pPr algn="ctr" fontAlgn="b">
+                        <a:buNone/>
+                      </a:pPr>
+                      <a:r>
+                        <a:rPr lang="en-ZA" sz="1600" u="none" strike="noStrike" dirty="0">
+                          <a:effectLst/>
+                          <a:latin typeface="Verdana" panose="020B0604030504040204" pitchFamily="34" charset="0"/>
+                          <a:ea typeface="Verdana" panose="020B0604030504040204" pitchFamily="34" charset="0"/>
+                          <a:cs typeface="Verdana" panose="020B0604030504040204" pitchFamily="34" charset="0"/>
+                        </a:rPr>
+                        <a:t>X</a:t>
+                      </a:r>
+                      <a:endParaRPr lang="en-ZA" sz="1600" b="0" i="0" u="none" strike="noStrike" dirty="0">
+                        <a:solidFill>
+                          <a:srgbClr val="000000"/>
+                        </a:solidFill>
+                        <a:effectLst/>
+                        <a:latin typeface="Verdana" panose="020B0604030504040204" pitchFamily="34" charset="0"/>
+                        <a:ea typeface="Verdana" panose="020B0604030504040204" pitchFamily="34" charset="0"/>
+                        <a:cs typeface="Verdana" panose="020B0604030504040204" pitchFamily="34" charset="0"/>
+                      </a:endParaRPr>
+                    </a:p>
+                  </a:txBody>
+                  <a:tcPr marL="3234" marR="3234" marT="3234" marB="0" anchor="b">
+                    <a:noFill/>
+                  </a:tcPr>
+                </a:tc>
+                <a:tc>
+                  <a:txBody>
+                    <a:bodyPr/>
+                    <a:lstStyle/>
+                    <a:p>
+                      <a:pPr algn="ctr" fontAlgn="b">
+                        <a:buNone/>
+                      </a:pPr>
+                      <a:r>
+                        <a:rPr lang="en-ZA" sz="1600" u="none" strike="noStrike" dirty="0">
+                          <a:effectLst/>
+                          <a:latin typeface="Verdana" panose="020B0604030504040204" pitchFamily="34" charset="0"/>
+                          <a:ea typeface="Verdana" panose="020B0604030504040204" pitchFamily="34" charset="0"/>
+                          <a:cs typeface="Verdana" panose="020B0604030504040204" pitchFamily="34" charset="0"/>
+                        </a:rPr>
+                        <a:t>X</a:t>
+                      </a:r>
+                      <a:endParaRPr lang="en-ZA" sz="1600" b="0" i="0" u="none" strike="noStrike" dirty="0">
+                        <a:solidFill>
+                          <a:srgbClr val="000000"/>
+                        </a:solidFill>
+                        <a:effectLst/>
+                        <a:latin typeface="Verdana" panose="020B0604030504040204" pitchFamily="34" charset="0"/>
+                        <a:ea typeface="Verdana" panose="020B0604030504040204" pitchFamily="34" charset="0"/>
+                        <a:cs typeface="Verdana" panose="020B0604030504040204" pitchFamily="34" charset="0"/>
+                      </a:endParaRPr>
+                    </a:p>
+                  </a:txBody>
+                  <a:tcPr marL="3234" marR="3234" marT="3234" marB="0" anchor="b">
+                    <a:noFill/>
+                  </a:tcPr>
+                </a:tc>
+                <a:tc>
+                  <a:txBody>
+                    <a:bodyPr/>
+                    <a:lstStyle/>
+                    <a:p>
+                      <a:pPr algn="ctr" fontAlgn="b">
+                        <a:buNone/>
+                      </a:pPr>
+                      <a:r>
+                        <a:rPr lang="en-ZA" sz="1600" u="none" strike="noStrike">
+                          <a:effectLst/>
+                          <a:latin typeface="Verdana" panose="020B0604030504040204" pitchFamily="34" charset="0"/>
+                          <a:ea typeface="Verdana" panose="020B0604030504040204" pitchFamily="34" charset="0"/>
+                          <a:cs typeface="Verdana" panose="020B0604030504040204" pitchFamily="34" charset="0"/>
+                        </a:rPr>
+                        <a:t>X</a:t>
+                      </a:r>
+                      <a:endParaRPr lang="en-ZA" sz="1600" b="0" i="0" u="none" strike="noStrike">
+                        <a:solidFill>
+                          <a:srgbClr val="000000"/>
+                        </a:solidFill>
+                        <a:effectLst/>
+                        <a:latin typeface="Verdana" panose="020B0604030504040204" pitchFamily="34" charset="0"/>
+                        <a:ea typeface="Verdana" panose="020B0604030504040204" pitchFamily="34" charset="0"/>
+                        <a:cs typeface="Verdana" panose="020B0604030504040204" pitchFamily="34" charset="0"/>
+                      </a:endParaRPr>
+                    </a:p>
+                  </a:txBody>
+                  <a:tcPr marL="3234" marR="3234" marT="3234" marB="0" anchor="b">
+                    <a:noFill/>
+                  </a:tcPr>
+                </a:tc>
+                <a:tc>
+                  <a:txBody>
+                    <a:bodyPr/>
+                    <a:lstStyle/>
+                    <a:p>
+                      <a:pPr algn="ctr" fontAlgn="b">
+                        <a:buNone/>
+                      </a:pPr>
+                      <a:endParaRPr lang="en-ZA" sz="1600" b="0" i="0" u="none" strike="noStrike" dirty="0">
+                        <a:solidFill>
+                          <a:srgbClr val="000000"/>
+                        </a:solidFill>
+                        <a:effectLst/>
+                        <a:latin typeface="Verdana" panose="020B0604030504040204" pitchFamily="34" charset="0"/>
+                        <a:ea typeface="Verdana" panose="020B0604030504040204" pitchFamily="34" charset="0"/>
+                        <a:cs typeface="Verdana" panose="020B0604030504040204" pitchFamily="34" charset="0"/>
+                      </a:endParaRPr>
+                    </a:p>
+                  </a:txBody>
+                  <a:tcPr marL="3234" marR="3234" marT="3234" marB="0" anchor="b">
+                    <a:noFill/>
+                  </a:tcPr>
+                </a:tc>
+                <a:extLst>
+                  <a:ext uri="{0D108BD9-81ED-4DB2-BD59-A6C34878D82A}">
+                    <a16:rowId xmlns:a16="http://schemas.microsoft.com/office/drawing/2014/main" val="3082328327"/>
+                  </a:ext>
+                </a:extLst>
+              </a:tr>
+              <a:tr h="398958">
+                <a:tc>
+                  <a:txBody>
+                    <a:bodyPr/>
+                    <a:lstStyle/>
+                    <a:p>
+                      <a:pPr algn="l" fontAlgn="b">
+                        <a:buNone/>
+                      </a:pPr>
+                      <a:r>
+                        <a:rPr lang="en-ZA" sz="1600" u="none" strike="noStrike" dirty="0">
+                          <a:effectLst/>
+                          <a:latin typeface="Verdana" panose="020B0604030504040204" pitchFamily="34" charset="0"/>
+                          <a:ea typeface="Verdana" panose="020B0604030504040204" pitchFamily="34" charset="0"/>
+                          <a:cs typeface="Verdana" panose="020B0604030504040204" pitchFamily="34" charset="0"/>
+                        </a:rPr>
+                        <a:t>HIVST (Facility-based)</a:t>
+                      </a:r>
+                      <a:endParaRPr lang="en-ZA" sz="1600" b="0" i="0" u="none" strike="noStrike" dirty="0">
+                        <a:solidFill>
+                          <a:srgbClr val="000000"/>
+                        </a:solidFill>
+                        <a:effectLst/>
+                        <a:latin typeface="Verdana" panose="020B0604030504040204" pitchFamily="34" charset="0"/>
+                        <a:ea typeface="Verdana" panose="020B0604030504040204" pitchFamily="34" charset="0"/>
+                        <a:cs typeface="Verdana" panose="020B0604030504040204" pitchFamily="34" charset="0"/>
+                      </a:endParaRPr>
+                    </a:p>
+                  </a:txBody>
+                  <a:tcPr marL="3234" marR="3234" marT="3234" marB="0" anchor="b">
+                    <a:noFill/>
+                  </a:tcPr>
+                </a:tc>
+                <a:tc>
+                  <a:txBody>
+                    <a:bodyPr/>
+                    <a:lstStyle/>
+                    <a:p>
+                      <a:pPr algn="ctr" fontAlgn="b">
+                        <a:buNone/>
+                      </a:pPr>
+                      <a:endParaRPr lang="en-ZA" sz="1600" b="0" i="0" u="none" strike="noStrike" dirty="0">
+                        <a:solidFill>
+                          <a:srgbClr val="000000"/>
+                        </a:solidFill>
+                        <a:effectLst/>
+                        <a:latin typeface="Verdana" panose="020B0604030504040204" pitchFamily="34" charset="0"/>
+                        <a:ea typeface="Verdana" panose="020B0604030504040204" pitchFamily="34" charset="0"/>
+                        <a:cs typeface="Verdana" panose="020B0604030504040204" pitchFamily="34" charset="0"/>
+                      </a:endParaRPr>
+                    </a:p>
+                  </a:txBody>
+                  <a:tcPr marL="3234" marR="3234" marT="3234" marB="0" anchor="b">
+                    <a:noFill/>
+                  </a:tcPr>
+                </a:tc>
+                <a:tc>
+                  <a:txBody>
+                    <a:bodyPr/>
+                    <a:lstStyle/>
+                    <a:p>
+                      <a:pPr algn="ctr" fontAlgn="b">
+                        <a:buNone/>
+                      </a:pPr>
+                      <a:endParaRPr lang="en-ZA" sz="1600" b="0" i="0" u="none" strike="noStrike" dirty="0">
+                        <a:solidFill>
+                          <a:srgbClr val="000000"/>
+                        </a:solidFill>
+                        <a:effectLst/>
+                        <a:latin typeface="Verdana" panose="020B0604030504040204" pitchFamily="34" charset="0"/>
+                        <a:ea typeface="Verdana" panose="020B0604030504040204" pitchFamily="34" charset="0"/>
+                        <a:cs typeface="Verdana" panose="020B0604030504040204" pitchFamily="34" charset="0"/>
+                      </a:endParaRPr>
+                    </a:p>
+                  </a:txBody>
+                  <a:tcPr marL="3234" marR="3234" marT="3234" marB="0" anchor="b">
+                    <a:noFill/>
+                  </a:tcPr>
+                </a:tc>
+                <a:tc>
+                  <a:txBody>
+                    <a:bodyPr/>
+                    <a:lstStyle/>
+                    <a:p>
+                      <a:pPr algn="ctr" fontAlgn="b">
+                        <a:buNone/>
+                      </a:pPr>
+                      <a:r>
+                        <a:rPr lang="en-ZA" sz="1600" u="none" strike="noStrike">
+                          <a:effectLst/>
+                          <a:latin typeface="Verdana" panose="020B0604030504040204" pitchFamily="34" charset="0"/>
+                          <a:ea typeface="Verdana" panose="020B0604030504040204" pitchFamily="34" charset="0"/>
+                          <a:cs typeface="Verdana" panose="020B0604030504040204" pitchFamily="34" charset="0"/>
+                        </a:rPr>
+                        <a:t>X</a:t>
+                      </a:r>
+                      <a:endParaRPr lang="en-ZA" sz="1600" b="0" i="0" u="none" strike="noStrike">
+                        <a:solidFill>
+                          <a:srgbClr val="000000"/>
+                        </a:solidFill>
+                        <a:effectLst/>
+                        <a:latin typeface="Verdana" panose="020B0604030504040204" pitchFamily="34" charset="0"/>
+                        <a:ea typeface="Verdana" panose="020B0604030504040204" pitchFamily="34" charset="0"/>
+                        <a:cs typeface="Verdana" panose="020B0604030504040204" pitchFamily="34" charset="0"/>
+                      </a:endParaRPr>
+                    </a:p>
+                  </a:txBody>
+                  <a:tcPr marL="3234" marR="3234" marT="3234" marB="0" anchor="b">
+                    <a:noFill/>
+                  </a:tcPr>
+                </a:tc>
+                <a:tc>
+                  <a:txBody>
+                    <a:bodyPr/>
+                    <a:lstStyle/>
+                    <a:p>
+                      <a:pPr algn="ctr" fontAlgn="b">
+                        <a:buNone/>
+                      </a:pPr>
+                      <a:r>
+                        <a:rPr lang="en-ZA" sz="1600" u="none" strike="noStrike" dirty="0">
+                          <a:effectLst/>
+                          <a:latin typeface="Verdana" panose="020B0604030504040204" pitchFamily="34" charset="0"/>
+                          <a:ea typeface="Verdana" panose="020B0604030504040204" pitchFamily="34" charset="0"/>
+                          <a:cs typeface="Verdana" panose="020B0604030504040204" pitchFamily="34" charset="0"/>
+                        </a:rPr>
+                        <a:t>X</a:t>
+                      </a:r>
+                      <a:endParaRPr lang="en-ZA" sz="1600" b="0" i="0" u="none" strike="noStrike" dirty="0">
+                        <a:solidFill>
+                          <a:srgbClr val="000000"/>
+                        </a:solidFill>
+                        <a:effectLst/>
+                        <a:latin typeface="Verdana" panose="020B0604030504040204" pitchFamily="34" charset="0"/>
+                        <a:ea typeface="Verdana" panose="020B0604030504040204" pitchFamily="34" charset="0"/>
+                        <a:cs typeface="Verdana" panose="020B0604030504040204" pitchFamily="34" charset="0"/>
+                      </a:endParaRPr>
+                    </a:p>
+                  </a:txBody>
+                  <a:tcPr marL="3234" marR="3234" marT="3234" marB="0" anchor="b">
+                    <a:noFill/>
+                  </a:tcPr>
+                </a:tc>
+                <a:tc>
+                  <a:txBody>
+                    <a:bodyPr/>
+                    <a:lstStyle/>
+                    <a:p>
+                      <a:pPr algn="ctr" fontAlgn="b">
+                        <a:buNone/>
+                      </a:pPr>
+                      <a:r>
+                        <a:rPr lang="en-ZA" sz="1600" u="none" strike="noStrike" dirty="0">
+                          <a:effectLst/>
+                          <a:latin typeface="Verdana" panose="020B0604030504040204" pitchFamily="34" charset="0"/>
+                          <a:ea typeface="Verdana" panose="020B0604030504040204" pitchFamily="34" charset="0"/>
+                          <a:cs typeface="Verdana" panose="020B0604030504040204" pitchFamily="34" charset="0"/>
+                        </a:rPr>
+                        <a:t>X</a:t>
+                      </a:r>
+                      <a:endParaRPr lang="en-ZA" sz="1600" b="0" i="0" u="none" strike="noStrike" dirty="0">
+                        <a:solidFill>
+                          <a:srgbClr val="000000"/>
+                        </a:solidFill>
+                        <a:effectLst/>
+                        <a:latin typeface="Verdana" panose="020B0604030504040204" pitchFamily="34" charset="0"/>
+                        <a:ea typeface="Verdana" panose="020B0604030504040204" pitchFamily="34" charset="0"/>
+                        <a:cs typeface="Verdana" panose="020B0604030504040204" pitchFamily="34" charset="0"/>
+                      </a:endParaRPr>
+                    </a:p>
+                  </a:txBody>
+                  <a:tcPr marL="3234" marR="3234" marT="3234" marB="0" anchor="b">
+                    <a:noFill/>
+                  </a:tcPr>
+                </a:tc>
+                <a:tc>
+                  <a:txBody>
+                    <a:bodyPr/>
+                    <a:lstStyle/>
+                    <a:p>
+                      <a:pPr algn="ctr" fontAlgn="b">
+                        <a:buNone/>
+                      </a:pPr>
+                      <a:endParaRPr lang="en-ZA" sz="1600" b="0" i="0" u="none" strike="noStrike" dirty="0">
+                        <a:solidFill>
+                          <a:srgbClr val="000000"/>
+                        </a:solidFill>
+                        <a:effectLst/>
+                        <a:latin typeface="Verdana" panose="020B0604030504040204" pitchFamily="34" charset="0"/>
+                        <a:ea typeface="Verdana" panose="020B0604030504040204" pitchFamily="34" charset="0"/>
+                        <a:cs typeface="Verdana" panose="020B0604030504040204" pitchFamily="34" charset="0"/>
+                      </a:endParaRPr>
+                    </a:p>
+                  </a:txBody>
+                  <a:tcPr marL="3234" marR="3234" marT="3234" marB="0" anchor="b">
+                    <a:noFill/>
+                  </a:tcPr>
+                </a:tc>
+                <a:extLst>
+                  <a:ext uri="{0D108BD9-81ED-4DB2-BD59-A6C34878D82A}">
+                    <a16:rowId xmlns:a16="http://schemas.microsoft.com/office/drawing/2014/main" val="213087910"/>
+                  </a:ext>
+                </a:extLst>
+              </a:tr>
+              <a:tr h="398958">
+                <a:tc>
+                  <a:txBody>
+                    <a:bodyPr/>
+                    <a:lstStyle/>
+                    <a:p>
+                      <a:pPr algn="l" fontAlgn="b">
+                        <a:buNone/>
+                      </a:pPr>
+                      <a:r>
+                        <a:rPr lang="en-ZA" sz="1600" u="none" strike="noStrike" dirty="0">
+                          <a:effectLst/>
+                          <a:latin typeface="Verdana" panose="020B0604030504040204" pitchFamily="34" charset="0"/>
+                          <a:ea typeface="Verdana" panose="020B0604030504040204" pitchFamily="34" charset="0"/>
+                          <a:cs typeface="Verdana" panose="020B0604030504040204" pitchFamily="34" charset="0"/>
+                        </a:rPr>
+                        <a:t>HIVST (community-based)</a:t>
+                      </a:r>
+                      <a:endParaRPr lang="en-ZA" sz="1600" b="0" i="0" u="none" strike="noStrike" dirty="0">
+                        <a:solidFill>
+                          <a:srgbClr val="000000"/>
+                        </a:solidFill>
+                        <a:effectLst/>
+                        <a:latin typeface="Verdana" panose="020B0604030504040204" pitchFamily="34" charset="0"/>
+                        <a:ea typeface="Verdana" panose="020B0604030504040204" pitchFamily="34" charset="0"/>
+                        <a:cs typeface="Verdana" panose="020B0604030504040204" pitchFamily="34" charset="0"/>
+                      </a:endParaRPr>
+                    </a:p>
+                  </a:txBody>
+                  <a:tcPr marL="3234" marR="3234" marT="3234" marB="0" anchor="b">
+                    <a:noFill/>
+                  </a:tcPr>
+                </a:tc>
+                <a:tc>
+                  <a:txBody>
+                    <a:bodyPr/>
+                    <a:lstStyle/>
+                    <a:p>
+                      <a:pPr algn="ctr" fontAlgn="b">
+                        <a:buNone/>
+                      </a:pPr>
+                      <a:endParaRPr lang="en-ZA" sz="1600" b="0" i="0" u="none" strike="noStrike">
+                        <a:solidFill>
+                          <a:srgbClr val="000000"/>
+                        </a:solidFill>
+                        <a:effectLst/>
+                        <a:latin typeface="Verdana" panose="020B0604030504040204" pitchFamily="34" charset="0"/>
+                        <a:ea typeface="Verdana" panose="020B0604030504040204" pitchFamily="34" charset="0"/>
+                        <a:cs typeface="Verdana" panose="020B0604030504040204" pitchFamily="34" charset="0"/>
+                      </a:endParaRPr>
+                    </a:p>
+                  </a:txBody>
+                  <a:tcPr marL="3234" marR="3234" marT="3234" marB="0" anchor="b">
+                    <a:noFill/>
+                  </a:tcPr>
+                </a:tc>
+                <a:tc>
+                  <a:txBody>
+                    <a:bodyPr/>
+                    <a:lstStyle/>
+                    <a:p>
+                      <a:pPr algn="ctr" fontAlgn="b">
+                        <a:buNone/>
+                      </a:pPr>
+                      <a:endParaRPr lang="en-ZA" sz="1600" b="0" i="0" u="none" strike="noStrike" dirty="0">
+                        <a:solidFill>
+                          <a:srgbClr val="000000"/>
+                        </a:solidFill>
+                        <a:effectLst/>
+                        <a:latin typeface="Verdana" panose="020B0604030504040204" pitchFamily="34" charset="0"/>
+                        <a:ea typeface="Verdana" panose="020B0604030504040204" pitchFamily="34" charset="0"/>
+                        <a:cs typeface="Verdana" panose="020B0604030504040204" pitchFamily="34" charset="0"/>
+                      </a:endParaRPr>
+                    </a:p>
+                  </a:txBody>
+                  <a:tcPr marL="3234" marR="3234" marT="3234" marB="0" anchor="b">
+                    <a:noFill/>
+                  </a:tcPr>
+                </a:tc>
+                <a:tc>
+                  <a:txBody>
+                    <a:bodyPr/>
+                    <a:lstStyle/>
+                    <a:p>
+                      <a:pPr algn="ctr" fontAlgn="b">
+                        <a:buNone/>
+                      </a:pPr>
+                      <a:r>
+                        <a:rPr lang="en-ZA" sz="1600" u="none" strike="noStrike" dirty="0">
+                          <a:effectLst/>
+                          <a:latin typeface="Verdana" panose="020B0604030504040204" pitchFamily="34" charset="0"/>
+                          <a:ea typeface="Verdana" panose="020B0604030504040204" pitchFamily="34" charset="0"/>
+                          <a:cs typeface="Verdana" panose="020B0604030504040204" pitchFamily="34" charset="0"/>
+                        </a:rPr>
+                        <a:t>X</a:t>
+                      </a:r>
+                      <a:endParaRPr lang="en-ZA" sz="1600" b="0" i="0" u="none" strike="noStrike" dirty="0">
+                        <a:solidFill>
+                          <a:srgbClr val="000000"/>
+                        </a:solidFill>
+                        <a:effectLst/>
+                        <a:latin typeface="Verdana" panose="020B0604030504040204" pitchFamily="34" charset="0"/>
+                        <a:ea typeface="Verdana" panose="020B0604030504040204" pitchFamily="34" charset="0"/>
+                        <a:cs typeface="Verdana" panose="020B0604030504040204" pitchFamily="34" charset="0"/>
+                      </a:endParaRPr>
+                    </a:p>
+                  </a:txBody>
+                  <a:tcPr marL="3234" marR="3234" marT="3234" marB="0" anchor="b">
+                    <a:noFill/>
+                  </a:tcPr>
+                </a:tc>
+                <a:tc>
+                  <a:txBody>
+                    <a:bodyPr/>
+                    <a:lstStyle/>
+                    <a:p>
+                      <a:pPr algn="ctr" fontAlgn="b">
+                        <a:buNone/>
+                      </a:pPr>
+                      <a:r>
+                        <a:rPr lang="en-ZA" sz="1600" u="none" strike="noStrike" dirty="0">
+                          <a:effectLst/>
+                          <a:latin typeface="Verdana" panose="020B0604030504040204" pitchFamily="34" charset="0"/>
+                          <a:ea typeface="Verdana" panose="020B0604030504040204" pitchFamily="34" charset="0"/>
+                          <a:cs typeface="Verdana" panose="020B0604030504040204" pitchFamily="34" charset="0"/>
+                        </a:rPr>
+                        <a:t>X</a:t>
+                      </a:r>
+                      <a:endParaRPr lang="en-ZA" sz="1600" b="0" i="0" u="none" strike="noStrike" dirty="0">
+                        <a:solidFill>
+                          <a:srgbClr val="000000"/>
+                        </a:solidFill>
+                        <a:effectLst/>
+                        <a:latin typeface="Verdana" panose="020B0604030504040204" pitchFamily="34" charset="0"/>
+                        <a:ea typeface="Verdana" panose="020B0604030504040204" pitchFamily="34" charset="0"/>
+                        <a:cs typeface="Verdana" panose="020B0604030504040204" pitchFamily="34" charset="0"/>
+                      </a:endParaRPr>
+                    </a:p>
+                  </a:txBody>
+                  <a:tcPr marL="3234" marR="3234" marT="3234" marB="0" anchor="b">
+                    <a:noFill/>
+                  </a:tcPr>
+                </a:tc>
+                <a:tc>
+                  <a:txBody>
+                    <a:bodyPr/>
+                    <a:lstStyle/>
+                    <a:p>
+                      <a:pPr algn="ctr" fontAlgn="b">
+                        <a:buNone/>
+                      </a:pPr>
+                      <a:r>
+                        <a:rPr lang="en-ZA" sz="1600" u="none" strike="noStrike" dirty="0">
+                          <a:effectLst/>
+                          <a:latin typeface="Verdana" panose="020B0604030504040204" pitchFamily="34" charset="0"/>
+                          <a:ea typeface="Verdana" panose="020B0604030504040204" pitchFamily="34" charset="0"/>
+                          <a:cs typeface="Verdana" panose="020B0604030504040204" pitchFamily="34" charset="0"/>
+                        </a:rPr>
+                        <a:t>X</a:t>
+                      </a:r>
+                      <a:endParaRPr lang="en-ZA" sz="1600" b="0" i="0" u="none" strike="noStrike" dirty="0">
+                        <a:solidFill>
+                          <a:srgbClr val="000000"/>
+                        </a:solidFill>
+                        <a:effectLst/>
+                        <a:latin typeface="Verdana" panose="020B0604030504040204" pitchFamily="34" charset="0"/>
+                        <a:ea typeface="Verdana" panose="020B0604030504040204" pitchFamily="34" charset="0"/>
+                        <a:cs typeface="Verdana" panose="020B0604030504040204" pitchFamily="34" charset="0"/>
+                      </a:endParaRPr>
+                    </a:p>
+                  </a:txBody>
+                  <a:tcPr marL="3234" marR="3234" marT="3234" marB="0" anchor="b">
+                    <a:noFill/>
+                  </a:tcPr>
+                </a:tc>
+                <a:tc>
+                  <a:txBody>
+                    <a:bodyPr/>
+                    <a:lstStyle/>
+                    <a:p>
+                      <a:pPr algn="ctr" fontAlgn="b">
+                        <a:buNone/>
+                      </a:pPr>
+                      <a:endParaRPr lang="en-ZA" sz="1600" b="0" i="0" u="none" strike="noStrike" dirty="0">
+                        <a:solidFill>
+                          <a:srgbClr val="000000"/>
+                        </a:solidFill>
+                        <a:effectLst/>
+                        <a:latin typeface="Verdana" panose="020B0604030504040204" pitchFamily="34" charset="0"/>
+                        <a:ea typeface="Verdana" panose="020B0604030504040204" pitchFamily="34" charset="0"/>
+                        <a:cs typeface="Verdana" panose="020B0604030504040204" pitchFamily="34" charset="0"/>
+                      </a:endParaRPr>
+                    </a:p>
+                  </a:txBody>
+                  <a:tcPr marL="3234" marR="3234" marT="3234" marB="0" anchor="b">
+                    <a:noFill/>
+                  </a:tcPr>
+                </a:tc>
+                <a:extLst>
+                  <a:ext uri="{0D108BD9-81ED-4DB2-BD59-A6C34878D82A}">
+                    <a16:rowId xmlns:a16="http://schemas.microsoft.com/office/drawing/2014/main" val="2923424381"/>
+                  </a:ext>
+                </a:extLst>
+              </a:tr>
+            </a:tbl>
+          </a:graphicData>
+        </a:graphic>
+      </p:graphicFrame>
+    </p:spTree>
+    <p:extLst>
+      <p:ext uri="{BB962C8B-B14F-4D97-AF65-F5344CB8AC3E}">
+        <p14:creationId xmlns:p14="http://schemas.microsoft.com/office/powerpoint/2010/main" val="4008255750"/>
+      </p:ext>
+    </p:extLst>
+  </p:cSld>
+  <p:clrMapOvr>
+    <a:masterClrMapping/>
+  </p:clrMapOvr>
+</p:sld>
+</file>
+
+<file path=ppt/slides/slide6.xml><?xml version="1.0" encoding="utf-8"?>
+<p:sld xmlns:a="http://schemas.openxmlformats.org/drawingml/2006/main" xmlns:r="http://schemas.openxmlformats.org/officeDocument/2006/relationships" xmlns:p="http://schemas.openxmlformats.org/presentationml/2006/main">
+  <p:cSld>
+    <p:spTree>
+      <p:nvGrpSpPr>
+        <p:cNvPr id="1" name="">
+          <a:extLst>
+            <a:ext uri="{FF2B5EF4-FFF2-40B4-BE49-F238E27FC236}">
+              <a16:creationId xmlns:a16="http://schemas.microsoft.com/office/drawing/2014/main" id="{B4CEE6FF-B434-58BC-5B1B-7575986E2A3D}"/>
+            </a:ext>
+          </a:extLst>
+        </p:cNvPr>
+        <p:cNvGrpSpPr/>
+        <p:nvPr/>
+      </p:nvGrpSpPr>
+      <p:grpSpPr>
+        <a:xfrm>
+          <a:off x="0" y="0"/>
+          <a:ext cx="0" cy="0"/>
+          <a:chOff x="0" y="0"/>
+          <a:chExt cx="0" cy="0"/>
+        </a:xfrm>
+      </p:grpSpPr>
+      <p:sp>
+        <p:nvSpPr>
+          <p:cNvPr id="2" name="Titel 1">
+            <a:extLst>
+              <a:ext uri="{FF2B5EF4-FFF2-40B4-BE49-F238E27FC236}">
+                <a16:creationId xmlns:a16="http://schemas.microsoft.com/office/drawing/2014/main" id="{555D44D5-FB10-979E-0352-C495A93D8D94}"/>
+              </a:ext>
+            </a:extLst>
+          </p:cNvPr>
+          <p:cNvSpPr>
+            <a:spLocks noGrp="1"/>
+          </p:cNvSpPr>
+          <p:nvPr>
+            <p:ph type="title"/>
+          </p:nvPr>
+        </p:nvSpPr>
+        <p:spPr>
+          <a:xfrm>
+            <a:off x="442913" y="1401624"/>
+            <a:ext cx="11372850" cy="1260000"/>
+          </a:xfrm>
+        </p:spPr>
+        <p:txBody>
+          <a:bodyPr/>
+          <a:lstStyle/>
+          <a:p>
+            <a:r>
+              <a:rPr lang="en-GB" noProof="0" dirty="0">
+                <a:solidFill>
+                  <a:schemeClr val="accent1"/>
+                </a:solidFill>
+              </a:rPr>
+              <a:t>What‘s Included: </a:t>
+            </a:r>
+            <a:r>
+              <a:rPr lang="en-GB" noProof="0" dirty="0">
+                <a:solidFill>
+                  <a:srgbClr val="00B0F0"/>
+                </a:solidFill>
+              </a:rPr>
+              <a:t>Testing</a:t>
+            </a:r>
+          </a:p>
+        </p:txBody>
+      </p:sp>
+      <p:graphicFrame>
+        <p:nvGraphicFramePr>
+          <p:cNvPr id="6" name="Table 5">
+            <a:extLst>
+              <a:ext uri="{FF2B5EF4-FFF2-40B4-BE49-F238E27FC236}">
+                <a16:creationId xmlns:a16="http://schemas.microsoft.com/office/drawing/2014/main" id="{CB56A088-B7AE-C8B2-53C4-F24DD45C6711}"/>
+              </a:ext>
+            </a:extLst>
+          </p:cNvPr>
+          <p:cNvGraphicFramePr>
+            <a:graphicFrameLocks noGrp="1"/>
+          </p:cNvGraphicFramePr>
+          <p:nvPr/>
+        </p:nvGraphicFramePr>
+        <p:xfrm>
+          <a:off x="525779" y="2388870"/>
+          <a:ext cx="11289984" cy="3799062"/>
+        </p:xfrm>
+        <a:graphic>
+          <a:graphicData uri="http://schemas.openxmlformats.org/drawingml/2006/table">
+            <a:tbl>
+              <a:tblPr>
+                <a:tableStyleId>{616DA210-FB5B-4158-B5E0-FEB733F419BA}</a:tableStyleId>
+              </a:tblPr>
+              <a:tblGrid>
+                <a:gridCol w="3531870">
+                  <a:extLst>
+                    <a:ext uri="{9D8B030D-6E8A-4147-A177-3AD203B41FA5}">
+                      <a16:colId xmlns:a16="http://schemas.microsoft.com/office/drawing/2014/main" val="4120267808"/>
+                    </a:ext>
+                  </a:extLst>
+                </a:gridCol>
+                <a:gridCol w="1293019">
+                  <a:extLst>
+                    <a:ext uri="{9D8B030D-6E8A-4147-A177-3AD203B41FA5}">
+                      <a16:colId xmlns:a16="http://schemas.microsoft.com/office/drawing/2014/main" val="1209723872"/>
+                    </a:ext>
+                  </a:extLst>
+                </a:gridCol>
+                <a:gridCol w="1293019">
+                  <a:extLst>
+                    <a:ext uri="{9D8B030D-6E8A-4147-A177-3AD203B41FA5}">
+                      <a16:colId xmlns:a16="http://schemas.microsoft.com/office/drawing/2014/main" val="2743590385"/>
+                    </a:ext>
+                  </a:extLst>
+                </a:gridCol>
+                <a:gridCol w="1293019">
+                  <a:extLst>
+                    <a:ext uri="{9D8B030D-6E8A-4147-A177-3AD203B41FA5}">
+                      <a16:colId xmlns:a16="http://schemas.microsoft.com/office/drawing/2014/main" val="4208286694"/>
+                    </a:ext>
+                  </a:extLst>
+                </a:gridCol>
+                <a:gridCol w="1293019">
+                  <a:extLst>
+                    <a:ext uri="{9D8B030D-6E8A-4147-A177-3AD203B41FA5}">
+                      <a16:colId xmlns:a16="http://schemas.microsoft.com/office/drawing/2014/main" val="3849485650"/>
+                    </a:ext>
+                  </a:extLst>
+                </a:gridCol>
+                <a:gridCol w="1293019">
+                  <a:extLst>
+                    <a:ext uri="{9D8B030D-6E8A-4147-A177-3AD203B41FA5}">
+                      <a16:colId xmlns:a16="http://schemas.microsoft.com/office/drawing/2014/main" val="65177762"/>
+                    </a:ext>
+                  </a:extLst>
+                </a:gridCol>
+                <a:gridCol w="1293019">
+                  <a:extLst>
+                    <a:ext uri="{9D8B030D-6E8A-4147-A177-3AD203B41FA5}">
+                      <a16:colId xmlns:a16="http://schemas.microsoft.com/office/drawing/2014/main" val="3550359160"/>
+                    </a:ext>
+                  </a:extLst>
+                </a:gridCol>
+              </a:tblGrid>
+              <a:tr h="265223">
+                <a:tc>
+                  <a:txBody>
+                    <a:bodyPr/>
+                    <a:lstStyle/>
+                    <a:p>
+                      <a:pPr algn="ctr" fontAlgn="b">
+                        <a:buNone/>
+                      </a:pPr>
+                      <a:endParaRPr lang="en-ZA" sz="1600" b="1" i="0" u="none" strike="noStrike" dirty="0">
+                        <a:solidFill>
+                          <a:srgbClr val="000000"/>
+                        </a:solidFill>
+                        <a:effectLst/>
+                        <a:latin typeface="Verdana" panose="020B0604030504040204" pitchFamily="34" charset="0"/>
+                        <a:ea typeface="Verdana" panose="020B0604030504040204" pitchFamily="34" charset="0"/>
+                        <a:cs typeface="Verdana" panose="020B0604030504040204" pitchFamily="34" charset="0"/>
+                      </a:endParaRPr>
+                    </a:p>
+                  </a:txBody>
+                  <a:tcPr marL="45720" marR="45720" anchor="b">
+                    <a:solidFill>
+                      <a:srgbClr val="FFFFFF"/>
+                    </a:solidFill>
+                  </a:tcPr>
+                </a:tc>
+                <a:tc gridSpan="6">
+                  <a:txBody>
+                    <a:bodyPr/>
+                    <a:lstStyle/>
+                    <a:p>
+                      <a:pPr algn="ctr" fontAlgn="b">
+                        <a:buNone/>
+                      </a:pPr>
+                      <a:r>
+                        <a:rPr lang="en-ZA" sz="1600" b="1" u="none" strike="noStrike" dirty="0">
+                          <a:effectLst/>
+                          <a:latin typeface="Verdana" panose="020B0604030504040204" pitchFamily="34" charset="0"/>
+                          <a:ea typeface="Verdana" panose="020B0604030504040204" pitchFamily="34" charset="0"/>
+                          <a:cs typeface="Verdana" panose="020B0604030504040204" pitchFamily="34" charset="0"/>
+                        </a:rPr>
+                        <a:t>Outcome affected</a:t>
+                      </a:r>
+                      <a:endParaRPr lang="en-ZA" sz="1600" b="1" i="0" u="none" strike="noStrike" dirty="0">
+                        <a:solidFill>
+                          <a:srgbClr val="000000"/>
+                        </a:solidFill>
+                        <a:effectLst/>
+                        <a:latin typeface="Verdana" panose="020B0604030504040204" pitchFamily="34" charset="0"/>
+                        <a:ea typeface="Verdana" panose="020B0604030504040204" pitchFamily="34" charset="0"/>
+                        <a:cs typeface="Verdana" panose="020B0604030504040204" pitchFamily="34" charset="0"/>
+                      </a:endParaRPr>
+                    </a:p>
+                  </a:txBody>
+                  <a:tcPr marL="45720" marR="45720" anchor="b">
+                    <a:solidFill>
+                      <a:srgbClr val="FFFFFF"/>
+                    </a:solidFill>
+                  </a:tcPr>
+                </a:tc>
+                <a:tc hMerge="1">
+                  <a:txBody>
+                    <a:bodyPr/>
+                    <a:lstStyle/>
+                    <a:p>
+                      <a:endParaRPr lang="en-GB"/>
+                    </a:p>
+                  </a:txBody>
+                  <a:tcPr/>
+                </a:tc>
+                <a:tc hMerge="1">
+                  <a:txBody>
+                    <a:bodyPr/>
+                    <a:lstStyle/>
+                    <a:p>
+                      <a:endParaRPr lang="en-GB"/>
+                    </a:p>
+                  </a:txBody>
+                  <a:tcPr/>
+                </a:tc>
+                <a:tc hMerge="1">
+                  <a:txBody>
+                    <a:bodyPr/>
+                    <a:lstStyle/>
+                    <a:p>
+                      <a:endParaRPr lang="en-GB"/>
+                    </a:p>
+                  </a:txBody>
+                  <a:tcPr/>
+                </a:tc>
+                <a:tc hMerge="1">
+                  <a:txBody>
+                    <a:bodyPr/>
+                    <a:lstStyle/>
+                    <a:p>
+                      <a:endParaRPr lang="en-GB"/>
+                    </a:p>
+                  </a:txBody>
+                  <a:tcPr/>
+                </a:tc>
+                <a:tc hMerge="1">
+                  <a:txBody>
+                    <a:bodyPr/>
+                    <a:lstStyle/>
+                    <a:p>
+                      <a:endParaRPr lang="en-GB"/>
+                    </a:p>
+                  </a:txBody>
+                  <a:tcPr/>
+                </a:tc>
+                <a:extLst>
+                  <a:ext uri="{0D108BD9-81ED-4DB2-BD59-A6C34878D82A}">
+                    <a16:rowId xmlns:a16="http://schemas.microsoft.com/office/drawing/2014/main" val="3572059884"/>
+                  </a:ext>
+                </a:extLst>
+              </a:tr>
+              <a:tr h="458112">
+                <a:tc>
+                  <a:txBody>
+                    <a:bodyPr/>
+                    <a:lstStyle/>
+                    <a:p>
+                      <a:pPr algn="l" fontAlgn="b">
+                        <a:buNone/>
+                      </a:pPr>
+                      <a:r>
+                        <a:rPr lang="en-ZA" sz="1600" b="1" i="0" u="none" strike="noStrike" dirty="0">
+                          <a:solidFill>
+                            <a:srgbClr val="000000"/>
+                          </a:solidFill>
+                          <a:effectLst/>
+                          <a:latin typeface="Verdana" panose="020B0604030504040204" pitchFamily="34" charset="0"/>
+                          <a:ea typeface="Verdana" panose="020B0604030504040204" pitchFamily="34" charset="0"/>
+                          <a:cs typeface="Verdana" panose="020B0604030504040204" pitchFamily="34" charset="0"/>
+                        </a:rPr>
+                        <a:t>intervention</a:t>
+                      </a:r>
+                    </a:p>
+                  </a:txBody>
+                  <a:tcPr marL="45720" marR="45720" anchor="b">
+                    <a:solidFill>
+                      <a:srgbClr val="3CB0F1"/>
+                    </a:solidFill>
+                  </a:tcPr>
+                </a:tc>
+                <a:tc>
+                  <a:txBody>
+                    <a:bodyPr/>
+                    <a:lstStyle/>
+                    <a:p>
+                      <a:pPr algn="ctr" fontAlgn="b">
+                        <a:buNone/>
+                      </a:pPr>
+                      <a:r>
+                        <a:rPr lang="en-ZA" sz="1600" b="1" u="none" strike="noStrike" dirty="0">
+                          <a:effectLst/>
+                          <a:latin typeface="Verdana" panose="020B0604030504040204" pitchFamily="34" charset="0"/>
+                          <a:ea typeface="Verdana" panose="020B0604030504040204" pitchFamily="34" charset="0"/>
+                          <a:cs typeface="Verdana" panose="020B0604030504040204" pitchFamily="34" charset="0"/>
+                        </a:rPr>
+                        <a:t>adult infections</a:t>
+                      </a:r>
+                      <a:endParaRPr lang="en-ZA" sz="1600" b="1" i="0" u="none" strike="noStrike" dirty="0">
+                        <a:solidFill>
+                          <a:srgbClr val="000000"/>
+                        </a:solidFill>
+                        <a:effectLst/>
+                        <a:latin typeface="Verdana" panose="020B0604030504040204" pitchFamily="34" charset="0"/>
+                        <a:ea typeface="Verdana" panose="020B0604030504040204" pitchFamily="34" charset="0"/>
+                        <a:cs typeface="Verdana" panose="020B0604030504040204" pitchFamily="34" charset="0"/>
+                      </a:endParaRPr>
+                    </a:p>
+                  </a:txBody>
+                  <a:tcPr marL="45720" marR="45720" anchor="b">
+                    <a:solidFill>
+                      <a:srgbClr val="3CB0F1"/>
+                    </a:solidFill>
+                  </a:tcPr>
+                </a:tc>
+                <a:tc>
+                  <a:txBody>
+                    <a:bodyPr/>
+                    <a:lstStyle/>
+                    <a:p>
+                      <a:pPr algn="ctr" fontAlgn="b">
+                        <a:buNone/>
+                      </a:pPr>
+                      <a:r>
+                        <a:rPr lang="en-ZA" sz="1600" b="1" u="none" strike="noStrike" dirty="0">
+                          <a:effectLst/>
+                          <a:latin typeface="Verdana" panose="020B0604030504040204" pitchFamily="34" charset="0"/>
+                          <a:ea typeface="Verdana" panose="020B0604030504040204" pitchFamily="34" charset="0"/>
+                          <a:cs typeface="Verdana" panose="020B0604030504040204" pitchFamily="34" charset="0"/>
+                        </a:rPr>
+                        <a:t>infant infections </a:t>
+                      </a:r>
+                      <a:endParaRPr lang="en-ZA" sz="1600" b="1" i="0" u="none" strike="noStrike" dirty="0">
+                        <a:solidFill>
+                          <a:srgbClr val="000000"/>
+                        </a:solidFill>
+                        <a:effectLst/>
+                        <a:latin typeface="Verdana" panose="020B0604030504040204" pitchFamily="34" charset="0"/>
+                        <a:ea typeface="Verdana" panose="020B0604030504040204" pitchFamily="34" charset="0"/>
+                        <a:cs typeface="Verdana" panose="020B0604030504040204" pitchFamily="34" charset="0"/>
+                      </a:endParaRPr>
+                    </a:p>
+                  </a:txBody>
+                  <a:tcPr marL="45720" marR="45720" anchor="b">
+                    <a:solidFill>
+                      <a:srgbClr val="3CB0F1"/>
+                    </a:solidFill>
+                  </a:tcPr>
+                </a:tc>
+                <a:tc>
+                  <a:txBody>
+                    <a:bodyPr/>
+                    <a:lstStyle/>
+                    <a:p>
+                      <a:pPr algn="ctr" fontAlgn="b">
+                        <a:buNone/>
+                      </a:pPr>
+                      <a:r>
+                        <a:rPr lang="en-ZA" sz="1600" b="1" u="none" strike="noStrike" dirty="0">
+                          <a:effectLst/>
+                          <a:latin typeface="Verdana" panose="020B0604030504040204" pitchFamily="34" charset="0"/>
+                          <a:ea typeface="Verdana" panose="020B0604030504040204" pitchFamily="34" charset="0"/>
+                          <a:cs typeface="Verdana" panose="020B0604030504040204" pitchFamily="34" charset="0"/>
+                        </a:rPr>
+                        <a:t>first 95</a:t>
+                      </a:r>
+                      <a:endParaRPr lang="en-ZA" sz="1600" b="1" i="0" u="none" strike="noStrike" dirty="0">
+                        <a:solidFill>
+                          <a:srgbClr val="000000"/>
+                        </a:solidFill>
+                        <a:effectLst/>
+                        <a:latin typeface="Verdana" panose="020B0604030504040204" pitchFamily="34" charset="0"/>
+                        <a:ea typeface="Verdana" panose="020B0604030504040204" pitchFamily="34" charset="0"/>
+                        <a:cs typeface="Verdana" panose="020B0604030504040204" pitchFamily="34" charset="0"/>
+                      </a:endParaRPr>
+                    </a:p>
+                  </a:txBody>
+                  <a:tcPr marL="45720" marR="45720" anchor="b">
+                    <a:solidFill>
+                      <a:srgbClr val="3CB0F1"/>
+                    </a:solidFill>
+                  </a:tcPr>
+                </a:tc>
+                <a:tc>
+                  <a:txBody>
+                    <a:bodyPr/>
+                    <a:lstStyle/>
+                    <a:p>
+                      <a:pPr algn="ctr" fontAlgn="b">
+                        <a:buNone/>
+                      </a:pPr>
+                      <a:r>
+                        <a:rPr lang="en-ZA" sz="1600" b="1" u="none" strike="noStrike" dirty="0">
+                          <a:effectLst/>
+                          <a:latin typeface="Verdana" panose="020B0604030504040204" pitchFamily="34" charset="0"/>
+                          <a:ea typeface="Verdana" panose="020B0604030504040204" pitchFamily="34" charset="0"/>
+                          <a:cs typeface="Verdana" panose="020B0604030504040204" pitchFamily="34" charset="0"/>
+                        </a:rPr>
+                        <a:t>second 95</a:t>
+                      </a:r>
+                      <a:endParaRPr lang="en-ZA" sz="1600" b="1" i="0" u="none" strike="noStrike" dirty="0">
+                        <a:solidFill>
+                          <a:srgbClr val="000000"/>
+                        </a:solidFill>
+                        <a:effectLst/>
+                        <a:latin typeface="Verdana" panose="020B0604030504040204" pitchFamily="34" charset="0"/>
+                        <a:ea typeface="Verdana" panose="020B0604030504040204" pitchFamily="34" charset="0"/>
+                        <a:cs typeface="Verdana" panose="020B0604030504040204" pitchFamily="34" charset="0"/>
+                      </a:endParaRPr>
+                    </a:p>
+                  </a:txBody>
+                  <a:tcPr marL="45720" marR="45720" anchor="b">
+                    <a:solidFill>
+                      <a:srgbClr val="3CB0F1"/>
+                    </a:solidFill>
+                  </a:tcPr>
+                </a:tc>
+                <a:tc>
+                  <a:txBody>
+                    <a:bodyPr/>
+                    <a:lstStyle/>
+                    <a:p>
+                      <a:pPr algn="ctr" fontAlgn="b">
+                        <a:buNone/>
+                      </a:pPr>
+                      <a:r>
+                        <a:rPr lang="en-ZA" sz="1600" b="1" u="none" strike="noStrike" dirty="0">
+                          <a:effectLst/>
+                          <a:latin typeface="Verdana" panose="020B0604030504040204" pitchFamily="34" charset="0"/>
+                          <a:ea typeface="Verdana" panose="020B0604030504040204" pitchFamily="34" charset="0"/>
+                          <a:cs typeface="Verdana" panose="020B0604030504040204" pitchFamily="34" charset="0"/>
+                        </a:rPr>
+                        <a:t>third 95</a:t>
+                      </a:r>
+                      <a:endParaRPr lang="en-ZA" sz="1600" b="1" i="0" u="none" strike="noStrike" dirty="0">
+                        <a:solidFill>
+                          <a:srgbClr val="000000"/>
+                        </a:solidFill>
+                        <a:effectLst/>
+                        <a:latin typeface="Verdana" panose="020B0604030504040204" pitchFamily="34" charset="0"/>
+                        <a:ea typeface="Verdana" panose="020B0604030504040204" pitchFamily="34" charset="0"/>
+                        <a:cs typeface="Verdana" panose="020B0604030504040204" pitchFamily="34" charset="0"/>
+                      </a:endParaRPr>
+                    </a:p>
+                  </a:txBody>
+                  <a:tcPr marL="45720" marR="45720" anchor="b">
+                    <a:solidFill>
+                      <a:srgbClr val="3CB0F1"/>
+                    </a:solidFill>
+                  </a:tcPr>
+                </a:tc>
+                <a:tc>
+                  <a:txBody>
+                    <a:bodyPr/>
+                    <a:lstStyle/>
+                    <a:p>
+                      <a:pPr algn="ctr" fontAlgn="b">
+                        <a:buNone/>
+                      </a:pPr>
+                      <a:r>
+                        <a:rPr lang="en-ZA" sz="1600" b="1" u="none" strike="noStrike" dirty="0">
+                          <a:effectLst/>
+                          <a:latin typeface="Verdana" panose="020B0604030504040204" pitchFamily="34" charset="0"/>
+                          <a:ea typeface="Verdana" panose="020B0604030504040204" pitchFamily="34" charset="0"/>
+                          <a:cs typeface="Verdana" panose="020B0604030504040204" pitchFamily="34" charset="0"/>
+                        </a:rPr>
+                        <a:t>mortality</a:t>
+                      </a:r>
+                      <a:endParaRPr lang="en-ZA" sz="1600" b="1" i="0" u="none" strike="noStrike" dirty="0">
+                        <a:solidFill>
+                          <a:srgbClr val="000000"/>
+                        </a:solidFill>
+                        <a:effectLst/>
+                        <a:latin typeface="Verdana" panose="020B0604030504040204" pitchFamily="34" charset="0"/>
+                        <a:ea typeface="Verdana" panose="020B0604030504040204" pitchFamily="34" charset="0"/>
+                        <a:cs typeface="Verdana" panose="020B0604030504040204" pitchFamily="34" charset="0"/>
+                      </a:endParaRPr>
+                    </a:p>
+                  </a:txBody>
+                  <a:tcPr marL="45720" marR="45720" anchor="b">
+                    <a:solidFill>
+                      <a:srgbClr val="3CB0F1"/>
+                    </a:solidFill>
+                  </a:tcPr>
+                </a:tc>
+                <a:extLst>
+                  <a:ext uri="{0D108BD9-81ED-4DB2-BD59-A6C34878D82A}">
+                    <a16:rowId xmlns:a16="http://schemas.microsoft.com/office/drawing/2014/main" val="2377431970"/>
+                  </a:ext>
+                </a:extLst>
+              </a:tr>
+              <a:tr h="398958">
+                <a:tc>
+                  <a:txBody>
+                    <a:bodyPr/>
+                    <a:lstStyle/>
+                    <a:p>
+                      <a:pPr algn="l" fontAlgn="b">
+                        <a:buNone/>
+                      </a:pPr>
+                      <a:r>
+                        <a:rPr lang="en-ZA" sz="1600" u="none" strike="noStrike" dirty="0">
+                          <a:effectLst/>
+                          <a:latin typeface="Verdana" panose="020B0604030504040204" pitchFamily="34" charset="0"/>
+                          <a:ea typeface="Verdana" panose="020B0604030504040204" pitchFamily="34" charset="0"/>
+                          <a:cs typeface="Verdana" panose="020B0604030504040204" pitchFamily="34" charset="0"/>
+                        </a:rPr>
+                        <a:t>Testing: facility-based (general)</a:t>
+                      </a:r>
+                      <a:endParaRPr lang="en-ZA" sz="1600" b="0" i="0" u="none" strike="noStrike" dirty="0">
+                        <a:solidFill>
+                          <a:srgbClr val="000000"/>
+                        </a:solidFill>
+                        <a:effectLst/>
+                        <a:latin typeface="Verdana" panose="020B0604030504040204" pitchFamily="34" charset="0"/>
+                        <a:ea typeface="Verdana" panose="020B0604030504040204" pitchFamily="34" charset="0"/>
+                        <a:cs typeface="Verdana" panose="020B0604030504040204" pitchFamily="34" charset="0"/>
+                      </a:endParaRPr>
+                    </a:p>
+                  </a:txBody>
+                  <a:tcPr marL="3234" marR="3234" marT="3234" marB="0" anchor="b">
+                    <a:noFill/>
+                  </a:tcPr>
+                </a:tc>
+                <a:tc>
+                  <a:txBody>
+                    <a:bodyPr/>
+                    <a:lstStyle/>
+                    <a:p>
+                      <a:pPr algn="ctr" fontAlgn="b">
+                        <a:buNone/>
+                      </a:pPr>
+                      <a:endParaRPr lang="en-ZA" sz="1600" b="0" i="0" u="none" strike="noStrike">
+                        <a:solidFill>
+                          <a:srgbClr val="000000"/>
+                        </a:solidFill>
+                        <a:effectLst/>
+                        <a:latin typeface="Verdana" panose="020B0604030504040204" pitchFamily="34" charset="0"/>
+                        <a:ea typeface="Verdana" panose="020B0604030504040204" pitchFamily="34" charset="0"/>
+                        <a:cs typeface="Verdana" panose="020B0604030504040204" pitchFamily="34" charset="0"/>
+                      </a:endParaRPr>
+                    </a:p>
+                  </a:txBody>
+                  <a:tcPr marL="3234" marR="3234" marT="3234" marB="0" anchor="b">
+                    <a:noFill/>
+                  </a:tcPr>
+                </a:tc>
+                <a:tc>
+                  <a:txBody>
+                    <a:bodyPr/>
+                    <a:lstStyle/>
+                    <a:p>
+                      <a:pPr algn="ctr" fontAlgn="b">
+                        <a:buNone/>
+                      </a:pPr>
+                      <a:endParaRPr lang="en-ZA" sz="1600" b="0" i="0" u="none" strike="noStrike" dirty="0">
+                        <a:solidFill>
+                          <a:srgbClr val="000000"/>
+                        </a:solidFill>
+                        <a:effectLst/>
+                        <a:latin typeface="Verdana" panose="020B0604030504040204" pitchFamily="34" charset="0"/>
+                        <a:ea typeface="Verdana" panose="020B0604030504040204" pitchFamily="34" charset="0"/>
+                        <a:cs typeface="Verdana" panose="020B0604030504040204" pitchFamily="34" charset="0"/>
+                      </a:endParaRPr>
+                    </a:p>
+                  </a:txBody>
+                  <a:tcPr marL="3234" marR="3234" marT="3234" marB="0" anchor="b">
+                    <a:noFill/>
+                  </a:tcPr>
+                </a:tc>
+                <a:tc>
+                  <a:txBody>
+                    <a:bodyPr/>
+                    <a:lstStyle/>
+                    <a:p>
+                      <a:pPr algn="ctr" fontAlgn="b">
+                        <a:buNone/>
+                      </a:pPr>
+                      <a:r>
+                        <a:rPr lang="en-ZA" sz="1600" u="none" strike="noStrike" dirty="0">
+                          <a:effectLst/>
+                          <a:latin typeface="Verdana" panose="020B0604030504040204" pitchFamily="34" charset="0"/>
+                          <a:ea typeface="Verdana" panose="020B0604030504040204" pitchFamily="34" charset="0"/>
+                          <a:cs typeface="Verdana" panose="020B0604030504040204" pitchFamily="34" charset="0"/>
+                        </a:rPr>
+                        <a:t>X</a:t>
+                      </a:r>
+                      <a:endParaRPr lang="en-ZA" sz="1600" b="0" i="0" u="none" strike="noStrike" dirty="0">
+                        <a:solidFill>
+                          <a:srgbClr val="000000"/>
+                        </a:solidFill>
+                        <a:effectLst/>
+                        <a:latin typeface="Verdana" panose="020B0604030504040204" pitchFamily="34" charset="0"/>
+                        <a:ea typeface="Verdana" panose="020B0604030504040204" pitchFamily="34" charset="0"/>
+                        <a:cs typeface="Verdana" panose="020B0604030504040204" pitchFamily="34" charset="0"/>
+                      </a:endParaRPr>
+                    </a:p>
+                  </a:txBody>
+                  <a:tcPr marL="3234" marR="3234" marT="3234" marB="0" anchor="b">
+                    <a:noFill/>
+                  </a:tcPr>
+                </a:tc>
+                <a:tc>
+                  <a:txBody>
+                    <a:bodyPr/>
+                    <a:lstStyle/>
+                    <a:p>
+                      <a:pPr algn="ctr" fontAlgn="b">
+                        <a:buNone/>
+                      </a:pPr>
+                      <a:r>
+                        <a:rPr lang="en-ZA" sz="1600" u="none" strike="noStrike" dirty="0">
+                          <a:effectLst/>
+                          <a:latin typeface="Verdana" panose="020B0604030504040204" pitchFamily="34" charset="0"/>
+                          <a:ea typeface="Verdana" panose="020B0604030504040204" pitchFamily="34" charset="0"/>
+                          <a:cs typeface="Verdana" panose="020B0604030504040204" pitchFamily="34" charset="0"/>
+                        </a:rPr>
+                        <a:t>X</a:t>
+                      </a:r>
+                      <a:endParaRPr lang="en-ZA" sz="1600" b="0" i="0" u="none" strike="noStrike" dirty="0">
+                        <a:solidFill>
+                          <a:srgbClr val="000000"/>
+                        </a:solidFill>
+                        <a:effectLst/>
+                        <a:latin typeface="Verdana" panose="020B0604030504040204" pitchFamily="34" charset="0"/>
+                        <a:ea typeface="Verdana" panose="020B0604030504040204" pitchFamily="34" charset="0"/>
+                        <a:cs typeface="Verdana" panose="020B0604030504040204" pitchFamily="34" charset="0"/>
+                      </a:endParaRPr>
+                    </a:p>
+                  </a:txBody>
+                  <a:tcPr marL="3234" marR="3234" marT="3234" marB="0" anchor="b">
+                    <a:noFill/>
+                  </a:tcPr>
+                </a:tc>
+                <a:tc>
+                  <a:txBody>
+                    <a:bodyPr/>
+                    <a:lstStyle/>
+                    <a:p>
+                      <a:pPr algn="ctr" fontAlgn="b">
+                        <a:buNone/>
+                      </a:pPr>
+                      <a:r>
+                        <a:rPr lang="en-ZA" sz="1600" u="none" strike="noStrike" dirty="0">
+                          <a:effectLst/>
+                          <a:latin typeface="Verdana" panose="020B0604030504040204" pitchFamily="34" charset="0"/>
+                          <a:ea typeface="Verdana" panose="020B0604030504040204" pitchFamily="34" charset="0"/>
+                          <a:cs typeface="Verdana" panose="020B0604030504040204" pitchFamily="34" charset="0"/>
+                        </a:rPr>
+                        <a:t>X</a:t>
+                      </a:r>
+                      <a:endParaRPr lang="en-ZA" sz="1600" b="0" i="0" u="none" strike="noStrike" dirty="0">
+                        <a:solidFill>
+                          <a:srgbClr val="000000"/>
+                        </a:solidFill>
+                        <a:effectLst/>
+                        <a:latin typeface="Verdana" panose="020B0604030504040204" pitchFamily="34" charset="0"/>
+                        <a:ea typeface="Verdana" panose="020B0604030504040204" pitchFamily="34" charset="0"/>
+                        <a:cs typeface="Verdana" panose="020B0604030504040204" pitchFamily="34" charset="0"/>
+                      </a:endParaRPr>
+                    </a:p>
+                  </a:txBody>
+                  <a:tcPr marL="3234" marR="3234" marT="3234" marB="0" anchor="b">
+                    <a:noFill/>
+                  </a:tcPr>
+                </a:tc>
+                <a:tc>
+                  <a:txBody>
+                    <a:bodyPr/>
+                    <a:lstStyle/>
+                    <a:p>
+                      <a:pPr algn="ctr" fontAlgn="b">
+                        <a:buNone/>
+                      </a:pPr>
+                      <a:endParaRPr lang="en-ZA" sz="1600" b="0" i="0" u="none" strike="noStrike" dirty="0">
+                        <a:solidFill>
+                          <a:srgbClr val="000000"/>
+                        </a:solidFill>
+                        <a:effectLst/>
+                        <a:latin typeface="Verdana" panose="020B0604030504040204" pitchFamily="34" charset="0"/>
+                        <a:ea typeface="Verdana" panose="020B0604030504040204" pitchFamily="34" charset="0"/>
+                        <a:cs typeface="Verdana" panose="020B0604030504040204" pitchFamily="34" charset="0"/>
+                      </a:endParaRPr>
+                    </a:p>
+                  </a:txBody>
+                  <a:tcPr marL="3234" marR="3234" marT="3234" marB="0" anchor="b">
+                    <a:noFill/>
+                  </a:tcPr>
+                </a:tc>
+                <a:extLst>
+                  <a:ext uri="{0D108BD9-81ED-4DB2-BD59-A6C34878D82A}">
+                    <a16:rowId xmlns:a16="http://schemas.microsoft.com/office/drawing/2014/main" val="2337716733"/>
+                  </a:ext>
+                </a:extLst>
+              </a:tr>
+              <a:tr h="398958">
+                <a:tc>
+                  <a:txBody>
+                    <a:bodyPr/>
+                    <a:lstStyle/>
+                    <a:p>
+                      <a:pPr algn="l" fontAlgn="b">
+                        <a:buNone/>
+                      </a:pPr>
+                      <a:r>
+                        <a:rPr lang="en-ZA" sz="1600" u="none" strike="noStrike" dirty="0">
+                          <a:effectLst/>
+                          <a:latin typeface="Verdana" panose="020B0604030504040204" pitchFamily="34" charset="0"/>
+                          <a:ea typeface="Verdana" panose="020B0604030504040204" pitchFamily="34" charset="0"/>
+                          <a:cs typeface="Verdana" panose="020B0604030504040204" pitchFamily="34" charset="0"/>
+                        </a:rPr>
+                        <a:t>Testing: facility-based (targeted)</a:t>
+                      </a:r>
+                      <a:endParaRPr lang="en-ZA" sz="1600" b="0" i="0" u="none" strike="noStrike" dirty="0">
+                        <a:solidFill>
+                          <a:srgbClr val="000000"/>
+                        </a:solidFill>
+                        <a:effectLst/>
+                        <a:latin typeface="Verdana" panose="020B0604030504040204" pitchFamily="34" charset="0"/>
+                        <a:ea typeface="Verdana" panose="020B0604030504040204" pitchFamily="34" charset="0"/>
+                        <a:cs typeface="Verdana" panose="020B0604030504040204" pitchFamily="34" charset="0"/>
+                      </a:endParaRPr>
+                    </a:p>
+                  </a:txBody>
+                  <a:tcPr marL="3234" marR="3234" marT="3234" marB="0" anchor="b">
+                    <a:noFill/>
+                  </a:tcPr>
+                </a:tc>
+                <a:tc>
+                  <a:txBody>
+                    <a:bodyPr/>
+                    <a:lstStyle/>
+                    <a:p>
+                      <a:pPr algn="ctr" fontAlgn="b">
+                        <a:buNone/>
+                      </a:pPr>
+                      <a:endParaRPr lang="en-ZA" sz="1600" b="0" i="0" u="none" strike="noStrike" dirty="0">
+                        <a:solidFill>
+                          <a:srgbClr val="000000"/>
+                        </a:solidFill>
+                        <a:effectLst/>
+                        <a:latin typeface="Verdana" panose="020B0604030504040204" pitchFamily="34" charset="0"/>
+                        <a:ea typeface="Verdana" panose="020B0604030504040204" pitchFamily="34" charset="0"/>
+                        <a:cs typeface="Verdana" panose="020B0604030504040204" pitchFamily="34" charset="0"/>
+                      </a:endParaRPr>
+                    </a:p>
+                  </a:txBody>
+                  <a:tcPr marL="3234" marR="3234" marT="3234" marB="0" anchor="b">
+                    <a:noFill/>
+                  </a:tcPr>
+                </a:tc>
+                <a:tc>
+                  <a:txBody>
+                    <a:bodyPr/>
+                    <a:lstStyle/>
+                    <a:p>
+                      <a:pPr algn="ctr" fontAlgn="b">
+                        <a:buNone/>
+                      </a:pPr>
+                      <a:endParaRPr lang="en-ZA" sz="1600" b="0" i="0" u="none" strike="noStrike">
+                        <a:solidFill>
+                          <a:srgbClr val="000000"/>
+                        </a:solidFill>
+                        <a:effectLst/>
+                        <a:latin typeface="Verdana" panose="020B0604030504040204" pitchFamily="34" charset="0"/>
+                        <a:ea typeface="Verdana" panose="020B0604030504040204" pitchFamily="34" charset="0"/>
+                        <a:cs typeface="Verdana" panose="020B0604030504040204" pitchFamily="34" charset="0"/>
+                      </a:endParaRPr>
+                    </a:p>
+                  </a:txBody>
+                  <a:tcPr marL="3234" marR="3234" marT="3234" marB="0" anchor="b">
+                    <a:noFill/>
+                  </a:tcPr>
+                </a:tc>
+                <a:tc>
+                  <a:txBody>
+                    <a:bodyPr/>
+                    <a:lstStyle/>
+                    <a:p>
+                      <a:pPr algn="ctr" fontAlgn="b">
+                        <a:buNone/>
+                      </a:pPr>
+                      <a:r>
+                        <a:rPr lang="en-ZA" sz="1600" u="none" strike="noStrike" dirty="0">
+                          <a:effectLst/>
+                          <a:latin typeface="Verdana" panose="020B0604030504040204" pitchFamily="34" charset="0"/>
+                          <a:ea typeface="Verdana" panose="020B0604030504040204" pitchFamily="34" charset="0"/>
+                          <a:cs typeface="Verdana" panose="020B0604030504040204" pitchFamily="34" charset="0"/>
+                        </a:rPr>
+                        <a:t>X</a:t>
+                      </a:r>
+                      <a:endParaRPr lang="en-ZA" sz="1600" b="0" i="0" u="none" strike="noStrike" dirty="0">
+                        <a:solidFill>
+                          <a:srgbClr val="000000"/>
+                        </a:solidFill>
+                        <a:effectLst/>
+                        <a:latin typeface="Verdana" panose="020B0604030504040204" pitchFamily="34" charset="0"/>
+                        <a:ea typeface="Verdana" panose="020B0604030504040204" pitchFamily="34" charset="0"/>
+                        <a:cs typeface="Verdana" panose="020B0604030504040204" pitchFamily="34" charset="0"/>
+                      </a:endParaRPr>
+                    </a:p>
+                  </a:txBody>
+                  <a:tcPr marL="3234" marR="3234" marT="3234" marB="0" anchor="b">
+                    <a:noFill/>
+                  </a:tcPr>
+                </a:tc>
+                <a:tc>
+                  <a:txBody>
+                    <a:bodyPr/>
+                    <a:lstStyle/>
+                    <a:p>
+                      <a:pPr algn="ctr" fontAlgn="b">
+                        <a:buNone/>
+                      </a:pPr>
+                      <a:r>
+                        <a:rPr lang="en-ZA" sz="1600" u="none" strike="noStrike" dirty="0">
+                          <a:effectLst/>
+                          <a:latin typeface="Verdana" panose="020B0604030504040204" pitchFamily="34" charset="0"/>
+                          <a:ea typeface="Verdana" panose="020B0604030504040204" pitchFamily="34" charset="0"/>
+                          <a:cs typeface="Verdana" panose="020B0604030504040204" pitchFamily="34" charset="0"/>
+                        </a:rPr>
+                        <a:t>X</a:t>
+                      </a:r>
+                      <a:endParaRPr lang="en-ZA" sz="1600" b="0" i="0" u="none" strike="noStrike" dirty="0">
+                        <a:solidFill>
+                          <a:srgbClr val="000000"/>
+                        </a:solidFill>
+                        <a:effectLst/>
+                        <a:latin typeface="Verdana" panose="020B0604030504040204" pitchFamily="34" charset="0"/>
+                        <a:ea typeface="Verdana" panose="020B0604030504040204" pitchFamily="34" charset="0"/>
+                        <a:cs typeface="Verdana" panose="020B0604030504040204" pitchFamily="34" charset="0"/>
+                      </a:endParaRPr>
+                    </a:p>
+                  </a:txBody>
+                  <a:tcPr marL="3234" marR="3234" marT="3234" marB="0" anchor="b">
+                    <a:noFill/>
+                  </a:tcPr>
+                </a:tc>
+                <a:tc>
+                  <a:txBody>
+                    <a:bodyPr/>
+                    <a:lstStyle/>
+                    <a:p>
+                      <a:pPr algn="ctr" fontAlgn="b">
+                        <a:buNone/>
+                      </a:pPr>
+                      <a:r>
+                        <a:rPr lang="en-ZA" sz="1600" u="none" strike="noStrike" dirty="0">
+                          <a:effectLst/>
+                          <a:latin typeface="Verdana" panose="020B0604030504040204" pitchFamily="34" charset="0"/>
+                          <a:ea typeface="Verdana" panose="020B0604030504040204" pitchFamily="34" charset="0"/>
+                          <a:cs typeface="Verdana" panose="020B0604030504040204" pitchFamily="34" charset="0"/>
+                        </a:rPr>
+                        <a:t>X</a:t>
+                      </a:r>
+                      <a:endParaRPr lang="en-ZA" sz="1600" b="0" i="0" u="none" strike="noStrike" dirty="0">
+                        <a:solidFill>
+                          <a:srgbClr val="000000"/>
+                        </a:solidFill>
+                        <a:effectLst/>
+                        <a:latin typeface="Verdana" panose="020B0604030504040204" pitchFamily="34" charset="0"/>
+                        <a:ea typeface="Verdana" panose="020B0604030504040204" pitchFamily="34" charset="0"/>
+                        <a:cs typeface="Verdana" panose="020B0604030504040204" pitchFamily="34" charset="0"/>
+                      </a:endParaRPr>
+                    </a:p>
+                  </a:txBody>
+                  <a:tcPr marL="3234" marR="3234" marT="3234" marB="0" anchor="b">
+                    <a:noFill/>
+                  </a:tcPr>
+                </a:tc>
+                <a:tc>
+                  <a:txBody>
+                    <a:bodyPr/>
+                    <a:lstStyle/>
+                    <a:p>
+                      <a:pPr algn="ctr" fontAlgn="b">
+                        <a:buNone/>
+                      </a:pPr>
+                      <a:endParaRPr lang="en-ZA" sz="1600" b="0" i="0" u="none" strike="noStrike" dirty="0">
+                        <a:solidFill>
+                          <a:srgbClr val="000000"/>
+                        </a:solidFill>
+                        <a:effectLst/>
+                        <a:latin typeface="Verdana" panose="020B0604030504040204" pitchFamily="34" charset="0"/>
+                        <a:ea typeface="Verdana" panose="020B0604030504040204" pitchFamily="34" charset="0"/>
+                        <a:cs typeface="Verdana" panose="020B0604030504040204" pitchFamily="34" charset="0"/>
+                      </a:endParaRPr>
+                    </a:p>
+                  </a:txBody>
+                  <a:tcPr marL="3234" marR="3234" marT="3234" marB="0" anchor="b">
+                    <a:noFill/>
+                  </a:tcPr>
+                </a:tc>
+                <a:extLst>
+                  <a:ext uri="{0D108BD9-81ED-4DB2-BD59-A6C34878D82A}">
+                    <a16:rowId xmlns:a16="http://schemas.microsoft.com/office/drawing/2014/main" val="330474901"/>
+                  </a:ext>
+                </a:extLst>
+              </a:tr>
+              <a:tr h="398958">
+                <a:tc>
+                  <a:txBody>
+                    <a:bodyPr/>
+                    <a:lstStyle/>
+                    <a:p>
+                      <a:pPr algn="l" fontAlgn="b">
+                        <a:buNone/>
+                      </a:pPr>
+                      <a:r>
+                        <a:rPr lang="en-ZA" sz="1600" u="none" strike="noStrike" dirty="0">
+                          <a:effectLst/>
+                          <a:latin typeface="Verdana" panose="020B0604030504040204" pitchFamily="34" charset="0"/>
+                          <a:ea typeface="Verdana" panose="020B0604030504040204" pitchFamily="34" charset="0"/>
+                          <a:cs typeface="Verdana" panose="020B0604030504040204" pitchFamily="34" charset="0"/>
+                        </a:rPr>
+                        <a:t>Testing: Network/Index</a:t>
+                      </a:r>
+                      <a:endParaRPr lang="en-ZA" sz="1600" b="0" i="0" u="none" strike="noStrike" dirty="0">
+                        <a:solidFill>
+                          <a:srgbClr val="000000"/>
+                        </a:solidFill>
+                        <a:effectLst/>
+                        <a:latin typeface="Verdana" panose="020B0604030504040204" pitchFamily="34" charset="0"/>
+                        <a:ea typeface="Verdana" panose="020B0604030504040204" pitchFamily="34" charset="0"/>
+                        <a:cs typeface="Verdana" panose="020B0604030504040204" pitchFamily="34" charset="0"/>
+                      </a:endParaRPr>
+                    </a:p>
+                  </a:txBody>
+                  <a:tcPr marL="3234" marR="3234" marT="3234" marB="0" anchor="b">
+                    <a:noFill/>
+                  </a:tcPr>
+                </a:tc>
+                <a:tc>
+                  <a:txBody>
+                    <a:bodyPr/>
+                    <a:lstStyle/>
+                    <a:p>
+                      <a:pPr algn="ctr" fontAlgn="b">
+                        <a:buNone/>
+                      </a:pPr>
+                      <a:endParaRPr lang="en-ZA" sz="1600" b="0" i="0" u="none" strike="noStrike" dirty="0">
+                        <a:solidFill>
+                          <a:srgbClr val="000000"/>
+                        </a:solidFill>
+                        <a:effectLst/>
+                        <a:latin typeface="Verdana" panose="020B0604030504040204" pitchFamily="34" charset="0"/>
+                        <a:ea typeface="Verdana" panose="020B0604030504040204" pitchFamily="34" charset="0"/>
+                        <a:cs typeface="Verdana" panose="020B0604030504040204" pitchFamily="34" charset="0"/>
+                      </a:endParaRPr>
+                    </a:p>
+                  </a:txBody>
+                  <a:tcPr marL="3234" marR="3234" marT="3234" marB="0" anchor="b">
+                    <a:noFill/>
+                  </a:tcPr>
+                </a:tc>
+                <a:tc>
+                  <a:txBody>
+                    <a:bodyPr/>
+                    <a:lstStyle/>
+                    <a:p>
+                      <a:pPr algn="ctr" fontAlgn="b">
+                        <a:buNone/>
+                      </a:pPr>
+                      <a:endParaRPr lang="en-ZA" sz="1600" b="0" i="0" u="none" strike="noStrike" dirty="0">
+                        <a:solidFill>
+                          <a:srgbClr val="000000"/>
+                        </a:solidFill>
+                        <a:effectLst/>
+                        <a:latin typeface="Verdana" panose="020B0604030504040204" pitchFamily="34" charset="0"/>
+                        <a:ea typeface="Verdana" panose="020B0604030504040204" pitchFamily="34" charset="0"/>
+                        <a:cs typeface="Verdana" panose="020B0604030504040204" pitchFamily="34" charset="0"/>
+                      </a:endParaRPr>
+                    </a:p>
+                  </a:txBody>
+                  <a:tcPr marL="3234" marR="3234" marT="3234" marB="0" anchor="b">
+                    <a:noFill/>
+                  </a:tcPr>
+                </a:tc>
+                <a:tc>
+                  <a:txBody>
+                    <a:bodyPr/>
+                    <a:lstStyle/>
+                    <a:p>
+                      <a:pPr algn="ctr" fontAlgn="b">
+                        <a:buNone/>
+                      </a:pPr>
+                      <a:r>
+                        <a:rPr lang="en-ZA" sz="1600" u="none" strike="noStrike">
+                          <a:effectLst/>
+                          <a:latin typeface="Verdana" panose="020B0604030504040204" pitchFamily="34" charset="0"/>
+                          <a:ea typeface="Verdana" panose="020B0604030504040204" pitchFamily="34" charset="0"/>
+                          <a:cs typeface="Verdana" panose="020B0604030504040204" pitchFamily="34" charset="0"/>
+                        </a:rPr>
+                        <a:t>X</a:t>
+                      </a:r>
+                      <a:endParaRPr lang="en-ZA" sz="1600" b="0" i="0" u="none" strike="noStrike">
+                        <a:solidFill>
+                          <a:srgbClr val="000000"/>
+                        </a:solidFill>
+                        <a:effectLst/>
+                        <a:latin typeface="Verdana" panose="020B0604030504040204" pitchFamily="34" charset="0"/>
+                        <a:ea typeface="Verdana" panose="020B0604030504040204" pitchFamily="34" charset="0"/>
+                        <a:cs typeface="Verdana" panose="020B0604030504040204" pitchFamily="34" charset="0"/>
+                      </a:endParaRPr>
+                    </a:p>
+                  </a:txBody>
+                  <a:tcPr marL="3234" marR="3234" marT="3234" marB="0" anchor="b">
+                    <a:noFill/>
+                  </a:tcPr>
+                </a:tc>
+                <a:tc>
+                  <a:txBody>
+                    <a:bodyPr/>
+                    <a:lstStyle/>
+                    <a:p>
+                      <a:pPr algn="ctr" fontAlgn="b">
+                        <a:buNone/>
+                      </a:pPr>
+                      <a:r>
+                        <a:rPr lang="en-ZA" sz="1600" u="none" strike="noStrike">
+                          <a:effectLst/>
+                          <a:latin typeface="Verdana" panose="020B0604030504040204" pitchFamily="34" charset="0"/>
+                          <a:ea typeface="Verdana" panose="020B0604030504040204" pitchFamily="34" charset="0"/>
+                          <a:cs typeface="Verdana" panose="020B0604030504040204" pitchFamily="34" charset="0"/>
+                        </a:rPr>
+                        <a:t>X</a:t>
+                      </a:r>
+                      <a:endParaRPr lang="en-ZA" sz="1600" b="0" i="0" u="none" strike="noStrike">
+                        <a:solidFill>
+                          <a:srgbClr val="000000"/>
+                        </a:solidFill>
+                        <a:effectLst/>
+                        <a:latin typeface="Verdana" panose="020B0604030504040204" pitchFamily="34" charset="0"/>
+                        <a:ea typeface="Verdana" panose="020B0604030504040204" pitchFamily="34" charset="0"/>
+                        <a:cs typeface="Verdana" panose="020B0604030504040204" pitchFamily="34" charset="0"/>
+                      </a:endParaRPr>
+                    </a:p>
+                  </a:txBody>
+                  <a:tcPr marL="3234" marR="3234" marT="3234" marB="0" anchor="b">
+                    <a:noFill/>
+                  </a:tcPr>
+                </a:tc>
+                <a:tc>
+                  <a:txBody>
+                    <a:bodyPr/>
+                    <a:lstStyle/>
+                    <a:p>
+                      <a:pPr algn="ctr" fontAlgn="b">
+                        <a:buNone/>
+                      </a:pPr>
+                      <a:r>
+                        <a:rPr lang="en-ZA" sz="1600" u="none" strike="noStrike">
+                          <a:effectLst/>
+                          <a:latin typeface="Verdana" panose="020B0604030504040204" pitchFamily="34" charset="0"/>
+                          <a:ea typeface="Verdana" panose="020B0604030504040204" pitchFamily="34" charset="0"/>
+                          <a:cs typeface="Verdana" panose="020B0604030504040204" pitchFamily="34" charset="0"/>
+                        </a:rPr>
+                        <a:t>X</a:t>
+                      </a:r>
+                      <a:endParaRPr lang="en-ZA" sz="1600" b="0" i="0" u="none" strike="noStrike">
+                        <a:solidFill>
+                          <a:srgbClr val="000000"/>
+                        </a:solidFill>
+                        <a:effectLst/>
+                        <a:latin typeface="Verdana" panose="020B0604030504040204" pitchFamily="34" charset="0"/>
+                        <a:ea typeface="Verdana" panose="020B0604030504040204" pitchFamily="34" charset="0"/>
+                        <a:cs typeface="Verdana" panose="020B0604030504040204" pitchFamily="34" charset="0"/>
+                      </a:endParaRPr>
+                    </a:p>
+                  </a:txBody>
+                  <a:tcPr marL="3234" marR="3234" marT="3234" marB="0" anchor="b">
+                    <a:noFill/>
+                  </a:tcPr>
+                </a:tc>
+                <a:tc>
+                  <a:txBody>
+                    <a:bodyPr/>
+                    <a:lstStyle/>
+                    <a:p>
+                      <a:pPr algn="ctr" fontAlgn="b">
+                        <a:buNone/>
+                      </a:pPr>
+                      <a:endParaRPr lang="en-ZA" sz="1600" b="0" i="0" u="none" strike="noStrike" dirty="0">
+                        <a:solidFill>
+                          <a:srgbClr val="000000"/>
+                        </a:solidFill>
+                        <a:effectLst/>
+                        <a:latin typeface="Verdana" panose="020B0604030504040204" pitchFamily="34" charset="0"/>
+                        <a:ea typeface="Verdana" panose="020B0604030504040204" pitchFamily="34" charset="0"/>
+                        <a:cs typeface="Verdana" panose="020B0604030504040204" pitchFamily="34" charset="0"/>
+                      </a:endParaRPr>
+                    </a:p>
+                  </a:txBody>
+                  <a:tcPr marL="3234" marR="3234" marT="3234" marB="0" anchor="b">
+                    <a:noFill/>
+                  </a:tcPr>
+                </a:tc>
+                <a:extLst>
+                  <a:ext uri="{0D108BD9-81ED-4DB2-BD59-A6C34878D82A}">
+                    <a16:rowId xmlns:a16="http://schemas.microsoft.com/office/drawing/2014/main" val="2560179810"/>
+                  </a:ext>
+                </a:extLst>
+              </a:tr>
+              <a:tr h="398958">
+                <a:tc>
+                  <a:txBody>
+                    <a:bodyPr/>
+                    <a:lstStyle/>
+                    <a:p>
+                      <a:pPr algn="l" fontAlgn="b">
+                        <a:buNone/>
+                      </a:pPr>
+                      <a:r>
+                        <a:rPr lang="en-ZA" sz="1600" u="none" strike="noStrike" dirty="0">
+                          <a:effectLst/>
+                          <a:latin typeface="Verdana" panose="020B0604030504040204" pitchFamily="34" charset="0"/>
+                          <a:ea typeface="Verdana" panose="020B0604030504040204" pitchFamily="34" charset="0"/>
+                          <a:cs typeface="Verdana" panose="020B0604030504040204" pitchFamily="34" charset="0"/>
+                        </a:rPr>
+                        <a:t>Testing: community-based</a:t>
+                      </a:r>
+                      <a:endParaRPr lang="en-ZA" sz="1600" b="0" i="0" u="none" strike="noStrike" dirty="0">
+                        <a:solidFill>
+                          <a:srgbClr val="000000"/>
+                        </a:solidFill>
+                        <a:effectLst/>
+                        <a:latin typeface="Verdana" panose="020B0604030504040204" pitchFamily="34" charset="0"/>
+                        <a:ea typeface="Verdana" panose="020B0604030504040204" pitchFamily="34" charset="0"/>
+                        <a:cs typeface="Verdana" panose="020B0604030504040204" pitchFamily="34" charset="0"/>
+                      </a:endParaRPr>
+                    </a:p>
+                  </a:txBody>
+                  <a:tcPr marL="3234" marR="3234" marT="3234" marB="0" anchor="b">
+                    <a:noFill/>
+                  </a:tcPr>
+                </a:tc>
+                <a:tc>
+                  <a:txBody>
+                    <a:bodyPr/>
+                    <a:lstStyle/>
+                    <a:p>
+                      <a:pPr algn="ctr" fontAlgn="b">
+                        <a:buNone/>
+                      </a:pPr>
+                      <a:endParaRPr lang="en-ZA" sz="1600" b="0" i="0" u="none" strike="noStrike" dirty="0">
+                        <a:solidFill>
+                          <a:srgbClr val="000000"/>
+                        </a:solidFill>
+                        <a:effectLst/>
+                        <a:latin typeface="Verdana" panose="020B0604030504040204" pitchFamily="34" charset="0"/>
+                        <a:ea typeface="Verdana" panose="020B0604030504040204" pitchFamily="34" charset="0"/>
+                        <a:cs typeface="Verdana" panose="020B0604030504040204" pitchFamily="34" charset="0"/>
+                      </a:endParaRPr>
+                    </a:p>
+                  </a:txBody>
+                  <a:tcPr marL="3234" marR="3234" marT="3234" marB="0" anchor="b">
+                    <a:noFill/>
+                  </a:tcPr>
+                </a:tc>
+                <a:tc>
+                  <a:txBody>
+                    <a:bodyPr/>
+                    <a:lstStyle/>
+                    <a:p>
+                      <a:pPr algn="ctr" fontAlgn="b">
+                        <a:buNone/>
+                      </a:pPr>
+                      <a:endParaRPr lang="en-ZA" sz="1600" b="0" i="0" u="none" strike="noStrike" dirty="0">
+                        <a:solidFill>
+                          <a:srgbClr val="000000"/>
+                        </a:solidFill>
+                        <a:effectLst/>
+                        <a:latin typeface="Verdana" panose="020B0604030504040204" pitchFamily="34" charset="0"/>
+                        <a:ea typeface="Verdana" panose="020B0604030504040204" pitchFamily="34" charset="0"/>
+                        <a:cs typeface="Verdana" panose="020B0604030504040204" pitchFamily="34" charset="0"/>
+                      </a:endParaRPr>
+                    </a:p>
+                  </a:txBody>
+                  <a:tcPr marL="3234" marR="3234" marT="3234" marB="0" anchor="b">
+                    <a:noFill/>
+                  </a:tcPr>
+                </a:tc>
+                <a:tc>
+                  <a:txBody>
+                    <a:bodyPr/>
+                    <a:lstStyle/>
+                    <a:p>
+                      <a:pPr algn="ctr" fontAlgn="b">
+                        <a:buNone/>
+                      </a:pPr>
+                      <a:r>
+                        <a:rPr lang="en-ZA" sz="1600" u="none" strike="noStrike" dirty="0">
+                          <a:effectLst/>
+                          <a:latin typeface="Verdana" panose="020B0604030504040204" pitchFamily="34" charset="0"/>
+                          <a:ea typeface="Verdana" panose="020B0604030504040204" pitchFamily="34" charset="0"/>
+                          <a:cs typeface="Verdana" panose="020B0604030504040204" pitchFamily="34" charset="0"/>
+                        </a:rPr>
+                        <a:t>X</a:t>
+                      </a:r>
+                      <a:endParaRPr lang="en-ZA" sz="1600" b="0" i="0" u="none" strike="noStrike" dirty="0">
+                        <a:solidFill>
+                          <a:srgbClr val="000000"/>
+                        </a:solidFill>
+                        <a:effectLst/>
+                        <a:latin typeface="Verdana" panose="020B0604030504040204" pitchFamily="34" charset="0"/>
+                        <a:ea typeface="Verdana" panose="020B0604030504040204" pitchFamily="34" charset="0"/>
+                        <a:cs typeface="Verdana" panose="020B0604030504040204" pitchFamily="34" charset="0"/>
+                      </a:endParaRPr>
+                    </a:p>
+                  </a:txBody>
+                  <a:tcPr marL="3234" marR="3234" marT="3234" marB="0" anchor="b">
+                    <a:noFill/>
+                  </a:tcPr>
+                </a:tc>
+                <a:tc>
+                  <a:txBody>
+                    <a:bodyPr/>
+                    <a:lstStyle/>
+                    <a:p>
+                      <a:pPr algn="ctr" fontAlgn="b">
+                        <a:buNone/>
+                      </a:pPr>
+                      <a:r>
+                        <a:rPr lang="en-ZA" sz="1600" u="none" strike="noStrike">
+                          <a:effectLst/>
+                          <a:latin typeface="Verdana" panose="020B0604030504040204" pitchFamily="34" charset="0"/>
+                          <a:ea typeface="Verdana" panose="020B0604030504040204" pitchFamily="34" charset="0"/>
+                          <a:cs typeface="Verdana" panose="020B0604030504040204" pitchFamily="34" charset="0"/>
+                        </a:rPr>
+                        <a:t>X</a:t>
+                      </a:r>
+                      <a:endParaRPr lang="en-ZA" sz="1600" b="0" i="0" u="none" strike="noStrike">
+                        <a:solidFill>
+                          <a:srgbClr val="000000"/>
+                        </a:solidFill>
+                        <a:effectLst/>
+                        <a:latin typeface="Verdana" panose="020B0604030504040204" pitchFamily="34" charset="0"/>
+                        <a:ea typeface="Verdana" panose="020B0604030504040204" pitchFamily="34" charset="0"/>
+                        <a:cs typeface="Verdana" panose="020B0604030504040204" pitchFamily="34" charset="0"/>
+                      </a:endParaRPr>
+                    </a:p>
+                  </a:txBody>
+                  <a:tcPr marL="3234" marR="3234" marT="3234" marB="0" anchor="b">
+                    <a:noFill/>
+                  </a:tcPr>
+                </a:tc>
+                <a:tc>
+                  <a:txBody>
+                    <a:bodyPr/>
+                    <a:lstStyle/>
+                    <a:p>
+                      <a:pPr algn="ctr" fontAlgn="b">
+                        <a:buNone/>
+                      </a:pPr>
+                      <a:r>
+                        <a:rPr lang="en-ZA" sz="1600" u="none" strike="noStrike" dirty="0">
+                          <a:effectLst/>
+                          <a:latin typeface="Verdana" panose="020B0604030504040204" pitchFamily="34" charset="0"/>
+                          <a:ea typeface="Verdana" panose="020B0604030504040204" pitchFamily="34" charset="0"/>
+                          <a:cs typeface="Verdana" panose="020B0604030504040204" pitchFamily="34" charset="0"/>
+                        </a:rPr>
+                        <a:t>X</a:t>
+                      </a:r>
+                      <a:endParaRPr lang="en-ZA" sz="1600" b="0" i="0" u="none" strike="noStrike" dirty="0">
+                        <a:solidFill>
+                          <a:srgbClr val="000000"/>
+                        </a:solidFill>
+                        <a:effectLst/>
+                        <a:latin typeface="Verdana" panose="020B0604030504040204" pitchFamily="34" charset="0"/>
+                        <a:ea typeface="Verdana" panose="020B0604030504040204" pitchFamily="34" charset="0"/>
+                        <a:cs typeface="Verdana" panose="020B0604030504040204" pitchFamily="34" charset="0"/>
+                      </a:endParaRPr>
+                    </a:p>
+                  </a:txBody>
+                  <a:tcPr marL="3234" marR="3234" marT="3234" marB="0" anchor="b">
+                    <a:noFill/>
+                  </a:tcPr>
+                </a:tc>
+                <a:tc>
+                  <a:txBody>
+                    <a:bodyPr/>
+                    <a:lstStyle/>
+                    <a:p>
+                      <a:pPr algn="ctr" fontAlgn="b">
+                        <a:buNone/>
+                      </a:pPr>
+                      <a:endParaRPr lang="en-ZA" sz="1600" b="0" i="0" u="none" strike="noStrike" dirty="0">
+                        <a:solidFill>
+                          <a:srgbClr val="000000"/>
+                        </a:solidFill>
+                        <a:effectLst/>
+                        <a:latin typeface="Verdana" panose="020B0604030504040204" pitchFamily="34" charset="0"/>
+                        <a:ea typeface="Verdana" panose="020B0604030504040204" pitchFamily="34" charset="0"/>
+                        <a:cs typeface="Verdana" panose="020B0604030504040204" pitchFamily="34" charset="0"/>
+                      </a:endParaRPr>
+                    </a:p>
+                  </a:txBody>
+                  <a:tcPr marL="3234" marR="3234" marT="3234" marB="0" anchor="b">
+                    <a:noFill/>
+                  </a:tcPr>
+                </a:tc>
+                <a:extLst>
+                  <a:ext uri="{0D108BD9-81ED-4DB2-BD59-A6C34878D82A}">
+                    <a16:rowId xmlns:a16="http://schemas.microsoft.com/office/drawing/2014/main" val="393452433"/>
+                  </a:ext>
+                </a:extLst>
+              </a:tr>
+              <a:tr h="398958">
+                <a:tc>
+                  <a:txBody>
+                    <a:bodyPr/>
+                    <a:lstStyle/>
+                    <a:p>
+                      <a:pPr algn="l" fontAlgn="b">
+                        <a:buNone/>
+                      </a:pPr>
+                      <a:r>
+                        <a:rPr lang="en-ZA" sz="1600" u="none" strike="noStrike" dirty="0">
+                          <a:effectLst/>
+                          <a:latin typeface="Verdana" panose="020B0604030504040204" pitchFamily="34" charset="0"/>
+                          <a:ea typeface="Verdana" panose="020B0604030504040204" pitchFamily="34" charset="0"/>
+                          <a:cs typeface="Verdana" panose="020B0604030504040204" pitchFamily="34" charset="0"/>
+                        </a:rPr>
+                        <a:t>Testing: for key populations &amp; STI services</a:t>
+                      </a:r>
+                      <a:endParaRPr lang="en-ZA" sz="1600" b="0" i="0" u="none" strike="noStrike" dirty="0">
+                        <a:solidFill>
+                          <a:srgbClr val="000000"/>
+                        </a:solidFill>
+                        <a:effectLst/>
+                        <a:latin typeface="Verdana" panose="020B0604030504040204" pitchFamily="34" charset="0"/>
+                        <a:ea typeface="Verdana" panose="020B0604030504040204" pitchFamily="34" charset="0"/>
+                        <a:cs typeface="Verdana" panose="020B0604030504040204" pitchFamily="34" charset="0"/>
+                      </a:endParaRPr>
+                    </a:p>
+                  </a:txBody>
+                  <a:tcPr marL="3234" marR="3234" marT="3234" marB="0" anchor="b">
+                    <a:noFill/>
+                  </a:tcPr>
+                </a:tc>
+                <a:tc>
+                  <a:txBody>
+                    <a:bodyPr/>
+                    <a:lstStyle/>
+                    <a:p>
+                      <a:pPr algn="ctr" fontAlgn="b">
+                        <a:buNone/>
+                      </a:pPr>
+                      <a:endParaRPr lang="en-ZA" sz="1600" b="0" i="0" u="none" strike="noStrike">
+                        <a:solidFill>
+                          <a:srgbClr val="000000"/>
+                        </a:solidFill>
+                        <a:effectLst/>
+                        <a:latin typeface="Verdana" panose="020B0604030504040204" pitchFamily="34" charset="0"/>
+                        <a:ea typeface="Verdana" panose="020B0604030504040204" pitchFamily="34" charset="0"/>
+                        <a:cs typeface="Verdana" panose="020B0604030504040204" pitchFamily="34" charset="0"/>
+                      </a:endParaRPr>
+                    </a:p>
+                  </a:txBody>
+                  <a:tcPr marL="3234" marR="3234" marT="3234" marB="0" anchor="b">
+                    <a:noFill/>
+                  </a:tcPr>
+                </a:tc>
+                <a:tc>
+                  <a:txBody>
+                    <a:bodyPr/>
+                    <a:lstStyle/>
+                    <a:p>
+                      <a:pPr algn="ctr" fontAlgn="b">
+                        <a:buNone/>
+                      </a:pPr>
+                      <a:endParaRPr lang="en-ZA" sz="1600" b="0" i="0" u="none" strike="noStrike">
+                        <a:solidFill>
+                          <a:srgbClr val="000000"/>
+                        </a:solidFill>
+                        <a:effectLst/>
+                        <a:latin typeface="Verdana" panose="020B0604030504040204" pitchFamily="34" charset="0"/>
+                        <a:ea typeface="Verdana" panose="020B0604030504040204" pitchFamily="34" charset="0"/>
+                        <a:cs typeface="Verdana" panose="020B0604030504040204" pitchFamily="34" charset="0"/>
+                      </a:endParaRPr>
+                    </a:p>
+                  </a:txBody>
+                  <a:tcPr marL="3234" marR="3234" marT="3234" marB="0" anchor="b">
+                    <a:noFill/>
+                  </a:tcPr>
+                </a:tc>
+                <a:tc>
+                  <a:txBody>
+                    <a:bodyPr/>
+                    <a:lstStyle/>
+                    <a:p>
+                      <a:pPr algn="ctr" fontAlgn="b">
+                        <a:buNone/>
+                      </a:pPr>
+                      <a:r>
+                        <a:rPr lang="en-ZA" sz="1600" u="none" strike="noStrike" dirty="0">
+                          <a:effectLst/>
+                          <a:latin typeface="Verdana" panose="020B0604030504040204" pitchFamily="34" charset="0"/>
+                          <a:ea typeface="Verdana" panose="020B0604030504040204" pitchFamily="34" charset="0"/>
+                          <a:cs typeface="Verdana" panose="020B0604030504040204" pitchFamily="34" charset="0"/>
+                        </a:rPr>
+                        <a:t>X</a:t>
+                      </a:r>
+                      <a:endParaRPr lang="en-ZA" sz="1600" b="0" i="0" u="none" strike="noStrike" dirty="0">
+                        <a:solidFill>
+                          <a:srgbClr val="000000"/>
+                        </a:solidFill>
+                        <a:effectLst/>
+                        <a:latin typeface="Verdana" panose="020B0604030504040204" pitchFamily="34" charset="0"/>
+                        <a:ea typeface="Verdana" panose="020B0604030504040204" pitchFamily="34" charset="0"/>
+                        <a:cs typeface="Verdana" panose="020B0604030504040204" pitchFamily="34" charset="0"/>
+                      </a:endParaRPr>
+                    </a:p>
+                  </a:txBody>
+                  <a:tcPr marL="3234" marR="3234" marT="3234" marB="0" anchor="b">
+                    <a:noFill/>
+                  </a:tcPr>
+                </a:tc>
+                <a:tc>
+                  <a:txBody>
+                    <a:bodyPr/>
+                    <a:lstStyle/>
+                    <a:p>
+                      <a:pPr algn="ctr" fontAlgn="b">
+                        <a:buNone/>
+                      </a:pPr>
+                      <a:r>
+                        <a:rPr lang="en-ZA" sz="1600" u="none" strike="noStrike" dirty="0">
+                          <a:effectLst/>
+                          <a:latin typeface="Verdana" panose="020B0604030504040204" pitchFamily="34" charset="0"/>
+                          <a:ea typeface="Verdana" panose="020B0604030504040204" pitchFamily="34" charset="0"/>
+                          <a:cs typeface="Verdana" panose="020B0604030504040204" pitchFamily="34" charset="0"/>
+                        </a:rPr>
+                        <a:t>X</a:t>
+                      </a:r>
+                      <a:endParaRPr lang="en-ZA" sz="1600" b="0" i="0" u="none" strike="noStrike" dirty="0">
+                        <a:solidFill>
+                          <a:srgbClr val="000000"/>
+                        </a:solidFill>
+                        <a:effectLst/>
+                        <a:latin typeface="Verdana" panose="020B0604030504040204" pitchFamily="34" charset="0"/>
+                        <a:ea typeface="Verdana" panose="020B0604030504040204" pitchFamily="34" charset="0"/>
+                        <a:cs typeface="Verdana" panose="020B0604030504040204" pitchFamily="34" charset="0"/>
+                      </a:endParaRPr>
+                    </a:p>
+                  </a:txBody>
+                  <a:tcPr marL="3234" marR="3234" marT="3234" marB="0" anchor="b">
+                    <a:noFill/>
+                  </a:tcPr>
+                </a:tc>
+                <a:tc>
+                  <a:txBody>
+                    <a:bodyPr/>
+                    <a:lstStyle/>
+                    <a:p>
+                      <a:pPr algn="ctr" fontAlgn="b">
+                        <a:buNone/>
+                      </a:pPr>
+                      <a:r>
+                        <a:rPr lang="en-ZA" sz="1600" u="none" strike="noStrike">
+                          <a:effectLst/>
+                          <a:latin typeface="Verdana" panose="020B0604030504040204" pitchFamily="34" charset="0"/>
+                          <a:ea typeface="Verdana" panose="020B0604030504040204" pitchFamily="34" charset="0"/>
+                          <a:cs typeface="Verdana" panose="020B0604030504040204" pitchFamily="34" charset="0"/>
+                        </a:rPr>
+                        <a:t>X</a:t>
+                      </a:r>
+                      <a:endParaRPr lang="en-ZA" sz="1600" b="0" i="0" u="none" strike="noStrike">
+                        <a:solidFill>
+                          <a:srgbClr val="000000"/>
+                        </a:solidFill>
+                        <a:effectLst/>
+                        <a:latin typeface="Verdana" panose="020B0604030504040204" pitchFamily="34" charset="0"/>
+                        <a:ea typeface="Verdana" panose="020B0604030504040204" pitchFamily="34" charset="0"/>
+                        <a:cs typeface="Verdana" panose="020B0604030504040204" pitchFamily="34" charset="0"/>
+                      </a:endParaRPr>
+                    </a:p>
+                  </a:txBody>
+                  <a:tcPr marL="3234" marR="3234" marT="3234" marB="0" anchor="b">
+                    <a:noFill/>
+                  </a:tcPr>
+                </a:tc>
+                <a:tc>
+                  <a:txBody>
+                    <a:bodyPr/>
+                    <a:lstStyle/>
+                    <a:p>
+                      <a:pPr algn="ctr" fontAlgn="b">
+                        <a:buNone/>
+                      </a:pPr>
+                      <a:endParaRPr lang="en-ZA" sz="1600" b="0" i="0" u="none" strike="noStrike" dirty="0">
+                        <a:solidFill>
+                          <a:srgbClr val="000000"/>
+                        </a:solidFill>
+                        <a:effectLst/>
+                        <a:latin typeface="Verdana" panose="020B0604030504040204" pitchFamily="34" charset="0"/>
+                        <a:ea typeface="Verdana" panose="020B0604030504040204" pitchFamily="34" charset="0"/>
+                        <a:cs typeface="Verdana" panose="020B0604030504040204" pitchFamily="34" charset="0"/>
+                      </a:endParaRPr>
+                    </a:p>
+                  </a:txBody>
+                  <a:tcPr marL="3234" marR="3234" marT="3234" marB="0" anchor="b">
+                    <a:noFill/>
+                  </a:tcPr>
+                </a:tc>
+                <a:extLst>
+                  <a:ext uri="{0D108BD9-81ED-4DB2-BD59-A6C34878D82A}">
+                    <a16:rowId xmlns:a16="http://schemas.microsoft.com/office/drawing/2014/main" val="3082328327"/>
+                  </a:ext>
+                </a:extLst>
+              </a:tr>
+              <a:tr h="398958">
+                <a:tc>
+                  <a:txBody>
+                    <a:bodyPr/>
+                    <a:lstStyle/>
+                    <a:p>
+                      <a:pPr algn="l" fontAlgn="b">
+                        <a:buNone/>
+                      </a:pPr>
+                      <a:r>
+                        <a:rPr lang="en-ZA" sz="1600" u="none" strike="noStrike" dirty="0">
+                          <a:effectLst/>
+                          <a:latin typeface="Verdana" panose="020B0604030504040204" pitchFamily="34" charset="0"/>
+                          <a:ea typeface="Verdana" panose="020B0604030504040204" pitchFamily="34" charset="0"/>
+                          <a:cs typeface="Verdana" panose="020B0604030504040204" pitchFamily="34" charset="0"/>
+                        </a:rPr>
+                        <a:t>HIVST (Facility-based)</a:t>
+                      </a:r>
+                      <a:endParaRPr lang="en-ZA" sz="1600" b="0" i="0" u="none" strike="noStrike" dirty="0">
+                        <a:solidFill>
+                          <a:srgbClr val="000000"/>
+                        </a:solidFill>
+                        <a:effectLst/>
+                        <a:latin typeface="Verdana" panose="020B0604030504040204" pitchFamily="34" charset="0"/>
+                        <a:ea typeface="Verdana" panose="020B0604030504040204" pitchFamily="34" charset="0"/>
+                        <a:cs typeface="Verdana" panose="020B0604030504040204" pitchFamily="34" charset="0"/>
+                      </a:endParaRPr>
+                    </a:p>
+                  </a:txBody>
+                  <a:tcPr marL="3234" marR="3234" marT="3234" marB="0" anchor="b">
+                    <a:noFill/>
+                  </a:tcPr>
+                </a:tc>
+                <a:tc>
+                  <a:txBody>
+                    <a:bodyPr/>
+                    <a:lstStyle/>
+                    <a:p>
+                      <a:pPr algn="ctr" fontAlgn="b">
+                        <a:buNone/>
+                      </a:pPr>
+                      <a:endParaRPr lang="en-ZA" sz="1600" b="0" i="0" u="none" strike="noStrike" dirty="0">
+                        <a:solidFill>
+                          <a:srgbClr val="000000"/>
+                        </a:solidFill>
+                        <a:effectLst/>
+                        <a:latin typeface="Verdana" panose="020B0604030504040204" pitchFamily="34" charset="0"/>
+                        <a:ea typeface="Verdana" panose="020B0604030504040204" pitchFamily="34" charset="0"/>
+                        <a:cs typeface="Verdana" panose="020B0604030504040204" pitchFamily="34" charset="0"/>
+                      </a:endParaRPr>
+                    </a:p>
+                  </a:txBody>
+                  <a:tcPr marL="3234" marR="3234" marT="3234" marB="0" anchor="b">
+                    <a:noFill/>
+                  </a:tcPr>
+                </a:tc>
+                <a:tc>
+                  <a:txBody>
+                    <a:bodyPr/>
+                    <a:lstStyle/>
+                    <a:p>
+                      <a:pPr algn="ctr" fontAlgn="b">
+                        <a:buNone/>
+                      </a:pPr>
+                      <a:endParaRPr lang="en-ZA" sz="1600" b="0" i="0" u="none" strike="noStrike" dirty="0">
+                        <a:solidFill>
+                          <a:srgbClr val="000000"/>
+                        </a:solidFill>
+                        <a:effectLst/>
+                        <a:latin typeface="Verdana" panose="020B0604030504040204" pitchFamily="34" charset="0"/>
+                        <a:ea typeface="Verdana" panose="020B0604030504040204" pitchFamily="34" charset="0"/>
+                        <a:cs typeface="Verdana" panose="020B0604030504040204" pitchFamily="34" charset="0"/>
+                      </a:endParaRPr>
+                    </a:p>
+                  </a:txBody>
+                  <a:tcPr marL="3234" marR="3234" marT="3234" marB="0" anchor="b">
+                    <a:noFill/>
+                  </a:tcPr>
+                </a:tc>
+                <a:tc>
+                  <a:txBody>
+                    <a:bodyPr/>
+                    <a:lstStyle/>
+                    <a:p>
+                      <a:pPr algn="ctr" fontAlgn="b">
+                        <a:buNone/>
+                      </a:pPr>
+                      <a:r>
+                        <a:rPr lang="en-ZA" sz="1600" u="none" strike="noStrike">
+                          <a:effectLst/>
+                          <a:latin typeface="Verdana" panose="020B0604030504040204" pitchFamily="34" charset="0"/>
+                          <a:ea typeface="Verdana" panose="020B0604030504040204" pitchFamily="34" charset="0"/>
+                          <a:cs typeface="Verdana" panose="020B0604030504040204" pitchFamily="34" charset="0"/>
+                        </a:rPr>
+                        <a:t>X</a:t>
+                      </a:r>
+                      <a:endParaRPr lang="en-ZA" sz="1600" b="0" i="0" u="none" strike="noStrike">
+                        <a:solidFill>
+                          <a:srgbClr val="000000"/>
+                        </a:solidFill>
+                        <a:effectLst/>
+                        <a:latin typeface="Verdana" panose="020B0604030504040204" pitchFamily="34" charset="0"/>
+                        <a:ea typeface="Verdana" panose="020B0604030504040204" pitchFamily="34" charset="0"/>
+                        <a:cs typeface="Verdana" panose="020B0604030504040204" pitchFamily="34" charset="0"/>
+                      </a:endParaRPr>
+                    </a:p>
+                  </a:txBody>
+                  <a:tcPr marL="3234" marR="3234" marT="3234" marB="0" anchor="b">
+                    <a:noFill/>
+                  </a:tcPr>
+                </a:tc>
+                <a:tc>
+                  <a:txBody>
+                    <a:bodyPr/>
+                    <a:lstStyle/>
+                    <a:p>
+                      <a:pPr algn="ctr" fontAlgn="b">
+                        <a:buNone/>
+                      </a:pPr>
+                      <a:r>
+                        <a:rPr lang="en-ZA" sz="1600" u="none" strike="noStrike" dirty="0">
+                          <a:effectLst/>
+                          <a:latin typeface="Verdana" panose="020B0604030504040204" pitchFamily="34" charset="0"/>
+                          <a:ea typeface="Verdana" panose="020B0604030504040204" pitchFamily="34" charset="0"/>
+                          <a:cs typeface="Verdana" panose="020B0604030504040204" pitchFamily="34" charset="0"/>
+                        </a:rPr>
+                        <a:t>X</a:t>
+                      </a:r>
+                      <a:endParaRPr lang="en-ZA" sz="1600" b="0" i="0" u="none" strike="noStrike" dirty="0">
+                        <a:solidFill>
+                          <a:srgbClr val="000000"/>
+                        </a:solidFill>
+                        <a:effectLst/>
+                        <a:latin typeface="Verdana" panose="020B0604030504040204" pitchFamily="34" charset="0"/>
+                        <a:ea typeface="Verdana" panose="020B0604030504040204" pitchFamily="34" charset="0"/>
+                        <a:cs typeface="Verdana" panose="020B0604030504040204" pitchFamily="34" charset="0"/>
+                      </a:endParaRPr>
+                    </a:p>
+                  </a:txBody>
+                  <a:tcPr marL="3234" marR="3234" marT="3234" marB="0" anchor="b">
+                    <a:noFill/>
+                  </a:tcPr>
+                </a:tc>
+                <a:tc>
+                  <a:txBody>
+                    <a:bodyPr/>
+                    <a:lstStyle/>
+                    <a:p>
+                      <a:pPr algn="ctr" fontAlgn="b">
+                        <a:buNone/>
+                      </a:pPr>
+                      <a:r>
+                        <a:rPr lang="en-ZA" sz="1600" u="none" strike="noStrike" dirty="0">
+                          <a:effectLst/>
+                          <a:latin typeface="Verdana" panose="020B0604030504040204" pitchFamily="34" charset="0"/>
+                          <a:ea typeface="Verdana" panose="020B0604030504040204" pitchFamily="34" charset="0"/>
+                          <a:cs typeface="Verdana" panose="020B0604030504040204" pitchFamily="34" charset="0"/>
+                        </a:rPr>
+                        <a:t>X</a:t>
+                      </a:r>
+                      <a:endParaRPr lang="en-ZA" sz="1600" b="0" i="0" u="none" strike="noStrike" dirty="0">
+                        <a:solidFill>
+                          <a:srgbClr val="000000"/>
+                        </a:solidFill>
+                        <a:effectLst/>
+                        <a:latin typeface="Verdana" panose="020B0604030504040204" pitchFamily="34" charset="0"/>
+                        <a:ea typeface="Verdana" panose="020B0604030504040204" pitchFamily="34" charset="0"/>
+                        <a:cs typeface="Verdana" panose="020B0604030504040204" pitchFamily="34" charset="0"/>
+                      </a:endParaRPr>
+                    </a:p>
+                  </a:txBody>
+                  <a:tcPr marL="3234" marR="3234" marT="3234" marB="0" anchor="b">
+                    <a:noFill/>
+                  </a:tcPr>
+                </a:tc>
+                <a:tc>
+                  <a:txBody>
+                    <a:bodyPr/>
+                    <a:lstStyle/>
+                    <a:p>
+                      <a:pPr algn="ctr" fontAlgn="b">
+                        <a:buNone/>
+                      </a:pPr>
+                      <a:endParaRPr lang="en-ZA" sz="1600" b="0" i="0" u="none" strike="noStrike" dirty="0">
+                        <a:solidFill>
+                          <a:srgbClr val="000000"/>
+                        </a:solidFill>
+                        <a:effectLst/>
+                        <a:latin typeface="Verdana" panose="020B0604030504040204" pitchFamily="34" charset="0"/>
+                        <a:ea typeface="Verdana" panose="020B0604030504040204" pitchFamily="34" charset="0"/>
+                        <a:cs typeface="Verdana" panose="020B0604030504040204" pitchFamily="34" charset="0"/>
+                      </a:endParaRPr>
+                    </a:p>
+                  </a:txBody>
+                  <a:tcPr marL="3234" marR="3234" marT="3234" marB="0" anchor="b">
+                    <a:noFill/>
+                  </a:tcPr>
+                </a:tc>
+                <a:extLst>
+                  <a:ext uri="{0D108BD9-81ED-4DB2-BD59-A6C34878D82A}">
+                    <a16:rowId xmlns:a16="http://schemas.microsoft.com/office/drawing/2014/main" val="213087910"/>
+                  </a:ext>
+                </a:extLst>
+              </a:tr>
+              <a:tr h="398958">
+                <a:tc>
+                  <a:txBody>
+                    <a:bodyPr/>
+                    <a:lstStyle/>
+                    <a:p>
+                      <a:pPr algn="l" fontAlgn="b">
+                        <a:buNone/>
+                      </a:pPr>
+                      <a:r>
+                        <a:rPr lang="en-ZA" sz="1600" u="none" strike="noStrike" dirty="0">
+                          <a:effectLst/>
+                          <a:latin typeface="Verdana" panose="020B0604030504040204" pitchFamily="34" charset="0"/>
+                          <a:ea typeface="Verdana" panose="020B0604030504040204" pitchFamily="34" charset="0"/>
+                          <a:cs typeface="Verdana" panose="020B0604030504040204" pitchFamily="34" charset="0"/>
+                        </a:rPr>
+                        <a:t>HIVST (community-based)</a:t>
+                      </a:r>
+                      <a:endParaRPr lang="en-ZA" sz="1600" b="0" i="0" u="none" strike="noStrike" dirty="0">
+                        <a:solidFill>
+                          <a:srgbClr val="000000"/>
+                        </a:solidFill>
+                        <a:effectLst/>
+                        <a:latin typeface="Verdana" panose="020B0604030504040204" pitchFamily="34" charset="0"/>
+                        <a:ea typeface="Verdana" panose="020B0604030504040204" pitchFamily="34" charset="0"/>
+                        <a:cs typeface="Verdana" panose="020B0604030504040204" pitchFamily="34" charset="0"/>
+                      </a:endParaRPr>
+                    </a:p>
+                  </a:txBody>
+                  <a:tcPr marL="3234" marR="3234" marT="3234" marB="0" anchor="b">
+                    <a:noFill/>
+                  </a:tcPr>
+                </a:tc>
+                <a:tc>
+                  <a:txBody>
+                    <a:bodyPr/>
+                    <a:lstStyle/>
+                    <a:p>
+                      <a:pPr algn="ctr" fontAlgn="b">
+                        <a:buNone/>
+                      </a:pPr>
+                      <a:endParaRPr lang="en-ZA" sz="1600" b="0" i="0" u="none" strike="noStrike">
+                        <a:solidFill>
+                          <a:srgbClr val="000000"/>
+                        </a:solidFill>
+                        <a:effectLst/>
+                        <a:latin typeface="Verdana" panose="020B0604030504040204" pitchFamily="34" charset="0"/>
+                        <a:ea typeface="Verdana" panose="020B0604030504040204" pitchFamily="34" charset="0"/>
+                        <a:cs typeface="Verdana" panose="020B0604030504040204" pitchFamily="34" charset="0"/>
+                      </a:endParaRPr>
+                    </a:p>
+                  </a:txBody>
+                  <a:tcPr marL="3234" marR="3234" marT="3234" marB="0" anchor="b">
+                    <a:noFill/>
+                  </a:tcPr>
+                </a:tc>
+                <a:tc>
+                  <a:txBody>
+                    <a:bodyPr/>
+                    <a:lstStyle/>
+                    <a:p>
+                      <a:pPr algn="ctr" fontAlgn="b">
+                        <a:buNone/>
+                      </a:pPr>
+                      <a:endParaRPr lang="en-ZA" sz="1600" b="0" i="0" u="none" strike="noStrike" dirty="0">
+                        <a:solidFill>
+                          <a:srgbClr val="000000"/>
+                        </a:solidFill>
+                        <a:effectLst/>
+                        <a:latin typeface="Verdana" panose="020B0604030504040204" pitchFamily="34" charset="0"/>
+                        <a:ea typeface="Verdana" panose="020B0604030504040204" pitchFamily="34" charset="0"/>
+                        <a:cs typeface="Verdana" panose="020B0604030504040204" pitchFamily="34" charset="0"/>
+                      </a:endParaRPr>
+                    </a:p>
+                  </a:txBody>
+                  <a:tcPr marL="3234" marR="3234" marT="3234" marB="0" anchor="b">
+                    <a:noFill/>
+                  </a:tcPr>
+                </a:tc>
+                <a:tc>
+                  <a:txBody>
+                    <a:bodyPr/>
+                    <a:lstStyle/>
+                    <a:p>
+                      <a:pPr algn="ctr" fontAlgn="b">
+                        <a:buNone/>
+                      </a:pPr>
+                      <a:r>
+                        <a:rPr lang="en-ZA" sz="1600" u="none" strike="noStrike" dirty="0">
+                          <a:effectLst/>
+                          <a:latin typeface="Verdana" panose="020B0604030504040204" pitchFamily="34" charset="0"/>
+                          <a:ea typeface="Verdana" panose="020B0604030504040204" pitchFamily="34" charset="0"/>
+                          <a:cs typeface="Verdana" panose="020B0604030504040204" pitchFamily="34" charset="0"/>
+                        </a:rPr>
+                        <a:t>X</a:t>
+                      </a:r>
+                      <a:endParaRPr lang="en-ZA" sz="1600" b="0" i="0" u="none" strike="noStrike" dirty="0">
+                        <a:solidFill>
+                          <a:srgbClr val="000000"/>
+                        </a:solidFill>
+                        <a:effectLst/>
+                        <a:latin typeface="Verdana" panose="020B0604030504040204" pitchFamily="34" charset="0"/>
+                        <a:ea typeface="Verdana" panose="020B0604030504040204" pitchFamily="34" charset="0"/>
+                        <a:cs typeface="Verdana" panose="020B0604030504040204" pitchFamily="34" charset="0"/>
+                      </a:endParaRPr>
+                    </a:p>
+                  </a:txBody>
+                  <a:tcPr marL="3234" marR="3234" marT="3234" marB="0" anchor="b">
+                    <a:noFill/>
+                  </a:tcPr>
+                </a:tc>
+                <a:tc>
+                  <a:txBody>
+                    <a:bodyPr/>
+                    <a:lstStyle/>
+                    <a:p>
+                      <a:pPr algn="ctr" fontAlgn="b">
+                        <a:buNone/>
+                      </a:pPr>
+                      <a:r>
+                        <a:rPr lang="en-ZA" sz="1600" u="none" strike="noStrike" dirty="0">
+                          <a:effectLst/>
+                          <a:latin typeface="Verdana" panose="020B0604030504040204" pitchFamily="34" charset="0"/>
+                          <a:ea typeface="Verdana" panose="020B0604030504040204" pitchFamily="34" charset="0"/>
+                          <a:cs typeface="Verdana" panose="020B0604030504040204" pitchFamily="34" charset="0"/>
+                        </a:rPr>
+                        <a:t>X</a:t>
+                      </a:r>
+                      <a:endParaRPr lang="en-ZA" sz="1600" b="0" i="0" u="none" strike="noStrike" dirty="0">
+                        <a:solidFill>
+                          <a:srgbClr val="000000"/>
+                        </a:solidFill>
+                        <a:effectLst/>
+                        <a:latin typeface="Verdana" panose="020B0604030504040204" pitchFamily="34" charset="0"/>
+                        <a:ea typeface="Verdana" panose="020B0604030504040204" pitchFamily="34" charset="0"/>
+                        <a:cs typeface="Verdana" panose="020B0604030504040204" pitchFamily="34" charset="0"/>
+                      </a:endParaRPr>
+                    </a:p>
+                  </a:txBody>
+                  <a:tcPr marL="3234" marR="3234" marT="3234" marB="0" anchor="b">
+                    <a:noFill/>
+                  </a:tcPr>
+                </a:tc>
+                <a:tc>
+                  <a:txBody>
+                    <a:bodyPr/>
+                    <a:lstStyle/>
+                    <a:p>
+                      <a:pPr algn="ctr" fontAlgn="b">
+                        <a:buNone/>
+                      </a:pPr>
+                      <a:r>
+                        <a:rPr lang="en-ZA" sz="1600" u="none" strike="noStrike" dirty="0">
+                          <a:effectLst/>
+                          <a:latin typeface="Verdana" panose="020B0604030504040204" pitchFamily="34" charset="0"/>
+                          <a:ea typeface="Verdana" panose="020B0604030504040204" pitchFamily="34" charset="0"/>
+                          <a:cs typeface="Verdana" panose="020B0604030504040204" pitchFamily="34" charset="0"/>
+                        </a:rPr>
+                        <a:t>X</a:t>
+                      </a:r>
+                      <a:endParaRPr lang="en-ZA" sz="1600" b="0" i="0" u="none" strike="noStrike" dirty="0">
+                        <a:solidFill>
+                          <a:srgbClr val="000000"/>
+                        </a:solidFill>
+                        <a:effectLst/>
+                        <a:latin typeface="Verdana" panose="020B0604030504040204" pitchFamily="34" charset="0"/>
+                        <a:ea typeface="Verdana" panose="020B0604030504040204" pitchFamily="34" charset="0"/>
+                        <a:cs typeface="Verdana" panose="020B0604030504040204" pitchFamily="34" charset="0"/>
+                      </a:endParaRPr>
+                    </a:p>
+                  </a:txBody>
+                  <a:tcPr marL="3234" marR="3234" marT="3234" marB="0" anchor="b">
+                    <a:noFill/>
+                  </a:tcPr>
+                </a:tc>
+                <a:tc>
+                  <a:txBody>
+                    <a:bodyPr/>
+                    <a:lstStyle/>
+                    <a:p>
+                      <a:pPr algn="ctr" fontAlgn="b">
+                        <a:buNone/>
+                      </a:pPr>
+                      <a:endParaRPr lang="en-ZA" sz="1600" b="0" i="0" u="none" strike="noStrike" dirty="0">
+                        <a:solidFill>
+                          <a:srgbClr val="000000"/>
+                        </a:solidFill>
+                        <a:effectLst/>
+                        <a:latin typeface="Verdana" panose="020B0604030504040204" pitchFamily="34" charset="0"/>
+                        <a:ea typeface="Verdana" panose="020B0604030504040204" pitchFamily="34" charset="0"/>
+                        <a:cs typeface="Verdana" panose="020B0604030504040204" pitchFamily="34" charset="0"/>
+                      </a:endParaRPr>
+                    </a:p>
+                  </a:txBody>
+                  <a:tcPr marL="3234" marR="3234" marT="3234" marB="0" anchor="b">
+                    <a:noFill/>
+                  </a:tcPr>
+                </a:tc>
+                <a:extLst>
+                  <a:ext uri="{0D108BD9-81ED-4DB2-BD59-A6C34878D82A}">
+                    <a16:rowId xmlns:a16="http://schemas.microsoft.com/office/drawing/2014/main" val="2923424381"/>
+                  </a:ext>
+                </a:extLst>
+              </a:tr>
+            </a:tbl>
+          </a:graphicData>
+        </a:graphic>
+      </p:graphicFrame>
+    </p:spTree>
+    <p:extLst>
+      <p:ext uri="{BB962C8B-B14F-4D97-AF65-F5344CB8AC3E}">
+        <p14:creationId xmlns:p14="http://schemas.microsoft.com/office/powerpoint/2010/main" val="1714471306"/>
+      </p:ext>
+    </p:extLst>
+  </p:cSld>
+  <p:clrMapOvr>
+    <a:masterClrMapping/>
+  </p:clrMapOvr>
+</p:sld>
+</file>
+
+<file path=ppt/slides/slide7.xml><?xml version="1.0" encoding="utf-8"?>
 <p:sld xmlns:a="http://schemas.openxmlformats.org/drawingml/2006/main" xmlns:r="http://schemas.openxmlformats.org/officeDocument/2006/relationships" xmlns:p="http://schemas.openxmlformats.org/presentationml/2006/main">
   <p:cSld>
     <p:spTree>
@@ -9715,7 +15877,7 @@
                   <a:schemeClr val="accent1"/>
                 </a:solidFill>
               </a:rPr>
-              <a:t>What‘s Included: Testing</a:t>
+              <a:t>What‘s Included: Treatment</a:t>
             </a:r>
           </a:p>
         </p:txBody>
@@ -9832,7 +15994,7 @@
 </p:sld>
 </file>
 
-<file path=ppt/slides/slide6.xml><?xml version="1.0" encoding="utf-8"?>
+<file path=ppt/slides/slide8.xml><?xml version="1.0" encoding="utf-8"?>
 <p:sld xmlns:a="http://schemas.openxmlformats.org/drawingml/2006/main" xmlns:r="http://schemas.openxmlformats.org/officeDocument/2006/relationships" xmlns:p="http://schemas.openxmlformats.org/presentationml/2006/main">
   <p:cSld>
     <p:spTree>
@@ -10004,7 +16166,7 @@
 </p:sld>
 </file>
 
-<file path=ppt/slides/slide7.xml><?xml version="1.0" encoding="utf-8"?>
+<file path=ppt/slides/slide9.xml><?xml version="1.0" encoding="utf-8"?>
 <p:sld xmlns:a="http://schemas.openxmlformats.org/drawingml/2006/main" xmlns:r="http://schemas.openxmlformats.org/officeDocument/2006/relationships" xmlns:p="http://schemas.openxmlformats.org/presentationml/2006/main">
   <p:cSld>
     <p:spTree>
@@ -10103,341 +16265,6 @@
     <p:extLst>
       <p:ext uri="{BB962C8B-B14F-4D97-AF65-F5344CB8AC3E}">
         <p14:creationId xmlns:p14="http://schemas.microsoft.com/office/powerpoint/2010/main" val="1996988643"/>
-      </p:ext>
-    </p:extLst>
-  </p:cSld>
-  <p:clrMapOvr>
-    <a:masterClrMapping/>
-  </p:clrMapOvr>
-</p:sld>
-</file>
-
-<file path=ppt/slides/slide8.xml><?xml version="1.0" encoding="utf-8"?>
-<p:sld xmlns:a="http://schemas.openxmlformats.org/drawingml/2006/main" xmlns:r="http://schemas.openxmlformats.org/officeDocument/2006/relationships" xmlns:p="http://schemas.openxmlformats.org/presentationml/2006/main">
-  <p:cSld>
-    <p:spTree>
-      <p:nvGrpSpPr>
-        <p:cNvPr id="1" name=""/>
-        <p:cNvGrpSpPr/>
-        <p:nvPr/>
-      </p:nvGrpSpPr>
-      <p:grpSpPr>
-        <a:xfrm>
-          <a:off x="0" y="0"/>
-          <a:ext cx="0" cy="0"/>
-          <a:chOff x="0" y="0"/>
-          <a:chExt cx="0" cy="0"/>
-        </a:xfrm>
-      </p:grpSpPr>
-      <p:sp>
-        <p:nvSpPr>
-          <p:cNvPr id="2" name="Titel 1">
-            <a:extLst>
-              <a:ext uri="{FF2B5EF4-FFF2-40B4-BE49-F238E27FC236}">
-                <a16:creationId xmlns:a16="http://schemas.microsoft.com/office/drawing/2014/main" id="{246EB762-B210-4CC4-9F39-572EC03B556D}"/>
-              </a:ext>
-            </a:extLst>
-          </p:cNvPr>
-          <p:cNvSpPr>
-            <a:spLocks noGrp="1"/>
-          </p:cNvSpPr>
-          <p:nvPr>
-            <p:ph type="title"/>
-          </p:nvPr>
-        </p:nvSpPr>
-        <p:spPr/>
-        <p:txBody>
-          <a:bodyPr/>
-          <a:lstStyle/>
-          <a:p>
-            <a:r>
-              <a:rPr lang="en-GB" dirty="0"/>
-              <a:t>2. Leigh Johnson et al, 2019</a:t>
-            </a:r>
-          </a:p>
-        </p:txBody>
-      </p:sp>
-      <p:sp>
-        <p:nvSpPr>
-          <p:cNvPr id="3" name="Inhaltsplatzhalter 2">
-            <a:extLst>
-              <a:ext uri="{FF2B5EF4-FFF2-40B4-BE49-F238E27FC236}">
-                <a16:creationId xmlns:a16="http://schemas.microsoft.com/office/drawing/2014/main" id="{04DD0E3C-3675-44C6-AE22-972FDE27B6FE}"/>
-              </a:ext>
-            </a:extLst>
-          </p:cNvPr>
-          <p:cNvSpPr>
-            <a:spLocks noGrp="1"/>
-          </p:cNvSpPr>
-          <p:nvPr>
-            <p:ph idx="1"/>
-          </p:nvPr>
-        </p:nvSpPr>
-        <p:spPr/>
-        <p:txBody>
-          <a:bodyPr/>
-          <a:lstStyle/>
-          <a:p>
-            <a:pPr lvl="0"/>
-            <a:r>
-              <a:rPr lang="en-GB" dirty="0"/>
-              <a:t>Compared the impact and cost-effectiveness of several potential new testing strategies in South Africa</a:t>
-            </a:r>
-          </a:p>
-          <a:p>
-            <a:pPr lvl="0"/>
-            <a:endParaRPr lang="en-GB" sz="3200" dirty="0"/>
-          </a:p>
-          <a:p>
-            <a:pPr lvl="1">
-              <a:buFont typeface="Wingdings" pitchFamily="2" charset="2"/>
-              <a:buChar char="§"/>
-            </a:pPr>
-            <a:r>
-              <a:rPr lang="en-GB" dirty="0"/>
-              <a:t>Home-based testing combined with self-testing would have the greatest impact</a:t>
-            </a:r>
-          </a:p>
-          <a:p>
-            <a:pPr lvl="1">
-              <a:buFont typeface="Wingdings" pitchFamily="2" charset="2"/>
-              <a:buChar char="§"/>
-            </a:pPr>
-            <a:endParaRPr lang="en-GB" sz="3200" dirty="0"/>
-          </a:p>
-          <a:p>
-            <a:pPr lvl="1">
-              <a:buFont typeface="Wingdings" pitchFamily="2" charset="2"/>
-              <a:buChar char="§"/>
-            </a:pPr>
-            <a:r>
-              <a:rPr lang="en-GB" dirty="0"/>
-              <a:t>Testing in FSWs and assisted partner notification would be cost-saving</a:t>
-            </a:r>
-            <a:endParaRPr lang="en-GB" sz="3200" dirty="0"/>
-          </a:p>
-        </p:txBody>
-      </p:sp>
-      <p:sp>
-        <p:nvSpPr>
-          <p:cNvPr id="7" name="Bildplatzhalter 6">
-            <a:extLst>
-              <a:ext uri="{FF2B5EF4-FFF2-40B4-BE49-F238E27FC236}">
-                <a16:creationId xmlns:a16="http://schemas.microsoft.com/office/drawing/2014/main" id="{4BAD8F13-B027-4BA8-A57B-CCC5C9759C27}"/>
-              </a:ext>
-            </a:extLst>
-          </p:cNvPr>
-          <p:cNvSpPr>
-            <a:spLocks noGrp="1"/>
-          </p:cNvSpPr>
-          <p:nvPr>
-            <p:ph type="pic" sz="quarter" idx="12"/>
-          </p:nvPr>
-        </p:nvSpPr>
-        <p:spPr/>
-        <p:txBody>
-          <a:bodyPr/>
-          <a:lstStyle/>
-          <a:p>
-            <a:endParaRPr lang="en-GB" dirty="0"/>
-          </a:p>
-        </p:txBody>
-      </p:sp>
-      <p:pic>
-        <p:nvPicPr>
-          <p:cNvPr id="6" name="Picture 5">
-            <a:extLst>
-              <a:ext uri="{FF2B5EF4-FFF2-40B4-BE49-F238E27FC236}">
-                <a16:creationId xmlns:a16="http://schemas.microsoft.com/office/drawing/2014/main" id="{B5BE4494-9185-1A49-8862-8CF85BFF20E3}"/>
-              </a:ext>
-            </a:extLst>
-          </p:cNvPr>
-          <p:cNvPicPr>
-            <a:picLocks noChangeAspect="1"/>
-          </p:cNvPicPr>
-          <p:nvPr/>
-        </p:nvPicPr>
-        <p:blipFill>
-          <a:blip r:embed="rId2"/>
-          <a:stretch>
-            <a:fillRect/>
-          </a:stretch>
-        </p:blipFill>
-        <p:spPr>
-          <a:xfrm>
-            <a:off x="6954982" y="0"/>
-            <a:ext cx="5237018" cy="6858000"/>
-          </a:xfrm>
-          <a:prstGeom prst="rect">
-            <a:avLst/>
-          </a:prstGeom>
-        </p:spPr>
-      </p:pic>
-      <p:sp>
-        <p:nvSpPr>
-          <p:cNvPr id="8" name="TextBox 7">
-            <a:extLst>
-              <a:ext uri="{FF2B5EF4-FFF2-40B4-BE49-F238E27FC236}">
-                <a16:creationId xmlns:a16="http://schemas.microsoft.com/office/drawing/2014/main" id="{18494DE0-03C5-A143-A7AA-B18188B6A97B}"/>
-              </a:ext>
-            </a:extLst>
-          </p:cNvPr>
-          <p:cNvSpPr txBox="1"/>
-          <p:nvPr/>
-        </p:nvSpPr>
-        <p:spPr>
-          <a:xfrm>
-            <a:off x="442913" y="6339840"/>
-            <a:ext cx="4937760" cy="369332"/>
-          </a:xfrm>
-          <a:prstGeom prst="rect">
-            <a:avLst/>
-          </a:prstGeom>
-          <a:noFill/>
-        </p:spPr>
-        <p:txBody>
-          <a:bodyPr wrap="square" rtlCol="0">
-            <a:spAutoFit/>
-          </a:bodyPr>
-          <a:lstStyle/>
-          <a:p>
-            <a:r>
-              <a:rPr lang="en-GB" dirty="0">
-                <a:hlinkClick r:id="rId3"/>
-              </a:rPr>
-              <a:t>https://pubmed.ncbi.nlm.nih.gov/31477764/</a:t>
-            </a:r>
-            <a:endParaRPr lang="en-GB" dirty="0"/>
-          </a:p>
-        </p:txBody>
-      </p:sp>
-    </p:spTree>
-    <p:extLst>
-      <p:ext uri="{BB962C8B-B14F-4D97-AF65-F5344CB8AC3E}">
-        <p14:creationId xmlns:p14="http://schemas.microsoft.com/office/powerpoint/2010/main" val="3592092444"/>
-      </p:ext>
-    </p:extLst>
-  </p:cSld>
-  <p:clrMapOvr>
-    <a:masterClrMapping/>
-  </p:clrMapOvr>
-</p:sld>
-</file>
-
-<file path=ppt/slides/slide9.xml><?xml version="1.0" encoding="utf-8"?>
-<p:sld xmlns:a="http://schemas.openxmlformats.org/drawingml/2006/main" xmlns:r="http://schemas.openxmlformats.org/officeDocument/2006/relationships" xmlns:p="http://schemas.openxmlformats.org/presentationml/2006/main">
-  <p:cSld>
-    <p:spTree>
-      <p:nvGrpSpPr>
-        <p:cNvPr id="1" name=""/>
-        <p:cNvGrpSpPr/>
-        <p:nvPr/>
-      </p:nvGrpSpPr>
-      <p:grpSpPr>
-        <a:xfrm>
-          <a:off x="0" y="0"/>
-          <a:ext cx="0" cy="0"/>
-          <a:chOff x="0" y="0"/>
-          <a:chExt cx="0" cy="0"/>
-        </a:xfrm>
-      </p:grpSpPr>
-      <p:sp>
-        <p:nvSpPr>
-          <p:cNvPr id="4" name="Text Placeholder 3">
-            <a:extLst>
-              <a:ext uri="{FF2B5EF4-FFF2-40B4-BE49-F238E27FC236}">
-                <a16:creationId xmlns:a16="http://schemas.microsoft.com/office/drawing/2014/main" id="{DDA7417D-B668-AE4D-AD87-58BDC80D26F4}"/>
-              </a:ext>
-            </a:extLst>
-          </p:cNvPr>
-          <p:cNvSpPr>
-            <a:spLocks noGrp="1"/>
-          </p:cNvSpPr>
-          <p:nvPr>
-            <p:ph type="body" sz="quarter" idx="12"/>
-          </p:nvPr>
-        </p:nvSpPr>
-        <p:spPr/>
-        <p:txBody>
-          <a:bodyPr/>
-          <a:lstStyle/>
-          <a:p>
-            <a:endParaRPr lang="en-GB" dirty="0"/>
-          </a:p>
-        </p:txBody>
-      </p:sp>
-      <p:graphicFrame>
-        <p:nvGraphicFramePr>
-          <p:cNvPr id="5" name="Chart 4">
-            <a:extLst>
-              <a:ext uri="{FF2B5EF4-FFF2-40B4-BE49-F238E27FC236}">
-                <a16:creationId xmlns:a16="http://schemas.microsoft.com/office/drawing/2014/main" id="{0B66F6CF-46B2-B141-9C24-FCCCFE666044}"/>
-              </a:ext>
-            </a:extLst>
-          </p:cNvPr>
-          <p:cNvGraphicFramePr>
-            <a:graphicFrameLocks/>
-          </p:cNvGraphicFramePr>
-          <p:nvPr>
-            <p:extLst>
-              <p:ext uri="{D42A27DB-BD31-4B8C-83A1-F6EECF244321}">
-                <p14:modId xmlns:p14="http://schemas.microsoft.com/office/powerpoint/2010/main" val="3913057921"/>
-              </p:ext>
-            </p:extLst>
-          </p:nvPr>
-        </p:nvGraphicFramePr>
-        <p:xfrm>
-          <a:off x="3725862" y="1346515"/>
-          <a:ext cx="8374698" cy="4711385"/>
-        </p:xfrm>
-        <a:graphic>
-          <a:graphicData uri="http://schemas.openxmlformats.org/drawingml/2006/chart">
-            <c:chart xmlns:c="http://schemas.openxmlformats.org/drawingml/2006/chart" xmlns:r="http://schemas.openxmlformats.org/officeDocument/2006/relationships" r:id="rId3"/>
-          </a:graphicData>
-        </a:graphic>
-      </p:graphicFrame>
-      <p:sp>
-        <p:nvSpPr>
-          <p:cNvPr id="6" name="TextBox 5">
-            <a:extLst>
-              <a:ext uri="{FF2B5EF4-FFF2-40B4-BE49-F238E27FC236}">
-                <a16:creationId xmlns:a16="http://schemas.microsoft.com/office/drawing/2014/main" id="{EA6B60C4-8644-A146-AE06-3E19DD6B7F04}"/>
-              </a:ext>
-            </a:extLst>
-          </p:cNvPr>
-          <p:cNvSpPr txBox="1"/>
-          <p:nvPr/>
-        </p:nvSpPr>
-        <p:spPr>
-          <a:xfrm>
-            <a:off x="442913" y="6339840"/>
-            <a:ext cx="4937760" cy="246221"/>
-          </a:xfrm>
-          <a:prstGeom prst="rect">
-            <a:avLst/>
-          </a:prstGeom>
-          <a:noFill/>
-        </p:spPr>
-        <p:txBody>
-          <a:bodyPr wrap="square" rtlCol="0">
-            <a:spAutoFit/>
-          </a:bodyPr>
-          <a:lstStyle/>
-          <a:p>
-            <a:r>
-              <a:rPr lang="en-GB" sz="1000" dirty="0">
-                <a:hlinkClick r:id="rId4"/>
-              </a:rPr>
-              <a:t>https://pubmed.ncbi.nlm.nih.gov/31477764/</a:t>
-            </a:r>
-            <a:endParaRPr lang="en-GB" sz="1000" dirty="0"/>
-          </a:p>
-        </p:txBody>
-      </p:sp>
-    </p:spTree>
-    <p:extLst>
-      <p:ext uri="{BB962C8B-B14F-4D97-AF65-F5344CB8AC3E}">
-        <p14:creationId xmlns:p14="http://schemas.microsoft.com/office/powerpoint/2010/main" val="4250927214"/>
       </p:ext>
     </p:extLst>
   </p:cSld>
@@ -11585,33 +17412,6 @@
 </file>
 
 <file path=customXml/item1.xml><?xml version="1.0" encoding="utf-8"?>
-<p:properties xmlns:p="http://schemas.microsoft.com/office/2006/metadata/properties" xmlns:xsi="http://www.w3.org/2001/XMLSchema-instance" xmlns:pc="http://schemas.microsoft.com/office/infopath/2007/PartnerControls">
-  <documentManagement>
-    <TaxCatchAll xmlns="73ce610f-b889-47d4-8ab5-c38f623799c9" xsi:nil="true"/>
-    <lcf76f155ced4ddcb4097134ff3c332f xmlns="e236f8d0-c4c0-4f47-ae05-f87aea30adc7">
-      <Terms xmlns="http://schemas.microsoft.com/office/infopath/2007/PartnerControls"/>
-    </lcf76f155ced4ddcb4097134ff3c332f>
-    <SharedWithUsers xmlns="73ce610f-b889-47d4-8ab5-c38f623799c9">
-      <UserInfo>
-        <DisplayName/>
-        <AccountId xsi:nil="true"/>
-        <AccountType/>
-      </UserInfo>
-    </SharedWithUsers>
-  </documentManagement>
-</p:properties>
-</file>
-
-<file path=customXml/item2.xml><?xml version="1.0" encoding="utf-8"?>
-<?mso-contentType ?>
-<FormTemplates xmlns="http://schemas.microsoft.com/sharepoint/v3/contenttype/forms">
-  <Display>DocumentLibraryForm</Display>
-  <Edit>DocumentLibraryForm</Edit>
-  <New>DocumentLibraryForm</New>
-</FormTemplates>
-</file>
-
-<file path=customXml/item3.xml><?xml version="1.0" encoding="utf-8"?>
 <ct:contentTypeSchema xmlns:ct="http://schemas.microsoft.com/office/2006/metadata/contentType" xmlns:ma="http://schemas.microsoft.com/office/2006/metadata/properties/metaAttributes" ct:_="" ma:_="" ma:contentTypeName="Document" ma:contentTypeID="0x010100814EDCEEC58F924B8688429696C030D2" ma:contentTypeVersion="18" ma:contentTypeDescription="Create a new document." ma:contentTypeScope="" ma:versionID="c313b5a2d9d0a5fb5c195b7077a8f658">
   <xsd:schema xmlns:xsd="http://www.w3.org/2001/XMLSchema" xmlns:xs="http://www.w3.org/2001/XMLSchema" xmlns:p="http://schemas.microsoft.com/office/2006/metadata/properties" xmlns:ns2="e236f8d0-c4c0-4f47-ae05-f87aea30adc7" xmlns:ns3="73ce610f-b889-47d4-8ab5-c38f623799c9" targetNamespace="http://schemas.microsoft.com/office/2006/metadata/properties" ma:root="true" ma:fieldsID="1798fda60419dc9fe449ed5f00b07b3d" ns2:_="" ns3:_="">
     <xsd:import namespace="e236f8d0-c4c0-4f47-ae05-f87aea30adc7"/>
@@ -11866,7 +17666,61 @@
 </ct:contentTypeSchema>
 </file>
 
+<file path=customXml/item2.xml><?xml version="1.0" encoding="utf-8"?>
+<?mso-contentType ?>
+<FormTemplates xmlns="http://schemas.microsoft.com/sharepoint/v3/contenttype/forms">
+  <Display>DocumentLibraryForm</Display>
+  <Edit>DocumentLibraryForm</Edit>
+  <New>DocumentLibraryForm</New>
+</FormTemplates>
+</file>
+
+<file path=customXml/item3.xml><?xml version="1.0" encoding="utf-8"?>
+<p:properties xmlns:p="http://schemas.microsoft.com/office/2006/metadata/properties" xmlns:xsi="http://www.w3.org/2001/XMLSchema-instance" xmlns:pc="http://schemas.microsoft.com/office/infopath/2007/PartnerControls">
+  <documentManagement>
+    <TaxCatchAll xmlns="73ce610f-b889-47d4-8ab5-c38f623799c9" xsi:nil="true"/>
+    <lcf76f155ced4ddcb4097134ff3c332f xmlns="e236f8d0-c4c0-4f47-ae05-f87aea30adc7">
+      <Terms xmlns="http://schemas.microsoft.com/office/infopath/2007/PartnerControls"/>
+    </lcf76f155ced4ddcb4097134ff3c332f>
+    <SharedWithUsers xmlns="73ce610f-b889-47d4-8ab5-c38f623799c9">
+      <UserInfo>
+        <DisplayName/>
+        <AccountId xsi:nil="true"/>
+        <AccountType/>
+      </UserInfo>
+    </SharedWithUsers>
+  </documentManagement>
+</p:properties>
+</file>
+
 <file path=customXml/itemProps1.xml><?xml version="1.0" encoding="utf-8"?>
+<ds:datastoreItem xmlns:ds="http://schemas.openxmlformats.org/officeDocument/2006/customXml" ds:itemID="{03C84C5C-3675-41D8-B929-41E44EDB4389}">
+  <ds:schemaRefs>
+    <ds:schemaRef ds:uri="http://schemas.microsoft.com/office/2006/metadata/contentType"/>
+    <ds:schemaRef ds:uri="http://schemas.microsoft.com/office/2006/metadata/properties/metaAttributes"/>
+    <ds:schemaRef ds:uri="http://www.w3.org/2001/XMLSchema"/>
+    <ds:schemaRef ds:uri="http://schemas.microsoft.com/office/2006/metadata/properties"/>
+    <ds:schemaRef ds:uri="e236f8d0-c4c0-4f47-ae05-f87aea30adc7"/>
+    <ds:schemaRef ds:uri="73ce610f-b889-47d4-8ab5-c38f623799c9"/>
+    <ds:schemaRef ds:uri="http://schemas.microsoft.com/office/2006/documentManagement/types"/>
+    <ds:schemaRef ds:uri="http://schemas.microsoft.com/office/infopath/2007/PartnerControls"/>
+    <ds:schemaRef ds:uri="http://schemas.openxmlformats.org/package/2006/metadata/core-properties"/>
+    <ds:schemaRef ds:uri="http://purl.org/dc/elements/1.1/"/>
+    <ds:schemaRef ds:uri="http://purl.org/dc/terms/"/>
+    <ds:schemaRef ds:uri="http://schemas.microsoft.com/internal/obd"/>
+  </ds:schemaRefs>
+</ds:datastoreItem>
+</file>
+
+<file path=customXml/itemProps2.xml><?xml version="1.0" encoding="utf-8"?>
+<ds:datastoreItem xmlns:ds="http://schemas.openxmlformats.org/officeDocument/2006/customXml" ds:itemID="{3B18B9A9-589C-4AB1-A77F-C0696A20FDEA}">
+  <ds:schemaRefs>
+    <ds:schemaRef ds:uri="http://schemas.microsoft.com/sharepoint/v3/contenttype/forms"/>
+  </ds:schemaRefs>
+</ds:datastoreItem>
+</file>
+
+<file path=customXml/itemProps3.xml><?xml version="1.0" encoding="utf-8"?>
 <ds:datastoreItem xmlns:ds="http://schemas.openxmlformats.org/officeDocument/2006/customXml" ds:itemID="{2A06F776-15E1-4608-A05B-E8CEEC2417C7}">
   <ds:schemaRefs>
     <ds:schemaRef ds:uri="http://purl.org/dc/dcmitype/"/>
@@ -11883,31 +17737,4 @@
     <ds:schemaRef ds:uri="e236f8d0-c4c0-4f47-ae05-f87aea30adc7"/>
   </ds:schemaRefs>
 </ds:datastoreItem>
-</file>
-
-<file path=customXml/itemProps2.xml><?xml version="1.0" encoding="utf-8"?>
-<ds:datastoreItem xmlns:ds="http://schemas.openxmlformats.org/officeDocument/2006/customXml" ds:itemID="{3B18B9A9-589C-4AB1-A77F-C0696A20FDEA}">
-  <ds:schemaRefs>
-    <ds:schemaRef ds:uri="http://schemas.microsoft.com/sharepoint/v3/contenttype/forms"/>
-  </ds:schemaRefs>
-</ds:datastoreItem>
-</file>
-
-<file path=customXml/itemProps3.xml><?xml version="1.0" encoding="utf-8"?>
-<ds:datastoreItem xmlns:ds="http://schemas.openxmlformats.org/officeDocument/2006/customXml" ds:itemID="{03C84C5C-3675-41D8-B929-41E44EDB4389}">
-  <ds:schemaRefs>
-    <ds:schemaRef ds:uri="http://schemas.microsoft.com/office/2006/metadata/contentType"/>
-    <ds:schemaRef ds:uri="http://schemas.microsoft.com/office/2006/metadata/properties/metaAttributes"/>
-    <ds:schemaRef ds:uri="http://www.w3.org/2001/XMLSchema"/>
-    <ds:schemaRef ds:uri="http://schemas.microsoft.com/office/2006/metadata/properties"/>
-    <ds:schemaRef ds:uri="e236f8d0-c4c0-4f47-ae05-f87aea30adc7"/>
-    <ds:schemaRef ds:uri="73ce610f-b889-47d4-8ab5-c38f623799c9"/>
-    <ds:schemaRef ds:uri="http://schemas.microsoft.com/office/2006/documentManagement/types"/>
-    <ds:schemaRef ds:uri="http://schemas.microsoft.com/office/infopath/2007/PartnerControls"/>
-    <ds:schemaRef ds:uri="http://schemas.openxmlformats.org/package/2006/metadata/core-properties"/>
-    <ds:schemaRef ds:uri="http://purl.org/dc/elements/1.1/"/>
-    <ds:schemaRef ds:uri="http://purl.org/dc/terms/"/>
-    <ds:schemaRef ds:uri="http://schemas.microsoft.com/internal/obd"/>
-  </ds:schemaRefs>
-</ds:datastoreItem>
 </file>